--- a/GoogleColab.part3.pptx
+++ b/GoogleColab.part3.pptx
@@ -5,7 +5,7 @@
     <p:sldMasterId id="2147483660" r:id="rId1"/>
   </p:sldMasterIdLst>
   <p:notesMasterIdLst>
-    <p:notesMasterId r:id="rId16"/>
+    <p:notesMasterId r:id="rId21"/>
   </p:notesMasterIdLst>
   <p:sldIdLst>
     <p:sldId id="256" r:id="rId2"/>
@@ -21,7 +21,12 @@
     <p:sldId id="338" r:id="rId12"/>
     <p:sldId id="339" r:id="rId13"/>
     <p:sldId id="329" r:id="rId14"/>
-    <p:sldId id="319" r:id="rId15"/>
+    <p:sldId id="340" r:id="rId15"/>
+    <p:sldId id="342" r:id="rId16"/>
+    <p:sldId id="344" r:id="rId17"/>
+    <p:sldId id="343" r:id="rId18"/>
+    <p:sldId id="341" r:id="rId19"/>
+    <p:sldId id="319" r:id="rId20"/>
   </p:sldIdLst>
   <p:sldSz cx="12192000" cy="6858000"/>
   <p:notesSz cx="6802438" cy="9937750"/>
@@ -142,6 +147,19 @@
             <p14:sldId id="338"/>
             <p14:sldId id="339"/>
             <p14:sldId id="329"/>
+          </p14:sldIdLst>
+        </p14:section>
+        <p14:section name="random_plot.ipynb" id="{C65E1B47-33D0-4CF9-8802-6CA23082522A}">
+          <p14:sldIdLst>
+            <p14:sldId id="340"/>
+            <p14:sldId id="342"/>
+            <p14:sldId id="344"/>
+            <p14:sldId id="343"/>
+          </p14:sldIdLst>
+        </p14:section>
+        <p14:section name="inu" id="{8C03D738-5D74-49CC-8196-FD9C8F38B3DD}">
+          <p14:sldIdLst>
+            <p14:sldId id="341"/>
           </p14:sldIdLst>
         </p14:section>
         <p14:section name="参考文献" id="{CFFDC787-557B-4910-97C6-D64501BECE89}">
@@ -604,7 +622,7 @@
           <a:p>
             <a:fld id="{5A38E0EF-4404-48A5-A14D-C28912D88EC3}" type="slidenum">
               <a:rPr kumimoji="1" lang="ja-JP" altLang="en-US" smtClean="0"/>
-              <a:t>3</a:t>
+              <a:t>1</a:t>
             </a:fld>
             <a:endParaRPr kumimoji="1" lang="ja-JP" altLang="en-US"/>
           </a:p>
@@ -613,7 +631,7 @@
     </p:spTree>
     <p:extLst>
       <p:ext uri="{BB962C8B-B14F-4D97-AF65-F5344CB8AC3E}">
-        <p14:creationId xmlns:p14="http://schemas.microsoft.com/office/powerpoint/2010/main" val="2153407079"/>
+        <p14:creationId xmlns:p14="http://schemas.microsoft.com/office/powerpoint/2010/main" val="2944361517"/>
       </p:ext>
     </p:extLst>
   </p:cSld>
@@ -712,6 +730,114 @@
           <a:p>
             <a:fld id="{5A38E0EF-4404-48A5-A14D-C28912D88EC3}" type="slidenum">
               <a:rPr kumimoji="1" lang="ja-JP" altLang="en-US" smtClean="0"/>
+              <a:t>11</a:t>
+            </a:fld>
+            <a:endParaRPr kumimoji="1" lang="ja-JP" altLang="en-US"/>
+          </a:p>
+        </p:txBody>
+      </p:sp>
+    </p:spTree>
+    <p:extLst>
+      <p:ext uri="{BB962C8B-B14F-4D97-AF65-F5344CB8AC3E}">
+        <p14:creationId xmlns:p14="http://schemas.microsoft.com/office/powerpoint/2010/main" val="1030918395"/>
+      </p:ext>
+    </p:extLst>
+  </p:cSld>
+  <p:clrMapOvr>
+    <a:masterClrMapping/>
+  </p:clrMapOvr>
+</p:notes>
+</file>
+
+<file path=ppt/notesSlides/notesSlide11.xml><?xml version="1.0" encoding="utf-8"?>
+<p:notes xmlns:a="http://schemas.openxmlformats.org/drawingml/2006/main" xmlns:r="http://schemas.openxmlformats.org/officeDocument/2006/relationships" xmlns:p="http://schemas.openxmlformats.org/presentationml/2006/main">
+  <p:cSld>
+    <p:spTree>
+      <p:nvGrpSpPr>
+        <p:cNvPr id="1" name="">
+          <a:extLst>
+            <a:ext uri="{FF2B5EF4-FFF2-40B4-BE49-F238E27FC236}">
+              <a16:creationId xmlns:a16="http://schemas.microsoft.com/office/drawing/2014/main" id="{9D7B724B-2EC1-7BE8-607D-B8766F2975D8}"/>
+            </a:ext>
+          </a:extLst>
+        </p:cNvPr>
+        <p:cNvGrpSpPr/>
+        <p:nvPr/>
+      </p:nvGrpSpPr>
+      <p:grpSpPr>
+        <a:xfrm>
+          <a:off x="0" y="0"/>
+          <a:ext cx="0" cy="0"/>
+          <a:chOff x="0" y="0"/>
+          <a:chExt cx="0" cy="0"/>
+        </a:xfrm>
+      </p:grpSpPr>
+      <p:sp>
+        <p:nvSpPr>
+          <p:cNvPr id="2" name="スライド イメージ プレースホルダー 1">
+            <a:extLst>
+              <a:ext uri="{FF2B5EF4-FFF2-40B4-BE49-F238E27FC236}">
+                <a16:creationId xmlns:a16="http://schemas.microsoft.com/office/drawing/2014/main" id="{6199DC3F-77FD-7DC8-007B-B750AB1618A3}"/>
+              </a:ext>
+            </a:extLst>
+          </p:cNvPr>
+          <p:cNvSpPr>
+            <a:spLocks noGrp="1" noRot="1" noChangeAspect="1"/>
+          </p:cNvSpPr>
+          <p:nvPr>
+            <p:ph type="sldImg"/>
+          </p:nvPr>
+        </p:nvSpPr>
+        <p:spPr/>
+      </p:sp>
+      <p:sp>
+        <p:nvSpPr>
+          <p:cNvPr id="3" name="ノート プレースホルダー 2">
+            <a:extLst>
+              <a:ext uri="{FF2B5EF4-FFF2-40B4-BE49-F238E27FC236}">
+                <a16:creationId xmlns:a16="http://schemas.microsoft.com/office/drawing/2014/main" id="{AE63A146-B08B-7AE1-025C-23D0F1CAB0AC}"/>
+              </a:ext>
+            </a:extLst>
+          </p:cNvPr>
+          <p:cNvSpPr>
+            <a:spLocks noGrp="1"/>
+          </p:cNvSpPr>
+          <p:nvPr>
+            <p:ph type="body" idx="1"/>
+          </p:nvPr>
+        </p:nvSpPr>
+        <p:spPr/>
+        <p:txBody>
+          <a:bodyPr/>
+          <a:lstStyle/>
+          <a:p>
+            <a:endParaRPr kumimoji="1" lang="ja-JP" altLang="en-US" dirty="0"/>
+          </a:p>
+        </p:txBody>
+      </p:sp>
+      <p:sp>
+        <p:nvSpPr>
+          <p:cNvPr id="4" name="スライド番号プレースホルダー 3">
+            <a:extLst>
+              <a:ext uri="{FF2B5EF4-FFF2-40B4-BE49-F238E27FC236}">
+                <a16:creationId xmlns:a16="http://schemas.microsoft.com/office/drawing/2014/main" id="{86EFE370-A7B0-D0E8-E34E-97F8434B878E}"/>
+              </a:ext>
+            </a:extLst>
+          </p:cNvPr>
+          <p:cNvSpPr>
+            <a:spLocks noGrp="1"/>
+          </p:cNvSpPr>
+          <p:nvPr>
+            <p:ph type="sldNum" sz="quarter" idx="5"/>
+          </p:nvPr>
+        </p:nvSpPr>
+        <p:spPr/>
+        <p:txBody>
+          <a:bodyPr/>
+          <a:lstStyle/>
+          <a:p>
+            <a:fld id="{5A38E0EF-4404-48A5-A14D-C28912D88EC3}" type="slidenum">
+              <a:rPr kumimoji="1" lang="ja-JP" altLang="en-US" smtClean="0"/>
               <a:t>12</a:t>
             </a:fld>
             <a:endParaRPr kumimoji="1" lang="ja-JP" altLang="en-US"/>
@@ -731,7 +857,631 @@
 </p:notes>
 </file>
 
+<file path=ppt/notesSlides/notesSlide12.xml><?xml version="1.0" encoding="utf-8"?>
+<p:notes xmlns:a="http://schemas.openxmlformats.org/drawingml/2006/main" xmlns:r="http://schemas.openxmlformats.org/officeDocument/2006/relationships" xmlns:p="http://schemas.openxmlformats.org/presentationml/2006/main">
+  <p:cSld>
+    <p:spTree>
+      <p:nvGrpSpPr>
+        <p:cNvPr id="1" name="">
+          <a:extLst>
+            <a:ext uri="{FF2B5EF4-FFF2-40B4-BE49-F238E27FC236}">
+              <a16:creationId xmlns:a16="http://schemas.microsoft.com/office/drawing/2014/main" id="{28AB5236-3B77-F39E-B3CD-41D00F8F62CC}"/>
+            </a:ext>
+          </a:extLst>
+        </p:cNvPr>
+        <p:cNvGrpSpPr/>
+        <p:nvPr/>
+      </p:nvGrpSpPr>
+      <p:grpSpPr>
+        <a:xfrm>
+          <a:off x="0" y="0"/>
+          <a:ext cx="0" cy="0"/>
+          <a:chOff x="0" y="0"/>
+          <a:chExt cx="0" cy="0"/>
+        </a:xfrm>
+      </p:grpSpPr>
+      <p:sp>
+        <p:nvSpPr>
+          <p:cNvPr id="2" name="スライド イメージ プレースホルダー 1">
+            <a:extLst>
+              <a:ext uri="{FF2B5EF4-FFF2-40B4-BE49-F238E27FC236}">
+                <a16:creationId xmlns:a16="http://schemas.microsoft.com/office/drawing/2014/main" id="{546283B0-DE2B-2F05-4A52-3BE2444F7F00}"/>
+              </a:ext>
+            </a:extLst>
+          </p:cNvPr>
+          <p:cNvSpPr>
+            <a:spLocks noGrp="1" noRot="1" noChangeAspect="1"/>
+          </p:cNvSpPr>
+          <p:nvPr>
+            <p:ph type="sldImg"/>
+          </p:nvPr>
+        </p:nvSpPr>
+        <p:spPr/>
+      </p:sp>
+      <p:sp>
+        <p:nvSpPr>
+          <p:cNvPr id="3" name="ノート プレースホルダー 2">
+            <a:extLst>
+              <a:ext uri="{FF2B5EF4-FFF2-40B4-BE49-F238E27FC236}">
+                <a16:creationId xmlns:a16="http://schemas.microsoft.com/office/drawing/2014/main" id="{897643AE-63C1-9B59-DB88-A8F008C89152}"/>
+              </a:ext>
+            </a:extLst>
+          </p:cNvPr>
+          <p:cNvSpPr>
+            <a:spLocks noGrp="1"/>
+          </p:cNvSpPr>
+          <p:nvPr>
+            <p:ph type="body" idx="1"/>
+          </p:nvPr>
+        </p:nvSpPr>
+        <p:spPr/>
+        <p:txBody>
+          <a:bodyPr/>
+          <a:lstStyle/>
+          <a:p>
+            <a:endParaRPr kumimoji="1" lang="ja-JP" altLang="en-US" dirty="0"/>
+          </a:p>
+        </p:txBody>
+      </p:sp>
+      <p:sp>
+        <p:nvSpPr>
+          <p:cNvPr id="4" name="スライド番号プレースホルダー 3">
+            <a:extLst>
+              <a:ext uri="{FF2B5EF4-FFF2-40B4-BE49-F238E27FC236}">
+                <a16:creationId xmlns:a16="http://schemas.microsoft.com/office/drawing/2014/main" id="{ACCFACFF-03D5-20DD-DAAE-67C3BE254C21}"/>
+              </a:ext>
+            </a:extLst>
+          </p:cNvPr>
+          <p:cNvSpPr>
+            <a:spLocks noGrp="1"/>
+          </p:cNvSpPr>
+          <p:nvPr>
+            <p:ph type="sldNum" sz="quarter" idx="5"/>
+          </p:nvPr>
+        </p:nvSpPr>
+        <p:spPr/>
+        <p:txBody>
+          <a:bodyPr/>
+          <a:lstStyle/>
+          <a:p>
+            <a:fld id="{5A38E0EF-4404-48A5-A14D-C28912D88EC3}" type="slidenum">
+              <a:rPr kumimoji="1" lang="ja-JP" altLang="en-US" smtClean="0"/>
+              <a:t>14</a:t>
+            </a:fld>
+            <a:endParaRPr kumimoji="1" lang="ja-JP" altLang="en-US"/>
+          </a:p>
+        </p:txBody>
+      </p:sp>
+    </p:spTree>
+    <p:extLst>
+      <p:ext uri="{BB962C8B-B14F-4D97-AF65-F5344CB8AC3E}">
+        <p14:creationId xmlns:p14="http://schemas.microsoft.com/office/powerpoint/2010/main" val="4221826506"/>
+      </p:ext>
+    </p:extLst>
+  </p:cSld>
+  <p:clrMapOvr>
+    <a:masterClrMapping/>
+  </p:clrMapOvr>
+</p:notes>
+</file>
+
+<file path=ppt/notesSlides/notesSlide13.xml><?xml version="1.0" encoding="utf-8"?>
+<p:notes xmlns:a="http://schemas.openxmlformats.org/drawingml/2006/main" xmlns:r="http://schemas.openxmlformats.org/officeDocument/2006/relationships" xmlns:p="http://schemas.openxmlformats.org/presentationml/2006/main">
+  <p:cSld>
+    <p:spTree>
+      <p:nvGrpSpPr>
+        <p:cNvPr id="1" name="">
+          <a:extLst>
+            <a:ext uri="{FF2B5EF4-FFF2-40B4-BE49-F238E27FC236}">
+              <a16:creationId xmlns:a16="http://schemas.microsoft.com/office/drawing/2014/main" id="{28AB5236-3B77-F39E-B3CD-41D00F8F62CC}"/>
+            </a:ext>
+          </a:extLst>
+        </p:cNvPr>
+        <p:cNvGrpSpPr/>
+        <p:nvPr/>
+      </p:nvGrpSpPr>
+      <p:grpSpPr>
+        <a:xfrm>
+          <a:off x="0" y="0"/>
+          <a:ext cx="0" cy="0"/>
+          <a:chOff x="0" y="0"/>
+          <a:chExt cx="0" cy="0"/>
+        </a:xfrm>
+      </p:grpSpPr>
+      <p:sp>
+        <p:nvSpPr>
+          <p:cNvPr id="2" name="スライド イメージ プレースホルダー 1">
+            <a:extLst>
+              <a:ext uri="{FF2B5EF4-FFF2-40B4-BE49-F238E27FC236}">
+                <a16:creationId xmlns:a16="http://schemas.microsoft.com/office/drawing/2014/main" id="{546283B0-DE2B-2F05-4A52-3BE2444F7F00}"/>
+              </a:ext>
+            </a:extLst>
+          </p:cNvPr>
+          <p:cNvSpPr>
+            <a:spLocks noGrp="1" noRot="1" noChangeAspect="1"/>
+          </p:cNvSpPr>
+          <p:nvPr>
+            <p:ph type="sldImg"/>
+          </p:nvPr>
+        </p:nvSpPr>
+        <p:spPr/>
+      </p:sp>
+      <p:sp>
+        <p:nvSpPr>
+          <p:cNvPr id="3" name="ノート プレースホルダー 2">
+            <a:extLst>
+              <a:ext uri="{FF2B5EF4-FFF2-40B4-BE49-F238E27FC236}">
+                <a16:creationId xmlns:a16="http://schemas.microsoft.com/office/drawing/2014/main" id="{897643AE-63C1-9B59-DB88-A8F008C89152}"/>
+              </a:ext>
+            </a:extLst>
+          </p:cNvPr>
+          <p:cNvSpPr>
+            <a:spLocks noGrp="1"/>
+          </p:cNvSpPr>
+          <p:nvPr>
+            <p:ph type="body" idx="1"/>
+          </p:nvPr>
+        </p:nvSpPr>
+        <p:spPr/>
+        <p:txBody>
+          <a:bodyPr/>
+          <a:lstStyle/>
+          <a:p>
+            <a:endParaRPr kumimoji="1" lang="ja-JP" altLang="en-US" dirty="0"/>
+          </a:p>
+        </p:txBody>
+      </p:sp>
+      <p:sp>
+        <p:nvSpPr>
+          <p:cNvPr id="4" name="スライド番号プレースホルダー 3">
+            <a:extLst>
+              <a:ext uri="{FF2B5EF4-FFF2-40B4-BE49-F238E27FC236}">
+                <a16:creationId xmlns:a16="http://schemas.microsoft.com/office/drawing/2014/main" id="{ACCFACFF-03D5-20DD-DAAE-67C3BE254C21}"/>
+              </a:ext>
+            </a:extLst>
+          </p:cNvPr>
+          <p:cNvSpPr>
+            <a:spLocks noGrp="1"/>
+          </p:cNvSpPr>
+          <p:nvPr>
+            <p:ph type="sldNum" sz="quarter" idx="5"/>
+          </p:nvPr>
+        </p:nvSpPr>
+        <p:spPr/>
+        <p:txBody>
+          <a:bodyPr/>
+          <a:lstStyle/>
+          <a:p>
+            <a:fld id="{5A38E0EF-4404-48A5-A14D-C28912D88EC3}" type="slidenum">
+              <a:rPr kumimoji="1" lang="ja-JP" altLang="en-US" smtClean="0"/>
+              <a:t>15</a:t>
+            </a:fld>
+            <a:endParaRPr kumimoji="1" lang="ja-JP" altLang="en-US"/>
+          </a:p>
+        </p:txBody>
+      </p:sp>
+    </p:spTree>
+    <p:extLst>
+      <p:ext uri="{BB962C8B-B14F-4D97-AF65-F5344CB8AC3E}">
+        <p14:creationId xmlns:p14="http://schemas.microsoft.com/office/powerpoint/2010/main" val="824825581"/>
+      </p:ext>
+    </p:extLst>
+  </p:cSld>
+  <p:clrMapOvr>
+    <a:masterClrMapping/>
+  </p:clrMapOvr>
+</p:notes>
+</file>
+
+<file path=ppt/notesSlides/notesSlide14.xml><?xml version="1.0" encoding="utf-8"?>
+<p:notes xmlns:a="http://schemas.openxmlformats.org/drawingml/2006/main" xmlns:r="http://schemas.openxmlformats.org/officeDocument/2006/relationships" xmlns:p="http://schemas.openxmlformats.org/presentationml/2006/main">
+  <p:cSld>
+    <p:spTree>
+      <p:nvGrpSpPr>
+        <p:cNvPr id="1" name="">
+          <a:extLst>
+            <a:ext uri="{FF2B5EF4-FFF2-40B4-BE49-F238E27FC236}">
+              <a16:creationId xmlns:a16="http://schemas.microsoft.com/office/drawing/2014/main" id="{28AB5236-3B77-F39E-B3CD-41D00F8F62CC}"/>
+            </a:ext>
+          </a:extLst>
+        </p:cNvPr>
+        <p:cNvGrpSpPr/>
+        <p:nvPr/>
+      </p:nvGrpSpPr>
+      <p:grpSpPr>
+        <a:xfrm>
+          <a:off x="0" y="0"/>
+          <a:ext cx="0" cy="0"/>
+          <a:chOff x="0" y="0"/>
+          <a:chExt cx="0" cy="0"/>
+        </a:xfrm>
+      </p:grpSpPr>
+      <p:sp>
+        <p:nvSpPr>
+          <p:cNvPr id="2" name="スライド イメージ プレースホルダー 1">
+            <a:extLst>
+              <a:ext uri="{FF2B5EF4-FFF2-40B4-BE49-F238E27FC236}">
+                <a16:creationId xmlns:a16="http://schemas.microsoft.com/office/drawing/2014/main" id="{546283B0-DE2B-2F05-4A52-3BE2444F7F00}"/>
+              </a:ext>
+            </a:extLst>
+          </p:cNvPr>
+          <p:cNvSpPr>
+            <a:spLocks noGrp="1" noRot="1" noChangeAspect="1"/>
+          </p:cNvSpPr>
+          <p:nvPr>
+            <p:ph type="sldImg"/>
+          </p:nvPr>
+        </p:nvSpPr>
+        <p:spPr/>
+      </p:sp>
+      <p:sp>
+        <p:nvSpPr>
+          <p:cNvPr id="3" name="ノート プレースホルダー 2">
+            <a:extLst>
+              <a:ext uri="{FF2B5EF4-FFF2-40B4-BE49-F238E27FC236}">
+                <a16:creationId xmlns:a16="http://schemas.microsoft.com/office/drawing/2014/main" id="{897643AE-63C1-9B59-DB88-A8F008C89152}"/>
+              </a:ext>
+            </a:extLst>
+          </p:cNvPr>
+          <p:cNvSpPr>
+            <a:spLocks noGrp="1"/>
+          </p:cNvSpPr>
+          <p:nvPr>
+            <p:ph type="body" idx="1"/>
+          </p:nvPr>
+        </p:nvSpPr>
+        <p:spPr/>
+        <p:txBody>
+          <a:bodyPr/>
+          <a:lstStyle/>
+          <a:p>
+            <a:endParaRPr kumimoji="1" lang="ja-JP" altLang="en-US" dirty="0"/>
+          </a:p>
+        </p:txBody>
+      </p:sp>
+      <p:sp>
+        <p:nvSpPr>
+          <p:cNvPr id="4" name="スライド番号プレースホルダー 3">
+            <a:extLst>
+              <a:ext uri="{FF2B5EF4-FFF2-40B4-BE49-F238E27FC236}">
+                <a16:creationId xmlns:a16="http://schemas.microsoft.com/office/drawing/2014/main" id="{ACCFACFF-03D5-20DD-DAAE-67C3BE254C21}"/>
+              </a:ext>
+            </a:extLst>
+          </p:cNvPr>
+          <p:cNvSpPr>
+            <a:spLocks noGrp="1"/>
+          </p:cNvSpPr>
+          <p:nvPr>
+            <p:ph type="sldNum" sz="quarter" idx="5"/>
+          </p:nvPr>
+        </p:nvSpPr>
+        <p:spPr/>
+        <p:txBody>
+          <a:bodyPr/>
+          <a:lstStyle/>
+          <a:p>
+            <a:fld id="{5A38E0EF-4404-48A5-A14D-C28912D88EC3}" type="slidenum">
+              <a:rPr kumimoji="1" lang="ja-JP" altLang="en-US" smtClean="0"/>
+              <a:t>16</a:t>
+            </a:fld>
+            <a:endParaRPr kumimoji="1" lang="ja-JP" altLang="en-US"/>
+          </a:p>
+        </p:txBody>
+      </p:sp>
+    </p:spTree>
+    <p:extLst>
+      <p:ext uri="{BB962C8B-B14F-4D97-AF65-F5344CB8AC3E}">
+        <p14:creationId xmlns:p14="http://schemas.microsoft.com/office/powerpoint/2010/main" val="395689129"/>
+      </p:ext>
+    </p:extLst>
+  </p:cSld>
+  <p:clrMapOvr>
+    <a:masterClrMapping/>
+  </p:clrMapOvr>
+</p:notes>
+</file>
+
+<file path=ppt/notesSlides/notesSlide15.xml><?xml version="1.0" encoding="utf-8"?>
+<p:notes xmlns:a="http://schemas.openxmlformats.org/drawingml/2006/main" xmlns:r="http://schemas.openxmlformats.org/officeDocument/2006/relationships" xmlns:p="http://schemas.openxmlformats.org/presentationml/2006/main">
+  <p:cSld>
+    <p:spTree>
+      <p:nvGrpSpPr>
+        <p:cNvPr id="1" name="">
+          <a:extLst>
+            <a:ext uri="{FF2B5EF4-FFF2-40B4-BE49-F238E27FC236}">
+              <a16:creationId xmlns:a16="http://schemas.microsoft.com/office/drawing/2014/main" id="{28AB5236-3B77-F39E-B3CD-41D00F8F62CC}"/>
+            </a:ext>
+          </a:extLst>
+        </p:cNvPr>
+        <p:cNvGrpSpPr/>
+        <p:nvPr/>
+      </p:nvGrpSpPr>
+      <p:grpSpPr>
+        <a:xfrm>
+          <a:off x="0" y="0"/>
+          <a:ext cx="0" cy="0"/>
+          <a:chOff x="0" y="0"/>
+          <a:chExt cx="0" cy="0"/>
+        </a:xfrm>
+      </p:grpSpPr>
+      <p:sp>
+        <p:nvSpPr>
+          <p:cNvPr id="2" name="スライド イメージ プレースホルダー 1">
+            <a:extLst>
+              <a:ext uri="{FF2B5EF4-FFF2-40B4-BE49-F238E27FC236}">
+                <a16:creationId xmlns:a16="http://schemas.microsoft.com/office/drawing/2014/main" id="{546283B0-DE2B-2F05-4A52-3BE2444F7F00}"/>
+              </a:ext>
+            </a:extLst>
+          </p:cNvPr>
+          <p:cNvSpPr>
+            <a:spLocks noGrp="1" noRot="1" noChangeAspect="1"/>
+          </p:cNvSpPr>
+          <p:nvPr>
+            <p:ph type="sldImg"/>
+          </p:nvPr>
+        </p:nvSpPr>
+        <p:spPr/>
+      </p:sp>
+      <p:sp>
+        <p:nvSpPr>
+          <p:cNvPr id="3" name="ノート プレースホルダー 2">
+            <a:extLst>
+              <a:ext uri="{FF2B5EF4-FFF2-40B4-BE49-F238E27FC236}">
+                <a16:creationId xmlns:a16="http://schemas.microsoft.com/office/drawing/2014/main" id="{897643AE-63C1-9B59-DB88-A8F008C89152}"/>
+              </a:ext>
+            </a:extLst>
+          </p:cNvPr>
+          <p:cNvSpPr>
+            <a:spLocks noGrp="1"/>
+          </p:cNvSpPr>
+          <p:nvPr>
+            <p:ph type="body" idx="1"/>
+          </p:nvPr>
+        </p:nvSpPr>
+        <p:spPr/>
+        <p:txBody>
+          <a:bodyPr/>
+          <a:lstStyle/>
+          <a:p>
+            <a:endParaRPr kumimoji="1" lang="ja-JP" altLang="en-US" dirty="0"/>
+          </a:p>
+        </p:txBody>
+      </p:sp>
+      <p:sp>
+        <p:nvSpPr>
+          <p:cNvPr id="4" name="スライド番号プレースホルダー 3">
+            <a:extLst>
+              <a:ext uri="{FF2B5EF4-FFF2-40B4-BE49-F238E27FC236}">
+                <a16:creationId xmlns:a16="http://schemas.microsoft.com/office/drawing/2014/main" id="{ACCFACFF-03D5-20DD-DAAE-67C3BE254C21}"/>
+              </a:ext>
+            </a:extLst>
+          </p:cNvPr>
+          <p:cNvSpPr>
+            <a:spLocks noGrp="1"/>
+          </p:cNvSpPr>
+          <p:nvPr>
+            <p:ph type="sldNum" sz="quarter" idx="5"/>
+          </p:nvPr>
+        </p:nvSpPr>
+        <p:spPr/>
+        <p:txBody>
+          <a:bodyPr/>
+          <a:lstStyle/>
+          <a:p>
+            <a:fld id="{5A38E0EF-4404-48A5-A14D-C28912D88EC3}" type="slidenum">
+              <a:rPr kumimoji="1" lang="ja-JP" altLang="en-US" smtClean="0"/>
+              <a:t>17</a:t>
+            </a:fld>
+            <a:endParaRPr kumimoji="1" lang="ja-JP" altLang="en-US"/>
+          </a:p>
+        </p:txBody>
+      </p:sp>
+    </p:spTree>
+    <p:extLst>
+      <p:ext uri="{BB962C8B-B14F-4D97-AF65-F5344CB8AC3E}">
+        <p14:creationId xmlns:p14="http://schemas.microsoft.com/office/powerpoint/2010/main" val="3058344052"/>
+      </p:ext>
+    </p:extLst>
+  </p:cSld>
+  <p:clrMapOvr>
+    <a:masterClrMapping/>
+  </p:clrMapOvr>
+</p:notes>
+</file>
+
+<file path=ppt/notesSlides/notesSlide16.xml><?xml version="1.0" encoding="utf-8"?>
+<p:notes xmlns:a="http://schemas.openxmlformats.org/drawingml/2006/main" xmlns:r="http://schemas.openxmlformats.org/officeDocument/2006/relationships" xmlns:p="http://schemas.openxmlformats.org/presentationml/2006/main">
+  <p:cSld>
+    <p:spTree>
+      <p:nvGrpSpPr>
+        <p:cNvPr id="1" name="">
+          <a:extLst>
+            <a:ext uri="{FF2B5EF4-FFF2-40B4-BE49-F238E27FC236}">
+              <a16:creationId xmlns:a16="http://schemas.microsoft.com/office/drawing/2014/main" id="{28AB5236-3B77-F39E-B3CD-41D00F8F62CC}"/>
+            </a:ext>
+          </a:extLst>
+        </p:cNvPr>
+        <p:cNvGrpSpPr/>
+        <p:nvPr/>
+      </p:nvGrpSpPr>
+      <p:grpSpPr>
+        <a:xfrm>
+          <a:off x="0" y="0"/>
+          <a:ext cx="0" cy="0"/>
+          <a:chOff x="0" y="0"/>
+          <a:chExt cx="0" cy="0"/>
+        </a:xfrm>
+      </p:grpSpPr>
+      <p:sp>
+        <p:nvSpPr>
+          <p:cNvPr id="2" name="スライド イメージ プレースホルダー 1">
+            <a:extLst>
+              <a:ext uri="{FF2B5EF4-FFF2-40B4-BE49-F238E27FC236}">
+                <a16:creationId xmlns:a16="http://schemas.microsoft.com/office/drawing/2014/main" id="{546283B0-DE2B-2F05-4A52-3BE2444F7F00}"/>
+              </a:ext>
+            </a:extLst>
+          </p:cNvPr>
+          <p:cNvSpPr>
+            <a:spLocks noGrp="1" noRot="1" noChangeAspect="1"/>
+          </p:cNvSpPr>
+          <p:nvPr>
+            <p:ph type="sldImg"/>
+          </p:nvPr>
+        </p:nvSpPr>
+        <p:spPr/>
+      </p:sp>
+      <p:sp>
+        <p:nvSpPr>
+          <p:cNvPr id="3" name="ノート プレースホルダー 2">
+            <a:extLst>
+              <a:ext uri="{FF2B5EF4-FFF2-40B4-BE49-F238E27FC236}">
+                <a16:creationId xmlns:a16="http://schemas.microsoft.com/office/drawing/2014/main" id="{897643AE-63C1-9B59-DB88-A8F008C89152}"/>
+              </a:ext>
+            </a:extLst>
+          </p:cNvPr>
+          <p:cNvSpPr>
+            <a:spLocks noGrp="1"/>
+          </p:cNvSpPr>
+          <p:nvPr>
+            <p:ph type="body" idx="1"/>
+          </p:nvPr>
+        </p:nvSpPr>
+        <p:spPr/>
+        <p:txBody>
+          <a:bodyPr/>
+          <a:lstStyle/>
+          <a:p>
+            <a:endParaRPr kumimoji="1" lang="ja-JP" altLang="en-US" dirty="0"/>
+          </a:p>
+        </p:txBody>
+      </p:sp>
+      <p:sp>
+        <p:nvSpPr>
+          <p:cNvPr id="4" name="スライド番号プレースホルダー 3">
+            <a:extLst>
+              <a:ext uri="{FF2B5EF4-FFF2-40B4-BE49-F238E27FC236}">
+                <a16:creationId xmlns:a16="http://schemas.microsoft.com/office/drawing/2014/main" id="{ACCFACFF-03D5-20DD-DAAE-67C3BE254C21}"/>
+              </a:ext>
+            </a:extLst>
+          </p:cNvPr>
+          <p:cNvSpPr>
+            <a:spLocks noGrp="1"/>
+          </p:cNvSpPr>
+          <p:nvPr>
+            <p:ph type="sldNum" sz="quarter" idx="5"/>
+          </p:nvPr>
+        </p:nvSpPr>
+        <p:spPr/>
+        <p:txBody>
+          <a:bodyPr/>
+          <a:lstStyle/>
+          <a:p>
+            <a:fld id="{5A38E0EF-4404-48A5-A14D-C28912D88EC3}" type="slidenum">
+              <a:rPr kumimoji="1" lang="ja-JP" altLang="en-US" smtClean="0"/>
+              <a:t>18</a:t>
+            </a:fld>
+            <a:endParaRPr kumimoji="1" lang="ja-JP" altLang="en-US"/>
+          </a:p>
+        </p:txBody>
+      </p:sp>
+    </p:spTree>
+    <p:extLst>
+      <p:ext uri="{BB962C8B-B14F-4D97-AF65-F5344CB8AC3E}">
+        <p14:creationId xmlns:p14="http://schemas.microsoft.com/office/powerpoint/2010/main" val="1908716648"/>
+      </p:ext>
+    </p:extLst>
+  </p:cSld>
+  <p:clrMapOvr>
+    <a:masterClrMapping/>
+  </p:clrMapOvr>
+</p:notes>
+</file>
+
 <file path=ppt/notesSlides/notesSlide2.xml><?xml version="1.0" encoding="utf-8"?>
+<p:notes xmlns:a="http://schemas.openxmlformats.org/drawingml/2006/main" xmlns:r="http://schemas.openxmlformats.org/officeDocument/2006/relationships" xmlns:p="http://schemas.openxmlformats.org/presentationml/2006/main">
+  <p:cSld>
+    <p:spTree>
+      <p:nvGrpSpPr>
+        <p:cNvPr id="1" name=""/>
+        <p:cNvGrpSpPr/>
+        <p:nvPr/>
+      </p:nvGrpSpPr>
+      <p:grpSpPr>
+        <a:xfrm>
+          <a:off x="0" y="0"/>
+          <a:ext cx="0" cy="0"/>
+          <a:chOff x="0" y="0"/>
+          <a:chExt cx="0" cy="0"/>
+        </a:xfrm>
+      </p:grpSpPr>
+      <p:sp>
+        <p:nvSpPr>
+          <p:cNvPr id="2" name="スライド イメージ プレースホルダー 1"/>
+          <p:cNvSpPr>
+            <a:spLocks noGrp="1" noRot="1" noChangeAspect="1"/>
+          </p:cNvSpPr>
+          <p:nvPr>
+            <p:ph type="sldImg"/>
+          </p:nvPr>
+        </p:nvSpPr>
+        <p:spPr/>
+      </p:sp>
+      <p:sp>
+        <p:nvSpPr>
+          <p:cNvPr id="3" name="ノート プレースホルダー 2"/>
+          <p:cNvSpPr>
+            <a:spLocks noGrp="1"/>
+          </p:cNvSpPr>
+          <p:nvPr>
+            <p:ph type="body" idx="1"/>
+          </p:nvPr>
+        </p:nvSpPr>
+        <p:spPr/>
+        <p:txBody>
+          <a:bodyPr/>
+          <a:lstStyle/>
+          <a:p>
+            <a:endParaRPr kumimoji="1" lang="ja-JP" altLang="en-US" dirty="0"/>
+          </a:p>
+        </p:txBody>
+      </p:sp>
+      <p:sp>
+        <p:nvSpPr>
+          <p:cNvPr id="4" name="スライド番号プレースホルダー 3"/>
+          <p:cNvSpPr>
+            <a:spLocks noGrp="1"/>
+          </p:cNvSpPr>
+          <p:nvPr>
+            <p:ph type="sldNum" sz="quarter" idx="5"/>
+          </p:nvPr>
+        </p:nvSpPr>
+        <p:spPr/>
+        <p:txBody>
+          <a:bodyPr/>
+          <a:lstStyle/>
+          <a:p>
+            <a:fld id="{5A38E0EF-4404-48A5-A14D-C28912D88EC3}" type="slidenum">
+              <a:rPr kumimoji="1" lang="ja-JP" altLang="en-US" smtClean="0"/>
+              <a:t>3</a:t>
+            </a:fld>
+            <a:endParaRPr kumimoji="1" lang="ja-JP" altLang="en-US"/>
+          </a:p>
+        </p:txBody>
+      </p:sp>
+    </p:spTree>
+    <p:extLst>
+      <p:ext uri="{BB962C8B-B14F-4D97-AF65-F5344CB8AC3E}">
+        <p14:creationId xmlns:p14="http://schemas.microsoft.com/office/powerpoint/2010/main" val="2153407079"/>
+      </p:ext>
+    </p:extLst>
+  </p:cSld>
+  <p:clrMapOvr>
+    <a:masterClrMapping/>
+  </p:clrMapOvr>
+</p:notes>
+</file>
+
+<file path=ppt/notesSlides/notesSlide3.xml><?xml version="1.0" encoding="utf-8"?>
 <p:notes xmlns:a="http://schemas.openxmlformats.org/drawingml/2006/main" xmlns:r="http://schemas.openxmlformats.org/officeDocument/2006/relationships" xmlns:p="http://schemas.openxmlformats.org/presentationml/2006/main">
   <p:cSld>
     <p:spTree>
@@ -839,7 +1589,7 @@
 </p:notes>
 </file>
 
-<file path=ppt/notesSlides/notesSlide3.xml><?xml version="1.0" encoding="utf-8"?>
+<file path=ppt/notesSlides/notesSlide4.xml><?xml version="1.0" encoding="utf-8"?>
 <p:notes xmlns:a="http://schemas.openxmlformats.org/drawingml/2006/main" xmlns:r="http://schemas.openxmlformats.org/officeDocument/2006/relationships" xmlns:p="http://schemas.openxmlformats.org/presentationml/2006/main">
   <p:cSld>
     <p:spTree>
@@ -938,114 +1688,6 @@
     <p:extLst>
       <p:ext uri="{BB962C8B-B14F-4D97-AF65-F5344CB8AC3E}">
         <p14:creationId xmlns:p14="http://schemas.microsoft.com/office/powerpoint/2010/main" val="1140429375"/>
-      </p:ext>
-    </p:extLst>
-  </p:cSld>
-  <p:clrMapOvr>
-    <a:masterClrMapping/>
-  </p:clrMapOvr>
-</p:notes>
-</file>
-
-<file path=ppt/notesSlides/notesSlide4.xml><?xml version="1.0" encoding="utf-8"?>
-<p:notes xmlns:a="http://schemas.openxmlformats.org/drawingml/2006/main" xmlns:r="http://schemas.openxmlformats.org/officeDocument/2006/relationships" xmlns:p="http://schemas.openxmlformats.org/presentationml/2006/main">
-  <p:cSld>
-    <p:spTree>
-      <p:nvGrpSpPr>
-        <p:cNvPr id="1" name="">
-          <a:extLst>
-            <a:ext uri="{FF2B5EF4-FFF2-40B4-BE49-F238E27FC236}">
-              <a16:creationId xmlns:a16="http://schemas.microsoft.com/office/drawing/2014/main" id="{28AB5236-3B77-F39E-B3CD-41D00F8F62CC}"/>
-            </a:ext>
-          </a:extLst>
-        </p:cNvPr>
-        <p:cNvGrpSpPr/>
-        <p:nvPr/>
-      </p:nvGrpSpPr>
-      <p:grpSpPr>
-        <a:xfrm>
-          <a:off x="0" y="0"/>
-          <a:ext cx="0" cy="0"/>
-          <a:chOff x="0" y="0"/>
-          <a:chExt cx="0" cy="0"/>
-        </a:xfrm>
-      </p:grpSpPr>
-      <p:sp>
-        <p:nvSpPr>
-          <p:cNvPr id="2" name="スライド イメージ プレースホルダー 1">
-            <a:extLst>
-              <a:ext uri="{FF2B5EF4-FFF2-40B4-BE49-F238E27FC236}">
-                <a16:creationId xmlns:a16="http://schemas.microsoft.com/office/drawing/2014/main" id="{546283B0-DE2B-2F05-4A52-3BE2444F7F00}"/>
-              </a:ext>
-            </a:extLst>
-          </p:cNvPr>
-          <p:cNvSpPr>
-            <a:spLocks noGrp="1" noRot="1" noChangeAspect="1"/>
-          </p:cNvSpPr>
-          <p:nvPr>
-            <p:ph type="sldImg"/>
-          </p:nvPr>
-        </p:nvSpPr>
-        <p:spPr/>
-      </p:sp>
-      <p:sp>
-        <p:nvSpPr>
-          <p:cNvPr id="3" name="ノート プレースホルダー 2">
-            <a:extLst>
-              <a:ext uri="{FF2B5EF4-FFF2-40B4-BE49-F238E27FC236}">
-                <a16:creationId xmlns:a16="http://schemas.microsoft.com/office/drawing/2014/main" id="{897643AE-63C1-9B59-DB88-A8F008C89152}"/>
-              </a:ext>
-            </a:extLst>
-          </p:cNvPr>
-          <p:cNvSpPr>
-            <a:spLocks noGrp="1"/>
-          </p:cNvSpPr>
-          <p:nvPr>
-            <p:ph type="body" idx="1"/>
-          </p:nvPr>
-        </p:nvSpPr>
-        <p:spPr/>
-        <p:txBody>
-          <a:bodyPr/>
-          <a:lstStyle/>
-          <a:p>
-            <a:endParaRPr kumimoji="1" lang="ja-JP" altLang="en-US" dirty="0"/>
-          </a:p>
-        </p:txBody>
-      </p:sp>
-      <p:sp>
-        <p:nvSpPr>
-          <p:cNvPr id="4" name="スライド番号プレースホルダー 3">
-            <a:extLst>
-              <a:ext uri="{FF2B5EF4-FFF2-40B4-BE49-F238E27FC236}">
-                <a16:creationId xmlns:a16="http://schemas.microsoft.com/office/drawing/2014/main" id="{ACCFACFF-03D5-20DD-DAAE-67C3BE254C21}"/>
-              </a:ext>
-            </a:extLst>
-          </p:cNvPr>
-          <p:cNvSpPr>
-            <a:spLocks noGrp="1"/>
-          </p:cNvSpPr>
-          <p:nvPr>
-            <p:ph type="sldNum" sz="quarter" idx="5"/>
-          </p:nvPr>
-        </p:nvSpPr>
-        <p:spPr/>
-        <p:txBody>
-          <a:bodyPr/>
-          <a:lstStyle/>
-          <a:p>
-            <a:fld id="{5A38E0EF-4404-48A5-A14D-C28912D88EC3}" type="slidenum">
-              <a:rPr kumimoji="1" lang="ja-JP" altLang="en-US" smtClean="0"/>
-              <a:t>6</a:t>
-            </a:fld>
-            <a:endParaRPr kumimoji="1" lang="ja-JP" altLang="en-US"/>
-          </a:p>
-        </p:txBody>
-      </p:sp>
-    </p:spTree>
-    <p:extLst>
-      <p:ext uri="{BB962C8B-B14F-4D97-AF65-F5344CB8AC3E}">
-        <p14:creationId xmlns:p14="http://schemas.microsoft.com/office/powerpoint/2010/main" val="2473668261"/>
       </p:ext>
     </p:extLst>
   </p:cSld>
@@ -1144,7 +1786,7 @@
           <a:p>
             <a:fld id="{5A38E0EF-4404-48A5-A14D-C28912D88EC3}" type="slidenum">
               <a:rPr kumimoji="1" lang="ja-JP" altLang="en-US" smtClean="0"/>
-              <a:t>7</a:t>
+              <a:t>6</a:t>
             </a:fld>
             <a:endParaRPr kumimoji="1" lang="ja-JP" altLang="en-US"/>
           </a:p>
@@ -1153,7 +1795,7 @@
     </p:spTree>
     <p:extLst>
       <p:ext uri="{BB962C8B-B14F-4D97-AF65-F5344CB8AC3E}">
-        <p14:creationId xmlns:p14="http://schemas.microsoft.com/office/powerpoint/2010/main" val="174018214"/>
+        <p14:creationId xmlns:p14="http://schemas.microsoft.com/office/powerpoint/2010/main" val="2473668261"/>
       </p:ext>
     </p:extLst>
   </p:cSld>
@@ -1171,7 +1813,7 @@
         <p:cNvPr id="1" name="">
           <a:extLst>
             <a:ext uri="{FF2B5EF4-FFF2-40B4-BE49-F238E27FC236}">
-              <a16:creationId xmlns:a16="http://schemas.microsoft.com/office/drawing/2014/main" id="{9D7B724B-2EC1-7BE8-607D-B8766F2975D8}"/>
+              <a16:creationId xmlns:a16="http://schemas.microsoft.com/office/drawing/2014/main" id="{28AB5236-3B77-F39E-B3CD-41D00F8F62CC}"/>
             </a:ext>
           </a:extLst>
         </p:cNvPr>
@@ -1191,7 +1833,7 @@
           <p:cNvPr id="2" name="スライド イメージ プレースホルダー 1">
             <a:extLst>
               <a:ext uri="{FF2B5EF4-FFF2-40B4-BE49-F238E27FC236}">
-                <a16:creationId xmlns:a16="http://schemas.microsoft.com/office/drawing/2014/main" id="{6199DC3F-77FD-7DC8-007B-B750AB1618A3}"/>
+                <a16:creationId xmlns:a16="http://schemas.microsoft.com/office/drawing/2014/main" id="{546283B0-DE2B-2F05-4A52-3BE2444F7F00}"/>
               </a:ext>
             </a:extLst>
           </p:cNvPr>
@@ -1209,7 +1851,7 @@
           <p:cNvPr id="3" name="ノート プレースホルダー 2">
             <a:extLst>
               <a:ext uri="{FF2B5EF4-FFF2-40B4-BE49-F238E27FC236}">
-                <a16:creationId xmlns:a16="http://schemas.microsoft.com/office/drawing/2014/main" id="{AE63A146-B08B-7AE1-025C-23D0F1CAB0AC}"/>
+                <a16:creationId xmlns:a16="http://schemas.microsoft.com/office/drawing/2014/main" id="{897643AE-63C1-9B59-DB88-A8F008C89152}"/>
               </a:ext>
             </a:extLst>
           </p:cNvPr>
@@ -1234,7 +1876,7 @@
           <p:cNvPr id="4" name="スライド番号プレースホルダー 3">
             <a:extLst>
               <a:ext uri="{FF2B5EF4-FFF2-40B4-BE49-F238E27FC236}">
-                <a16:creationId xmlns:a16="http://schemas.microsoft.com/office/drawing/2014/main" id="{86EFE370-A7B0-D0E8-E34E-97F8434B878E}"/>
+                <a16:creationId xmlns:a16="http://schemas.microsoft.com/office/drawing/2014/main" id="{ACCFACFF-03D5-20DD-DAAE-67C3BE254C21}"/>
               </a:ext>
             </a:extLst>
           </p:cNvPr>
@@ -1252,7 +1894,7 @@
           <a:p>
             <a:fld id="{5A38E0EF-4404-48A5-A14D-C28912D88EC3}" type="slidenum">
               <a:rPr kumimoji="1" lang="ja-JP" altLang="en-US" smtClean="0"/>
-              <a:t>8</a:t>
+              <a:t>7</a:t>
             </a:fld>
             <a:endParaRPr kumimoji="1" lang="ja-JP" altLang="en-US"/>
           </a:p>
@@ -1261,7 +1903,7 @@
     </p:spTree>
     <p:extLst>
       <p:ext uri="{BB962C8B-B14F-4D97-AF65-F5344CB8AC3E}">
-        <p14:creationId xmlns:p14="http://schemas.microsoft.com/office/powerpoint/2010/main" val="3397265054"/>
+        <p14:creationId xmlns:p14="http://schemas.microsoft.com/office/powerpoint/2010/main" val="174018214"/>
       </p:ext>
     </p:extLst>
   </p:cSld>
@@ -1360,7 +2002,7 @@
           <a:p>
             <a:fld id="{5A38E0EF-4404-48A5-A14D-C28912D88EC3}" type="slidenum">
               <a:rPr kumimoji="1" lang="ja-JP" altLang="en-US" smtClean="0"/>
-              <a:t>9</a:t>
+              <a:t>8</a:t>
             </a:fld>
             <a:endParaRPr kumimoji="1" lang="ja-JP" altLang="en-US"/>
           </a:p>
@@ -1369,7 +2011,7 @@
     </p:spTree>
     <p:extLst>
       <p:ext uri="{BB962C8B-B14F-4D97-AF65-F5344CB8AC3E}">
-        <p14:creationId xmlns:p14="http://schemas.microsoft.com/office/powerpoint/2010/main" val="2995545719"/>
+        <p14:creationId xmlns:p14="http://schemas.microsoft.com/office/powerpoint/2010/main" val="3397265054"/>
       </p:ext>
     </p:extLst>
   </p:cSld>
@@ -1468,7 +2110,7 @@
           <a:p>
             <a:fld id="{5A38E0EF-4404-48A5-A14D-C28912D88EC3}" type="slidenum">
               <a:rPr kumimoji="1" lang="ja-JP" altLang="en-US" smtClean="0"/>
-              <a:t>10</a:t>
+              <a:t>9</a:t>
             </a:fld>
             <a:endParaRPr kumimoji="1" lang="ja-JP" altLang="en-US"/>
           </a:p>
@@ -1477,7 +2119,7 @@
     </p:spTree>
     <p:extLst>
       <p:ext uri="{BB962C8B-B14F-4D97-AF65-F5344CB8AC3E}">
-        <p14:creationId xmlns:p14="http://schemas.microsoft.com/office/powerpoint/2010/main" val="1769612358"/>
+        <p14:creationId xmlns:p14="http://schemas.microsoft.com/office/powerpoint/2010/main" val="2995545719"/>
       </p:ext>
     </p:extLst>
   </p:cSld>
@@ -1576,7 +2218,7 @@
           <a:p>
             <a:fld id="{5A38E0EF-4404-48A5-A14D-C28912D88EC3}" type="slidenum">
               <a:rPr kumimoji="1" lang="ja-JP" altLang="en-US" smtClean="0"/>
-              <a:t>11</a:t>
+              <a:t>10</a:t>
             </a:fld>
             <a:endParaRPr kumimoji="1" lang="ja-JP" altLang="en-US"/>
           </a:p>
@@ -1585,7 +2227,7 @@
     </p:spTree>
     <p:extLst>
       <p:ext uri="{BB962C8B-B14F-4D97-AF65-F5344CB8AC3E}">
-        <p14:creationId xmlns:p14="http://schemas.microsoft.com/office/powerpoint/2010/main" val="1030918395"/>
+        <p14:creationId xmlns:p14="http://schemas.microsoft.com/office/powerpoint/2010/main" val="1769612358"/>
       </p:ext>
     </p:extLst>
   </p:cSld>
@@ -10704,6 +11346,6065 @@
 </file>
 
 <file path=ppt/slides/slide14.xml><?xml version="1.0" encoding="utf-8"?>
+<p:sld xmlns:a="http://schemas.openxmlformats.org/drawingml/2006/main" xmlns:r="http://schemas.openxmlformats.org/officeDocument/2006/relationships" xmlns:p="http://schemas.openxmlformats.org/presentationml/2006/main">
+  <p:cSld>
+    <p:spTree>
+      <p:nvGrpSpPr>
+        <p:cNvPr id="1" name="">
+          <a:extLst>
+            <a:ext uri="{FF2B5EF4-FFF2-40B4-BE49-F238E27FC236}">
+              <a16:creationId xmlns:a16="http://schemas.microsoft.com/office/drawing/2014/main" id="{60DC8073-E444-51DF-CE36-45100F5D20DD}"/>
+            </a:ext>
+          </a:extLst>
+        </p:cNvPr>
+        <p:cNvGrpSpPr/>
+        <p:nvPr/>
+      </p:nvGrpSpPr>
+      <p:grpSpPr>
+        <a:xfrm>
+          <a:off x="0" y="0"/>
+          <a:ext cx="0" cy="0"/>
+          <a:chOff x="0" y="0"/>
+          <a:chExt cx="0" cy="0"/>
+        </a:xfrm>
+      </p:grpSpPr>
+      <p:sp>
+        <p:nvSpPr>
+          <p:cNvPr id="3" name="コンテンツ プレースホルダー 2">
+            <a:extLst>
+              <a:ext uri="{FF2B5EF4-FFF2-40B4-BE49-F238E27FC236}">
+                <a16:creationId xmlns:a16="http://schemas.microsoft.com/office/drawing/2014/main" id="{94A60E52-4A48-8A44-9D10-73F89E54D7B5}"/>
+              </a:ext>
+            </a:extLst>
+          </p:cNvPr>
+          <p:cNvSpPr txBox="1">
+            <a:spLocks/>
+          </p:cNvSpPr>
+          <p:nvPr/>
+        </p:nvSpPr>
+        <p:spPr>
+          <a:xfrm>
+            <a:off x="762000" y="1203306"/>
+            <a:ext cx="7396729" cy="557598"/>
+          </a:xfrm>
+          <a:prstGeom prst="rect">
+            <a:avLst/>
+          </a:prstGeom>
+        </p:spPr>
+        <p:txBody>
+          <a:bodyPr/>
+          <a:lstStyle>
+            <a:lvl1pPr marL="342900" indent="-342900" algn="l" rtl="0" eaLnBrk="1" fontAlgn="base" hangingPunct="1">
+              <a:spcBef>
+                <a:spcPct val="20000"/>
+              </a:spcBef>
+              <a:spcAft>
+                <a:spcPct val="0"/>
+              </a:spcAft>
+              <a:buClr>
+                <a:schemeClr val="accent1"/>
+              </a:buClr>
+              <a:buSzPct val="65000"/>
+              <a:buFont typeface="Wingdings" pitchFamily="2" charset="2"/>
+              <a:buChar char="n"/>
+              <a:defRPr kumimoji="1" sz="3200">
+                <a:solidFill>
+                  <a:schemeClr val="tx1"/>
+                </a:solidFill>
+                <a:latin typeface="+mn-lt"/>
+                <a:ea typeface="+mn-ea"/>
+                <a:cs typeface="+mn-cs"/>
+              </a:defRPr>
+            </a:lvl1pPr>
+            <a:lvl2pPr marL="669925" indent="-325438" algn="l" rtl="0" eaLnBrk="1" fontAlgn="base" hangingPunct="1">
+              <a:spcBef>
+                <a:spcPct val="20000"/>
+              </a:spcBef>
+              <a:spcAft>
+                <a:spcPct val="0"/>
+              </a:spcAft>
+              <a:buClr>
+                <a:schemeClr val="accent2"/>
+              </a:buClr>
+              <a:buSzPct val="60000"/>
+              <a:buFont typeface="Wingdings" pitchFamily="2" charset="2"/>
+              <a:buChar char="q"/>
+              <a:defRPr kumimoji="1" sz="2800">
+                <a:solidFill>
+                  <a:schemeClr val="tx1"/>
+                </a:solidFill>
+                <a:latin typeface="+mn-lt"/>
+                <a:ea typeface="+mn-ea"/>
+              </a:defRPr>
+            </a:lvl2pPr>
+            <a:lvl3pPr marL="1022350" indent="-350838" algn="l" rtl="0" eaLnBrk="1" fontAlgn="base" hangingPunct="1">
+              <a:spcBef>
+                <a:spcPct val="20000"/>
+              </a:spcBef>
+              <a:spcAft>
+                <a:spcPct val="0"/>
+              </a:spcAft>
+              <a:buClr>
+                <a:schemeClr val="accent1"/>
+              </a:buClr>
+              <a:buSzPct val="65000"/>
+              <a:buFont typeface="Wingdings" pitchFamily="2" charset="2"/>
+              <a:buChar char="n"/>
+              <a:defRPr kumimoji="1" sz="2400">
+                <a:solidFill>
+                  <a:schemeClr val="tx1"/>
+                </a:solidFill>
+                <a:latin typeface="+mn-lt"/>
+                <a:ea typeface="+mn-ea"/>
+              </a:defRPr>
+            </a:lvl3pPr>
+            <a:lvl4pPr marL="1339850" indent="-315913" algn="l" rtl="0" eaLnBrk="1" fontAlgn="base" hangingPunct="1">
+              <a:spcBef>
+                <a:spcPct val="20000"/>
+              </a:spcBef>
+              <a:spcAft>
+                <a:spcPct val="0"/>
+              </a:spcAft>
+              <a:buClr>
+                <a:schemeClr val="accent2"/>
+              </a:buClr>
+              <a:buSzPct val="70000"/>
+              <a:buFont typeface="Wingdings" pitchFamily="2" charset="2"/>
+              <a:buChar char="q"/>
+              <a:defRPr kumimoji="1" sz="2000">
+                <a:solidFill>
+                  <a:schemeClr val="tx1"/>
+                </a:solidFill>
+                <a:latin typeface="+mn-lt"/>
+                <a:ea typeface="+mn-ea"/>
+              </a:defRPr>
+            </a:lvl4pPr>
+            <a:lvl5pPr marL="1681163" indent="-339725" algn="l" rtl="0" eaLnBrk="1" fontAlgn="base" hangingPunct="1">
+              <a:spcBef>
+                <a:spcPct val="20000"/>
+              </a:spcBef>
+              <a:spcAft>
+                <a:spcPct val="0"/>
+              </a:spcAft>
+              <a:buClr>
+                <a:schemeClr val="accent1"/>
+              </a:buClr>
+              <a:buSzPct val="75000"/>
+              <a:buFont typeface="Wingdings" pitchFamily="2" charset="2"/>
+              <a:buChar char="§"/>
+              <a:defRPr kumimoji="1">
+                <a:solidFill>
+                  <a:schemeClr val="tx1"/>
+                </a:solidFill>
+                <a:latin typeface="+mn-lt"/>
+                <a:ea typeface="+mn-ea"/>
+              </a:defRPr>
+            </a:lvl5pPr>
+            <a:lvl6pPr marL="2138363" indent="-339725" algn="l" rtl="0" eaLnBrk="1" fontAlgn="base" hangingPunct="1">
+              <a:spcBef>
+                <a:spcPct val="20000"/>
+              </a:spcBef>
+              <a:spcAft>
+                <a:spcPct val="0"/>
+              </a:spcAft>
+              <a:buClr>
+                <a:schemeClr val="accent1"/>
+              </a:buClr>
+              <a:buSzPct val="75000"/>
+              <a:buFont typeface="Wingdings" pitchFamily="2" charset="2"/>
+              <a:buChar char="§"/>
+              <a:defRPr kumimoji="1">
+                <a:solidFill>
+                  <a:schemeClr val="tx1"/>
+                </a:solidFill>
+                <a:latin typeface="+mn-lt"/>
+                <a:ea typeface="+mn-ea"/>
+              </a:defRPr>
+            </a:lvl6pPr>
+            <a:lvl7pPr marL="2595563" indent="-339725" algn="l" rtl="0" eaLnBrk="1" fontAlgn="base" hangingPunct="1">
+              <a:spcBef>
+                <a:spcPct val="20000"/>
+              </a:spcBef>
+              <a:spcAft>
+                <a:spcPct val="0"/>
+              </a:spcAft>
+              <a:buClr>
+                <a:schemeClr val="accent1"/>
+              </a:buClr>
+              <a:buSzPct val="75000"/>
+              <a:buFont typeface="Wingdings" pitchFamily="2" charset="2"/>
+              <a:buChar char="§"/>
+              <a:defRPr kumimoji="1">
+                <a:solidFill>
+                  <a:schemeClr val="tx1"/>
+                </a:solidFill>
+                <a:latin typeface="+mn-lt"/>
+                <a:ea typeface="+mn-ea"/>
+              </a:defRPr>
+            </a:lvl7pPr>
+            <a:lvl8pPr marL="3052763" indent="-339725" algn="l" rtl="0" eaLnBrk="1" fontAlgn="base" hangingPunct="1">
+              <a:spcBef>
+                <a:spcPct val="20000"/>
+              </a:spcBef>
+              <a:spcAft>
+                <a:spcPct val="0"/>
+              </a:spcAft>
+              <a:buClr>
+                <a:schemeClr val="accent1"/>
+              </a:buClr>
+              <a:buSzPct val="75000"/>
+              <a:buFont typeface="Wingdings" pitchFamily="2" charset="2"/>
+              <a:buChar char="§"/>
+              <a:defRPr kumimoji="1">
+                <a:solidFill>
+                  <a:schemeClr val="tx1"/>
+                </a:solidFill>
+                <a:latin typeface="+mn-lt"/>
+                <a:ea typeface="+mn-ea"/>
+              </a:defRPr>
+            </a:lvl8pPr>
+            <a:lvl9pPr marL="3509963" indent="-339725" algn="l" rtl="0" eaLnBrk="1" fontAlgn="base" hangingPunct="1">
+              <a:spcBef>
+                <a:spcPct val="20000"/>
+              </a:spcBef>
+              <a:spcAft>
+                <a:spcPct val="0"/>
+              </a:spcAft>
+              <a:buClr>
+                <a:schemeClr val="accent1"/>
+              </a:buClr>
+              <a:buSzPct val="75000"/>
+              <a:buFont typeface="Wingdings" pitchFamily="2" charset="2"/>
+              <a:buChar char="§"/>
+              <a:defRPr kumimoji="1">
+                <a:solidFill>
+                  <a:schemeClr val="tx1"/>
+                </a:solidFill>
+                <a:latin typeface="+mn-lt"/>
+                <a:ea typeface="+mn-ea"/>
+              </a:defRPr>
+            </a:lvl9pPr>
+          </a:lstStyle>
+          <a:p>
+            <a:pPr marL="0" indent="0">
+              <a:buNone/>
+            </a:pPr>
+            <a:r>
+              <a:rPr lang="ja-JP" altLang="en-US" b="1" kern="0" dirty="0"/>
+              <a:t>フローチャート</a:t>
+            </a:r>
+            <a:endParaRPr lang="en-US" altLang="ja-JP" sz="1800" kern="0" dirty="0">
+              <a:solidFill>
+                <a:schemeClr val="accent3">
+                  <a:lumMod val="50000"/>
+                </a:schemeClr>
+              </a:solidFill>
+            </a:endParaRPr>
+          </a:p>
+          <a:p>
+            <a:pPr marL="0" indent="0">
+              <a:buNone/>
+            </a:pPr>
+            <a:endParaRPr lang="en-US" altLang="ja-JP" sz="2000" kern="0" dirty="0">
+              <a:solidFill>
+                <a:schemeClr val="accent6"/>
+              </a:solidFill>
+            </a:endParaRPr>
+          </a:p>
+        </p:txBody>
+      </p:sp>
+      <p:sp>
+        <p:nvSpPr>
+          <p:cNvPr id="11" name="コンテンツ プレースホルダー 2">
+            <a:extLst>
+              <a:ext uri="{FF2B5EF4-FFF2-40B4-BE49-F238E27FC236}">
+                <a16:creationId xmlns:a16="http://schemas.microsoft.com/office/drawing/2014/main" id="{C5352A9B-147A-270B-B02A-4A45E1AABB12}"/>
+              </a:ext>
+            </a:extLst>
+          </p:cNvPr>
+          <p:cNvSpPr txBox="1">
+            <a:spLocks/>
+          </p:cNvSpPr>
+          <p:nvPr/>
+        </p:nvSpPr>
+        <p:spPr>
+          <a:xfrm>
+            <a:off x="762000" y="2143599"/>
+            <a:ext cx="4680604" cy="1361602"/>
+          </a:xfrm>
+          <a:prstGeom prst="rect">
+            <a:avLst/>
+          </a:prstGeom>
+        </p:spPr>
+        <p:txBody>
+          <a:bodyPr/>
+          <a:lstStyle>
+            <a:lvl1pPr marL="342900" indent="-342900" algn="l" rtl="0" eaLnBrk="1" fontAlgn="base" hangingPunct="1">
+              <a:spcBef>
+                <a:spcPct val="20000"/>
+              </a:spcBef>
+              <a:spcAft>
+                <a:spcPct val="0"/>
+              </a:spcAft>
+              <a:buClr>
+                <a:schemeClr val="accent1"/>
+              </a:buClr>
+              <a:buSzPct val="65000"/>
+              <a:buFont typeface="Wingdings" pitchFamily="2" charset="2"/>
+              <a:buChar char="n"/>
+              <a:defRPr kumimoji="1" sz="3200">
+                <a:solidFill>
+                  <a:schemeClr val="tx1"/>
+                </a:solidFill>
+                <a:latin typeface="+mn-lt"/>
+                <a:ea typeface="+mn-ea"/>
+                <a:cs typeface="+mn-cs"/>
+              </a:defRPr>
+            </a:lvl1pPr>
+            <a:lvl2pPr marL="669925" indent="-325438" algn="l" rtl="0" eaLnBrk="1" fontAlgn="base" hangingPunct="1">
+              <a:spcBef>
+                <a:spcPct val="20000"/>
+              </a:spcBef>
+              <a:spcAft>
+                <a:spcPct val="0"/>
+              </a:spcAft>
+              <a:buClr>
+                <a:schemeClr val="accent2"/>
+              </a:buClr>
+              <a:buSzPct val="60000"/>
+              <a:buFont typeface="Wingdings" pitchFamily="2" charset="2"/>
+              <a:buChar char="q"/>
+              <a:defRPr kumimoji="1" sz="2800">
+                <a:solidFill>
+                  <a:schemeClr val="tx1"/>
+                </a:solidFill>
+                <a:latin typeface="+mn-lt"/>
+                <a:ea typeface="+mn-ea"/>
+              </a:defRPr>
+            </a:lvl2pPr>
+            <a:lvl3pPr marL="1022350" indent="-350838" algn="l" rtl="0" eaLnBrk="1" fontAlgn="base" hangingPunct="1">
+              <a:spcBef>
+                <a:spcPct val="20000"/>
+              </a:spcBef>
+              <a:spcAft>
+                <a:spcPct val="0"/>
+              </a:spcAft>
+              <a:buClr>
+                <a:schemeClr val="accent1"/>
+              </a:buClr>
+              <a:buSzPct val="65000"/>
+              <a:buFont typeface="Wingdings" pitchFamily="2" charset="2"/>
+              <a:buChar char="n"/>
+              <a:defRPr kumimoji="1" sz="2400">
+                <a:solidFill>
+                  <a:schemeClr val="tx1"/>
+                </a:solidFill>
+                <a:latin typeface="+mn-lt"/>
+                <a:ea typeface="+mn-ea"/>
+              </a:defRPr>
+            </a:lvl3pPr>
+            <a:lvl4pPr marL="1339850" indent="-315913" algn="l" rtl="0" eaLnBrk="1" fontAlgn="base" hangingPunct="1">
+              <a:spcBef>
+                <a:spcPct val="20000"/>
+              </a:spcBef>
+              <a:spcAft>
+                <a:spcPct val="0"/>
+              </a:spcAft>
+              <a:buClr>
+                <a:schemeClr val="accent2"/>
+              </a:buClr>
+              <a:buSzPct val="70000"/>
+              <a:buFont typeface="Wingdings" pitchFamily="2" charset="2"/>
+              <a:buChar char="q"/>
+              <a:defRPr kumimoji="1" sz="2000">
+                <a:solidFill>
+                  <a:schemeClr val="tx1"/>
+                </a:solidFill>
+                <a:latin typeface="+mn-lt"/>
+                <a:ea typeface="+mn-ea"/>
+              </a:defRPr>
+            </a:lvl4pPr>
+            <a:lvl5pPr marL="1681163" indent="-339725" algn="l" rtl="0" eaLnBrk="1" fontAlgn="base" hangingPunct="1">
+              <a:spcBef>
+                <a:spcPct val="20000"/>
+              </a:spcBef>
+              <a:spcAft>
+                <a:spcPct val="0"/>
+              </a:spcAft>
+              <a:buClr>
+                <a:schemeClr val="accent1"/>
+              </a:buClr>
+              <a:buSzPct val="75000"/>
+              <a:buFont typeface="Wingdings" pitchFamily="2" charset="2"/>
+              <a:buChar char="§"/>
+              <a:defRPr kumimoji="1">
+                <a:solidFill>
+                  <a:schemeClr val="tx1"/>
+                </a:solidFill>
+                <a:latin typeface="+mn-lt"/>
+                <a:ea typeface="+mn-ea"/>
+              </a:defRPr>
+            </a:lvl5pPr>
+            <a:lvl6pPr marL="2138363" indent="-339725" algn="l" rtl="0" eaLnBrk="1" fontAlgn="base" hangingPunct="1">
+              <a:spcBef>
+                <a:spcPct val="20000"/>
+              </a:spcBef>
+              <a:spcAft>
+                <a:spcPct val="0"/>
+              </a:spcAft>
+              <a:buClr>
+                <a:schemeClr val="accent1"/>
+              </a:buClr>
+              <a:buSzPct val="75000"/>
+              <a:buFont typeface="Wingdings" pitchFamily="2" charset="2"/>
+              <a:buChar char="§"/>
+              <a:defRPr kumimoji="1">
+                <a:solidFill>
+                  <a:schemeClr val="tx1"/>
+                </a:solidFill>
+                <a:latin typeface="+mn-lt"/>
+                <a:ea typeface="+mn-ea"/>
+              </a:defRPr>
+            </a:lvl6pPr>
+            <a:lvl7pPr marL="2595563" indent="-339725" algn="l" rtl="0" eaLnBrk="1" fontAlgn="base" hangingPunct="1">
+              <a:spcBef>
+                <a:spcPct val="20000"/>
+              </a:spcBef>
+              <a:spcAft>
+                <a:spcPct val="0"/>
+              </a:spcAft>
+              <a:buClr>
+                <a:schemeClr val="accent1"/>
+              </a:buClr>
+              <a:buSzPct val="75000"/>
+              <a:buFont typeface="Wingdings" pitchFamily="2" charset="2"/>
+              <a:buChar char="§"/>
+              <a:defRPr kumimoji="1">
+                <a:solidFill>
+                  <a:schemeClr val="tx1"/>
+                </a:solidFill>
+                <a:latin typeface="+mn-lt"/>
+                <a:ea typeface="+mn-ea"/>
+              </a:defRPr>
+            </a:lvl7pPr>
+            <a:lvl8pPr marL="3052763" indent="-339725" algn="l" rtl="0" eaLnBrk="1" fontAlgn="base" hangingPunct="1">
+              <a:spcBef>
+                <a:spcPct val="20000"/>
+              </a:spcBef>
+              <a:spcAft>
+                <a:spcPct val="0"/>
+              </a:spcAft>
+              <a:buClr>
+                <a:schemeClr val="accent1"/>
+              </a:buClr>
+              <a:buSzPct val="75000"/>
+              <a:buFont typeface="Wingdings" pitchFamily="2" charset="2"/>
+              <a:buChar char="§"/>
+              <a:defRPr kumimoji="1">
+                <a:solidFill>
+                  <a:schemeClr val="tx1"/>
+                </a:solidFill>
+                <a:latin typeface="+mn-lt"/>
+                <a:ea typeface="+mn-ea"/>
+              </a:defRPr>
+            </a:lvl8pPr>
+            <a:lvl9pPr marL="3509963" indent="-339725" algn="l" rtl="0" eaLnBrk="1" fontAlgn="base" hangingPunct="1">
+              <a:spcBef>
+                <a:spcPct val="20000"/>
+              </a:spcBef>
+              <a:spcAft>
+                <a:spcPct val="0"/>
+              </a:spcAft>
+              <a:buClr>
+                <a:schemeClr val="accent1"/>
+              </a:buClr>
+              <a:buSzPct val="75000"/>
+              <a:buFont typeface="Wingdings" pitchFamily="2" charset="2"/>
+              <a:buChar char="§"/>
+              <a:defRPr kumimoji="1">
+                <a:solidFill>
+                  <a:schemeClr val="tx1"/>
+                </a:solidFill>
+                <a:latin typeface="+mn-lt"/>
+                <a:ea typeface="+mn-ea"/>
+              </a:defRPr>
+            </a:lvl9pPr>
+          </a:lstStyle>
+          <a:p>
+            <a:pPr marL="0" indent="0">
+              <a:buNone/>
+            </a:pPr>
+            <a:endParaRPr lang="en-US" altLang="ja-JP" sz="2400" kern="0" dirty="0"/>
+          </a:p>
+        </p:txBody>
+      </p:sp>
+      <p:sp>
+        <p:nvSpPr>
+          <p:cNvPr id="2" name="タイトル 1">
+            <a:extLst>
+              <a:ext uri="{FF2B5EF4-FFF2-40B4-BE49-F238E27FC236}">
+                <a16:creationId xmlns:a16="http://schemas.microsoft.com/office/drawing/2014/main" id="{24908C1C-E1BE-7B66-9AE3-98D91F134D10}"/>
+              </a:ext>
+            </a:extLst>
+          </p:cNvPr>
+          <p:cNvSpPr>
+            <a:spLocks noGrp="1"/>
+          </p:cNvSpPr>
+          <p:nvPr>
+            <p:ph type="title"/>
+          </p:nvPr>
+        </p:nvSpPr>
+        <p:spPr/>
+        <p:txBody>
+          <a:bodyPr/>
+          <a:lstStyle/>
+          <a:p>
+            <a:r>
+              <a:rPr kumimoji="1" lang="en-US" altLang="ja-JP" dirty="0" err="1"/>
+              <a:t>random_plot.ipynb</a:t>
+            </a:r>
+            <a:endParaRPr kumimoji="1" lang="ja-JP" altLang="en-US" dirty="0"/>
+          </a:p>
+        </p:txBody>
+      </p:sp>
+      <p:sp>
+        <p:nvSpPr>
+          <p:cNvPr id="26" name="コンテンツ プレースホルダー 2">
+            <a:extLst>
+              <a:ext uri="{FF2B5EF4-FFF2-40B4-BE49-F238E27FC236}">
+                <a16:creationId xmlns:a16="http://schemas.microsoft.com/office/drawing/2014/main" id="{370BF49C-D44D-D60C-D015-371902841854}"/>
+              </a:ext>
+            </a:extLst>
+          </p:cNvPr>
+          <p:cNvSpPr txBox="1">
+            <a:spLocks/>
+          </p:cNvSpPr>
+          <p:nvPr/>
+        </p:nvSpPr>
+        <p:spPr>
+          <a:xfrm>
+            <a:off x="914400" y="2295999"/>
+            <a:ext cx="4680604" cy="1361602"/>
+          </a:xfrm>
+          <a:prstGeom prst="rect">
+            <a:avLst/>
+          </a:prstGeom>
+        </p:spPr>
+        <p:txBody>
+          <a:bodyPr/>
+          <a:lstStyle>
+            <a:lvl1pPr marL="342900" indent="-342900" algn="l" rtl="0" eaLnBrk="1" fontAlgn="base" hangingPunct="1">
+              <a:spcBef>
+                <a:spcPct val="20000"/>
+              </a:spcBef>
+              <a:spcAft>
+                <a:spcPct val="0"/>
+              </a:spcAft>
+              <a:buClr>
+                <a:schemeClr val="accent1"/>
+              </a:buClr>
+              <a:buSzPct val="65000"/>
+              <a:buFont typeface="Wingdings" pitchFamily="2" charset="2"/>
+              <a:buChar char="n"/>
+              <a:defRPr kumimoji="1" sz="3200">
+                <a:solidFill>
+                  <a:schemeClr val="tx1"/>
+                </a:solidFill>
+                <a:latin typeface="+mn-lt"/>
+                <a:ea typeface="+mn-ea"/>
+                <a:cs typeface="+mn-cs"/>
+              </a:defRPr>
+            </a:lvl1pPr>
+            <a:lvl2pPr marL="669925" indent="-325438" algn="l" rtl="0" eaLnBrk="1" fontAlgn="base" hangingPunct="1">
+              <a:spcBef>
+                <a:spcPct val="20000"/>
+              </a:spcBef>
+              <a:spcAft>
+                <a:spcPct val="0"/>
+              </a:spcAft>
+              <a:buClr>
+                <a:schemeClr val="accent2"/>
+              </a:buClr>
+              <a:buSzPct val="60000"/>
+              <a:buFont typeface="Wingdings" pitchFamily="2" charset="2"/>
+              <a:buChar char="q"/>
+              <a:defRPr kumimoji="1" sz="2800">
+                <a:solidFill>
+                  <a:schemeClr val="tx1"/>
+                </a:solidFill>
+                <a:latin typeface="+mn-lt"/>
+                <a:ea typeface="+mn-ea"/>
+              </a:defRPr>
+            </a:lvl2pPr>
+            <a:lvl3pPr marL="1022350" indent="-350838" algn="l" rtl="0" eaLnBrk="1" fontAlgn="base" hangingPunct="1">
+              <a:spcBef>
+                <a:spcPct val="20000"/>
+              </a:spcBef>
+              <a:spcAft>
+                <a:spcPct val="0"/>
+              </a:spcAft>
+              <a:buClr>
+                <a:schemeClr val="accent1"/>
+              </a:buClr>
+              <a:buSzPct val="65000"/>
+              <a:buFont typeface="Wingdings" pitchFamily="2" charset="2"/>
+              <a:buChar char="n"/>
+              <a:defRPr kumimoji="1" sz="2400">
+                <a:solidFill>
+                  <a:schemeClr val="tx1"/>
+                </a:solidFill>
+                <a:latin typeface="+mn-lt"/>
+                <a:ea typeface="+mn-ea"/>
+              </a:defRPr>
+            </a:lvl3pPr>
+            <a:lvl4pPr marL="1339850" indent="-315913" algn="l" rtl="0" eaLnBrk="1" fontAlgn="base" hangingPunct="1">
+              <a:spcBef>
+                <a:spcPct val="20000"/>
+              </a:spcBef>
+              <a:spcAft>
+                <a:spcPct val="0"/>
+              </a:spcAft>
+              <a:buClr>
+                <a:schemeClr val="accent2"/>
+              </a:buClr>
+              <a:buSzPct val="70000"/>
+              <a:buFont typeface="Wingdings" pitchFamily="2" charset="2"/>
+              <a:buChar char="q"/>
+              <a:defRPr kumimoji="1" sz="2000">
+                <a:solidFill>
+                  <a:schemeClr val="tx1"/>
+                </a:solidFill>
+                <a:latin typeface="+mn-lt"/>
+                <a:ea typeface="+mn-ea"/>
+              </a:defRPr>
+            </a:lvl4pPr>
+            <a:lvl5pPr marL="1681163" indent="-339725" algn="l" rtl="0" eaLnBrk="1" fontAlgn="base" hangingPunct="1">
+              <a:spcBef>
+                <a:spcPct val="20000"/>
+              </a:spcBef>
+              <a:spcAft>
+                <a:spcPct val="0"/>
+              </a:spcAft>
+              <a:buClr>
+                <a:schemeClr val="accent1"/>
+              </a:buClr>
+              <a:buSzPct val="75000"/>
+              <a:buFont typeface="Wingdings" pitchFamily="2" charset="2"/>
+              <a:buChar char="§"/>
+              <a:defRPr kumimoji="1">
+                <a:solidFill>
+                  <a:schemeClr val="tx1"/>
+                </a:solidFill>
+                <a:latin typeface="+mn-lt"/>
+                <a:ea typeface="+mn-ea"/>
+              </a:defRPr>
+            </a:lvl5pPr>
+            <a:lvl6pPr marL="2138363" indent="-339725" algn="l" rtl="0" eaLnBrk="1" fontAlgn="base" hangingPunct="1">
+              <a:spcBef>
+                <a:spcPct val="20000"/>
+              </a:spcBef>
+              <a:spcAft>
+                <a:spcPct val="0"/>
+              </a:spcAft>
+              <a:buClr>
+                <a:schemeClr val="accent1"/>
+              </a:buClr>
+              <a:buSzPct val="75000"/>
+              <a:buFont typeface="Wingdings" pitchFamily="2" charset="2"/>
+              <a:buChar char="§"/>
+              <a:defRPr kumimoji="1">
+                <a:solidFill>
+                  <a:schemeClr val="tx1"/>
+                </a:solidFill>
+                <a:latin typeface="+mn-lt"/>
+                <a:ea typeface="+mn-ea"/>
+              </a:defRPr>
+            </a:lvl6pPr>
+            <a:lvl7pPr marL="2595563" indent="-339725" algn="l" rtl="0" eaLnBrk="1" fontAlgn="base" hangingPunct="1">
+              <a:spcBef>
+                <a:spcPct val="20000"/>
+              </a:spcBef>
+              <a:spcAft>
+                <a:spcPct val="0"/>
+              </a:spcAft>
+              <a:buClr>
+                <a:schemeClr val="accent1"/>
+              </a:buClr>
+              <a:buSzPct val="75000"/>
+              <a:buFont typeface="Wingdings" pitchFamily="2" charset="2"/>
+              <a:buChar char="§"/>
+              <a:defRPr kumimoji="1">
+                <a:solidFill>
+                  <a:schemeClr val="tx1"/>
+                </a:solidFill>
+                <a:latin typeface="+mn-lt"/>
+                <a:ea typeface="+mn-ea"/>
+              </a:defRPr>
+            </a:lvl7pPr>
+            <a:lvl8pPr marL="3052763" indent="-339725" algn="l" rtl="0" eaLnBrk="1" fontAlgn="base" hangingPunct="1">
+              <a:spcBef>
+                <a:spcPct val="20000"/>
+              </a:spcBef>
+              <a:spcAft>
+                <a:spcPct val="0"/>
+              </a:spcAft>
+              <a:buClr>
+                <a:schemeClr val="accent1"/>
+              </a:buClr>
+              <a:buSzPct val="75000"/>
+              <a:buFont typeface="Wingdings" pitchFamily="2" charset="2"/>
+              <a:buChar char="§"/>
+              <a:defRPr kumimoji="1">
+                <a:solidFill>
+                  <a:schemeClr val="tx1"/>
+                </a:solidFill>
+                <a:latin typeface="+mn-lt"/>
+                <a:ea typeface="+mn-ea"/>
+              </a:defRPr>
+            </a:lvl8pPr>
+            <a:lvl9pPr marL="3509963" indent="-339725" algn="l" rtl="0" eaLnBrk="1" fontAlgn="base" hangingPunct="1">
+              <a:spcBef>
+                <a:spcPct val="20000"/>
+              </a:spcBef>
+              <a:spcAft>
+                <a:spcPct val="0"/>
+              </a:spcAft>
+              <a:buClr>
+                <a:schemeClr val="accent1"/>
+              </a:buClr>
+              <a:buSzPct val="75000"/>
+              <a:buFont typeface="Wingdings" pitchFamily="2" charset="2"/>
+              <a:buChar char="§"/>
+              <a:defRPr kumimoji="1">
+                <a:solidFill>
+                  <a:schemeClr val="tx1"/>
+                </a:solidFill>
+                <a:latin typeface="+mn-lt"/>
+                <a:ea typeface="+mn-ea"/>
+              </a:defRPr>
+            </a:lvl9pPr>
+          </a:lstStyle>
+          <a:p>
+            <a:pPr marL="0" indent="0">
+              <a:buNone/>
+            </a:pPr>
+            <a:endParaRPr lang="en-US" altLang="ja-JP" sz="2400" kern="0" dirty="0"/>
+          </a:p>
+        </p:txBody>
+      </p:sp>
+    </p:spTree>
+    <p:extLst>
+      <p:ext uri="{BB962C8B-B14F-4D97-AF65-F5344CB8AC3E}">
+        <p14:creationId xmlns:p14="http://schemas.microsoft.com/office/powerpoint/2010/main" val="2364922098"/>
+      </p:ext>
+    </p:extLst>
+  </p:cSld>
+  <p:clrMapOvr>
+    <a:masterClrMapping/>
+  </p:clrMapOvr>
+</p:sld>
+</file>
+
+<file path=ppt/slides/slide15.xml><?xml version="1.0" encoding="utf-8"?>
+<p:sld xmlns:a="http://schemas.openxmlformats.org/drawingml/2006/main" xmlns:r="http://schemas.openxmlformats.org/officeDocument/2006/relationships" xmlns:p="http://schemas.openxmlformats.org/presentationml/2006/main">
+  <p:cSld>
+    <p:spTree>
+      <p:nvGrpSpPr>
+        <p:cNvPr id="1" name="">
+          <a:extLst>
+            <a:ext uri="{FF2B5EF4-FFF2-40B4-BE49-F238E27FC236}">
+              <a16:creationId xmlns:a16="http://schemas.microsoft.com/office/drawing/2014/main" id="{60DC8073-E444-51DF-CE36-45100F5D20DD}"/>
+            </a:ext>
+          </a:extLst>
+        </p:cNvPr>
+        <p:cNvGrpSpPr/>
+        <p:nvPr/>
+      </p:nvGrpSpPr>
+      <p:grpSpPr>
+        <a:xfrm>
+          <a:off x="0" y="0"/>
+          <a:ext cx="0" cy="0"/>
+          <a:chOff x="0" y="0"/>
+          <a:chExt cx="0" cy="0"/>
+        </a:xfrm>
+      </p:grpSpPr>
+      <p:sp>
+        <p:nvSpPr>
+          <p:cNvPr id="3" name="コンテンツ プレースホルダー 2">
+            <a:extLst>
+              <a:ext uri="{FF2B5EF4-FFF2-40B4-BE49-F238E27FC236}">
+                <a16:creationId xmlns:a16="http://schemas.microsoft.com/office/drawing/2014/main" id="{94A60E52-4A48-8A44-9D10-73F89E54D7B5}"/>
+              </a:ext>
+            </a:extLst>
+          </p:cNvPr>
+          <p:cNvSpPr txBox="1">
+            <a:spLocks/>
+          </p:cNvSpPr>
+          <p:nvPr/>
+        </p:nvSpPr>
+        <p:spPr>
+          <a:xfrm>
+            <a:off x="762000" y="1203306"/>
+            <a:ext cx="7396729" cy="557598"/>
+          </a:xfrm>
+          <a:prstGeom prst="rect">
+            <a:avLst/>
+          </a:prstGeom>
+        </p:spPr>
+        <p:txBody>
+          <a:bodyPr/>
+          <a:lstStyle>
+            <a:lvl1pPr marL="342900" indent="-342900" algn="l" rtl="0" eaLnBrk="1" fontAlgn="base" hangingPunct="1">
+              <a:spcBef>
+                <a:spcPct val="20000"/>
+              </a:spcBef>
+              <a:spcAft>
+                <a:spcPct val="0"/>
+              </a:spcAft>
+              <a:buClr>
+                <a:schemeClr val="accent1"/>
+              </a:buClr>
+              <a:buSzPct val="65000"/>
+              <a:buFont typeface="Wingdings" pitchFamily="2" charset="2"/>
+              <a:buChar char="n"/>
+              <a:defRPr kumimoji="1" sz="3200">
+                <a:solidFill>
+                  <a:schemeClr val="tx1"/>
+                </a:solidFill>
+                <a:latin typeface="+mn-lt"/>
+                <a:ea typeface="+mn-ea"/>
+                <a:cs typeface="+mn-cs"/>
+              </a:defRPr>
+            </a:lvl1pPr>
+            <a:lvl2pPr marL="669925" indent="-325438" algn="l" rtl="0" eaLnBrk="1" fontAlgn="base" hangingPunct="1">
+              <a:spcBef>
+                <a:spcPct val="20000"/>
+              </a:spcBef>
+              <a:spcAft>
+                <a:spcPct val="0"/>
+              </a:spcAft>
+              <a:buClr>
+                <a:schemeClr val="accent2"/>
+              </a:buClr>
+              <a:buSzPct val="60000"/>
+              <a:buFont typeface="Wingdings" pitchFamily="2" charset="2"/>
+              <a:buChar char="q"/>
+              <a:defRPr kumimoji="1" sz="2800">
+                <a:solidFill>
+                  <a:schemeClr val="tx1"/>
+                </a:solidFill>
+                <a:latin typeface="+mn-lt"/>
+                <a:ea typeface="+mn-ea"/>
+              </a:defRPr>
+            </a:lvl2pPr>
+            <a:lvl3pPr marL="1022350" indent="-350838" algn="l" rtl="0" eaLnBrk="1" fontAlgn="base" hangingPunct="1">
+              <a:spcBef>
+                <a:spcPct val="20000"/>
+              </a:spcBef>
+              <a:spcAft>
+                <a:spcPct val="0"/>
+              </a:spcAft>
+              <a:buClr>
+                <a:schemeClr val="accent1"/>
+              </a:buClr>
+              <a:buSzPct val="65000"/>
+              <a:buFont typeface="Wingdings" pitchFamily="2" charset="2"/>
+              <a:buChar char="n"/>
+              <a:defRPr kumimoji="1" sz="2400">
+                <a:solidFill>
+                  <a:schemeClr val="tx1"/>
+                </a:solidFill>
+                <a:latin typeface="+mn-lt"/>
+                <a:ea typeface="+mn-ea"/>
+              </a:defRPr>
+            </a:lvl3pPr>
+            <a:lvl4pPr marL="1339850" indent="-315913" algn="l" rtl="0" eaLnBrk="1" fontAlgn="base" hangingPunct="1">
+              <a:spcBef>
+                <a:spcPct val="20000"/>
+              </a:spcBef>
+              <a:spcAft>
+                <a:spcPct val="0"/>
+              </a:spcAft>
+              <a:buClr>
+                <a:schemeClr val="accent2"/>
+              </a:buClr>
+              <a:buSzPct val="70000"/>
+              <a:buFont typeface="Wingdings" pitchFamily="2" charset="2"/>
+              <a:buChar char="q"/>
+              <a:defRPr kumimoji="1" sz="2000">
+                <a:solidFill>
+                  <a:schemeClr val="tx1"/>
+                </a:solidFill>
+                <a:latin typeface="+mn-lt"/>
+                <a:ea typeface="+mn-ea"/>
+              </a:defRPr>
+            </a:lvl4pPr>
+            <a:lvl5pPr marL="1681163" indent="-339725" algn="l" rtl="0" eaLnBrk="1" fontAlgn="base" hangingPunct="1">
+              <a:spcBef>
+                <a:spcPct val="20000"/>
+              </a:spcBef>
+              <a:spcAft>
+                <a:spcPct val="0"/>
+              </a:spcAft>
+              <a:buClr>
+                <a:schemeClr val="accent1"/>
+              </a:buClr>
+              <a:buSzPct val="75000"/>
+              <a:buFont typeface="Wingdings" pitchFamily="2" charset="2"/>
+              <a:buChar char="§"/>
+              <a:defRPr kumimoji="1">
+                <a:solidFill>
+                  <a:schemeClr val="tx1"/>
+                </a:solidFill>
+                <a:latin typeface="+mn-lt"/>
+                <a:ea typeface="+mn-ea"/>
+              </a:defRPr>
+            </a:lvl5pPr>
+            <a:lvl6pPr marL="2138363" indent="-339725" algn="l" rtl="0" eaLnBrk="1" fontAlgn="base" hangingPunct="1">
+              <a:spcBef>
+                <a:spcPct val="20000"/>
+              </a:spcBef>
+              <a:spcAft>
+                <a:spcPct val="0"/>
+              </a:spcAft>
+              <a:buClr>
+                <a:schemeClr val="accent1"/>
+              </a:buClr>
+              <a:buSzPct val="75000"/>
+              <a:buFont typeface="Wingdings" pitchFamily="2" charset="2"/>
+              <a:buChar char="§"/>
+              <a:defRPr kumimoji="1">
+                <a:solidFill>
+                  <a:schemeClr val="tx1"/>
+                </a:solidFill>
+                <a:latin typeface="+mn-lt"/>
+                <a:ea typeface="+mn-ea"/>
+              </a:defRPr>
+            </a:lvl6pPr>
+            <a:lvl7pPr marL="2595563" indent="-339725" algn="l" rtl="0" eaLnBrk="1" fontAlgn="base" hangingPunct="1">
+              <a:spcBef>
+                <a:spcPct val="20000"/>
+              </a:spcBef>
+              <a:spcAft>
+                <a:spcPct val="0"/>
+              </a:spcAft>
+              <a:buClr>
+                <a:schemeClr val="accent1"/>
+              </a:buClr>
+              <a:buSzPct val="75000"/>
+              <a:buFont typeface="Wingdings" pitchFamily="2" charset="2"/>
+              <a:buChar char="§"/>
+              <a:defRPr kumimoji="1">
+                <a:solidFill>
+                  <a:schemeClr val="tx1"/>
+                </a:solidFill>
+                <a:latin typeface="+mn-lt"/>
+                <a:ea typeface="+mn-ea"/>
+              </a:defRPr>
+            </a:lvl7pPr>
+            <a:lvl8pPr marL="3052763" indent="-339725" algn="l" rtl="0" eaLnBrk="1" fontAlgn="base" hangingPunct="1">
+              <a:spcBef>
+                <a:spcPct val="20000"/>
+              </a:spcBef>
+              <a:spcAft>
+                <a:spcPct val="0"/>
+              </a:spcAft>
+              <a:buClr>
+                <a:schemeClr val="accent1"/>
+              </a:buClr>
+              <a:buSzPct val="75000"/>
+              <a:buFont typeface="Wingdings" pitchFamily="2" charset="2"/>
+              <a:buChar char="§"/>
+              <a:defRPr kumimoji="1">
+                <a:solidFill>
+                  <a:schemeClr val="tx1"/>
+                </a:solidFill>
+                <a:latin typeface="+mn-lt"/>
+                <a:ea typeface="+mn-ea"/>
+              </a:defRPr>
+            </a:lvl8pPr>
+            <a:lvl9pPr marL="3509963" indent="-339725" algn="l" rtl="0" eaLnBrk="1" fontAlgn="base" hangingPunct="1">
+              <a:spcBef>
+                <a:spcPct val="20000"/>
+              </a:spcBef>
+              <a:spcAft>
+                <a:spcPct val="0"/>
+              </a:spcAft>
+              <a:buClr>
+                <a:schemeClr val="accent1"/>
+              </a:buClr>
+              <a:buSzPct val="75000"/>
+              <a:buFont typeface="Wingdings" pitchFamily="2" charset="2"/>
+              <a:buChar char="§"/>
+              <a:defRPr kumimoji="1">
+                <a:solidFill>
+                  <a:schemeClr val="tx1"/>
+                </a:solidFill>
+                <a:latin typeface="+mn-lt"/>
+                <a:ea typeface="+mn-ea"/>
+              </a:defRPr>
+            </a:lvl9pPr>
+          </a:lstStyle>
+          <a:p>
+            <a:pPr marL="0" indent="0">
+              <a:buNone/>
+            </a:pPr>
+            <a:r>
+              <a:rPr lang="ja-JP" altLang="en-US" b="1" kern="0" dirty="0"/>
+              <a:t>データ準備</a:t>
+            </a:r>
+            <a:endParaRPr lang="en-US" altLang="ja-JP" sz="1800" kern="0" dirty="0">
+              <a:solidFill>
+                <a:schemeClr val="accent3">
+                  <a:lumMod val="50000"/>
+                </a:schemeClr>
+              </a:solidFill>
+            </a:endParaRPr>
+          </a:p>
+          <a:p>
+            <a:pPr marL="0" indent="0">
+              <a:buNone/>
+            </a:pPr>
+            <a:endParaRPr lang="en-US" altLang="ja-JP" sz="2000" kern="0" dirty="0">
+              <a:solidFill>
+                <a:schemeClr val="accent6"/>
+              </a:solidFill>
+            </a:endParaRPr>
+          </a:p>
+        </p:txBody>
+      </p:sp>
+      <p:sp>
+        <p:nvSpPr>
+          <p:cNvPr id="11" name="コンテンツ プレースホルダー 2">
+            <a:extLst>
+              <a:ext uri="{FF2B5EF4-FFF2-40B4-BE49-F238E27FC236}">
+                <a16:creationId xmlns:a16="http://schemas.microsoft.com/office/drawing/2014/main" id="{C5352A9B-147A-270B-B02A-4A45E1AABB12}"/>
+              </a:ext>
+            </a:extLst>
+          </p:cNvPr>
+          <p:cNvSpPr txBox="1">
+            <a:spLocks/>
+          </p:cNvSpPr>
+          <p:nvPr/>
+        </p:nvSpPr>
+        <p:spPr>
+          <a:xfrm>
+            <a:off x="773722" y="2143598"/>
+            <a:ext cx="5433439" cy="2642416"/>
+          </a:xfrm>
+          <a:prstGeom prst="rect">
+            <a:avLst/>
+          </a:prstGeom>
+        </p:spPr>
+        <p:txBody>
+          <a:bodyPr/>
+          <a:lstStyle>
+            <a:lvl1pPr marL="342900" indent="-342900" algn="l" rtl="0" eaLnBrk="1" fontAlgn="base" hangingPunct="1">
+              <a:spcBef>
+                <a:spcPct val="20000"/>
+              </a:spcBef>
+              <a:spcAft>
+                <a:spcPct val="0"/>
+              </a:spcAft>
+              <a:buClr>
+                <a:schemeClr val="accent1"/>
+              </a:buClr>
+              <a:buSzPct val="65000"/>
+              <a:buFont typeface="Wingdings" pitchFamily="2" charset="2"/>
+              <a:buChar char="n"/>
+              <a:defRPr kumimoji="1" sz="3200">
+                <a:solidFill>
+                  <a:schemeClr val="tx1"/>
+                </a:solidFill>
+                <a:latin typeface="+mn-lt"/>
+                <a:ea typeface="+mn-ea"/>
+                <a:cs typeface="+mn-cs"/>
+              </a:defRPr>
+            </a:lvl1pPr>
+            <a:lvl2pPr marL="669925" indent="-325438" algn="l" rtl="0" eaLnBrk="1" fontAlgn="base" hangingPunct="1">
+              <a:spcBef>
+                <a:spcPct val="20000"/>
+              </a:spcBef>
+              <a:spcAft>
+                <a:spcPct val="0"/>
+              </a:spcAft>
+              <a:buClr>
+                <a:schemeClr val="accent2"/>
+              </a:buClr>
+              <a:buSzPct val="60000"/>
+              <a:buFont typeface="Wingdings" pitchFamily="2" charset="2"/>
+              <a:buChar char="q"/>
+              <a:defRPr kumimoji="1" sz="2800">
+                <a:solidFill>
+                  <a:schemeClr val="tx1"/>
+                </a:solidFill>
+                <a:latin typeface="+mn-lt"/>
+                <a:ea typeface="+mn-ea"/>
+              </a:defRPr>
+            </a:lvl2pPr>
+            <a:lvl3pPr marL="1022350" indent="-350838" algn="l" rtl="0" eaLnBrk="1" fontAlgn="base" hangingPunct="1">
+              <a:spcBef>
+                <a:spcPct val="20000"/>
+              </a:spcBef>
+              <a:spcAft>
+                <a:spcPct val="0"/>
+              </a:spcAft>
+              <a:buClr>
+                <a:schemeClr val="accent1"/>
+              </a:buClr>
+              <a:buSzPct val="65000"/>
+              <a:buFont typeface="Wingdings" pitchFamily="2" charset="2"/>
+              <a:buChar char="n"/>
+              <a:defRPr kumimoji="1" sz="2400">
+                <a:solidFill>
+                  <a:schemeClr val="tx1"/>
+                </a:solidFill>
+                <a:latin typeface="+mn-lt"/>
+                <a:ea typeface="+mn-ea"/>
+              </a:defRPr>
+            </a:lvl3pPr>
+            <a:lvl4pPr marL="1339850" indent="-315913" algn="l" rtl="0" eaLnBrk="1" fontAlgn="base" hangingPunct="1">
+              <a:spcBef>
+                <a:spcPct val="20000"/>
+              </a:spcBef>
+              <a:spcAft>
+                <a:spcPct val="0"/>
+              </a:spcAft>
+              <a:buClr>
+                <a:schemeClr val="accent2"/>
+              </a:buClr>
+              <a:buSzPct val="70000"/>
+              <a:buFont typeface="Wingdings" pitchFamily="2" charset="2"/>
+              <a:buChar char="q"/>
+              <a:defRPr kumimoji="1" sz="2000">
+                <a:solidFill>
+                  <a:schemeClr val="tx1"/>
+                </a:solidFill>
+                <a:latin typeface="+mn-lt"/>
+                <a:ea typeface="+mn-ea"/>
+              </a:defRPr>
+            </a:lvl4pPr>
+            <a:lvl5pPr marL="1681163" indent="-339725" algn="l" rtl="0" eaLnBrk="1" fontAlgn="base" hangingPunct="1">
+              <a:spcBef>
+                <a:spcPct val="20000"/>
+              </a:spcBef>
+              <a:spcAft>
+                <a:spcPct val="0"/>
+              </a:spcAft>
+              <a:buClr>
+                <a:schemeClr val="accent1"/>
+              </a:buClr>
+              <a:buSzPct val="75000"/>
+              <a:buFont typeface="Wingdings" pitchFamily="2" charset="2"/>
+              <a:buChar char="§"/>
+              <a:defRPr kumimoji="1">
+                <a:solidFill>
+                  <a:schemeClr val="tx1"/>
+                </a:solidFill>
+                <a:latin typeface="+mn-lt"/>
+                <a:ea typeface="+mn-ea"/>
+              </a:defRPr>
+            </a:lvl5pPr>
+            <a:lvl6pPr marL="2138363" indent="-339725" algn="l" rtl="0" eaLnBrk="1" fontAlgn="base" hangingPunct="1">
+              <a:spcBef>
+                <a:spcPct val="20000"/>
+              </a:spcBef>
+              <a:spcAft>
+                <a:spcPct val="0"/>
+              </a:spcAft>
+              <a:buClr>
+                <a:schemeClr val="accent1"/>
+              </a:buClr>
+              <a:buSzPct val="75000"/>
+              <a:buFont typeface="Wingdings" pitchFamily="2" charset="2"/>
+              <a:buChar char="§"/>
+              <a:defRPr kumimoji="1">
+                <a:solidFill>
+                  <a:schemeClr val="tx1"/>
+                </a:solidFill>
+                <a:latin typeface="+mn-lt"/>
+                <a:ea typeface="+mn-ea"/>
+              </a:defRPr>
+            </a:lvl6pPr>
+            <a:lvl7pPr marL="2595563" indent="-339725" algn="l" rtl="0" eaLnBrk="1" fontAlgn="base" hangingPunct="1">
+              <a:spcBef>
+                <a:spcPct val="20000"/>
+              </a:spcBef>
+              <a:spcAft>
+                <a:spcPct val="0"/>
+              </a:spcAft>
+              <a:buClr>
+                <a:schemeClr val="accent1"/>
+              </a:buClr>
+              <a:buSzPct val="75000"/>
+              <a:buFont typeface="Wingdings" pitchFamily="2" charset="2"/>
+              <a:buChar char="§"/>
+              <a:defRPr kumimoji="1">
+                <a:solidFill>
+                  <a:schemeClr val="tx1"/>
+                </a:solidFill>
+                <a:latin typeface="+mn-lt"/>
+                <a:ea typeface="+mn-ea"/>
+              </a:defRPr>
+            </a:lvl7pPr>
+            <a:lvl8pPr marL="3052763" indent="-339725" algn="l" rtl="0" eaLnBrk="1" fontAlgn="base" hangingPunct="1">
+              <a:spcBef>
+                <a:spcPct val="20000"/>
+              </a:spcBef>
+              <a:spcAft>
+                <a:spcPct val="0"/>
+              </a:spcAft>
+              <a:buClr>
+                <a:schemeClr val="accent1"/>
+              </a:buClr>
+              <a:buSzPct val="75000"/>
+              <a:buFont typeface="Wingdings" pitchFamily="2" charset="2"/>
+              <a:buChar char="§"/>
+              <a:defRPr kumimoji="1">
+                <a:solidFill>
+                  <a:schemeClr val="tx1"/>
+                </a:solidFill>
+                <a:latin typeface="+mn-lt"/>
+                <a:ea typeface="+mn-ea"/>
+              </a:defRPr>
+            </a:lvl8pPr>
+            <a:lvl9pPr marL="3509963" indent="-339725" algn="l" rtl="0" eaLnBrk="1" fontAlgn="base" hangingPunct="1">
+              <a:spcBef>
+                <a:spcPct val="20000"/>
+              </a:spcBef>
+              <a:spcAft>
+                <a:spcPct val="0"/>
+              </a:spcAft>
+              <a:buClr>
+                <a:schemeClr val="accent1"/>
+              </a:buClr>
+              <a:buSzPct val="75000"/>
+              <a:buFont typeface="Wingdings" pitchFamily="2" charset="2"/>
+              <a:buChar char="§"/>
+              <a:defRPr kumimoji="1">
+                <a:solidFill>
+                  <a:schemeClr val="tx1"/>
+                </a:solidFill>
+                <a:latin typeface="+mn-lt"/>
+                <a:ea typeface="+mn-ea"/>
+              </a:defRPr>
+            </a:lvl9pPr>
+          </a:lstStyle>
+          <a:p>
+            <a:r>
+              <a:rPr lang="ja-JP" altLang="en-US" sz="2400" kern="0" dirty="0"/>
+              <a:t>乱数を固定</a:t>
+            </a:r>
+            <a:endParaRPr lang="en-US" altLang="ja-JP" sz="2400" kern="0" dirty="0"/>
+          </a:p>
+          <a:p>
+            <a:r>
+              <a:rPr lang="ja-JP" altLang="en-US" sz="2400" kern="0" dirty="0"/>
+              <a:t>データを用意</a:t>
+            </a:r>
+            <a:endParaRPr lang="en-US" altLang="ja-JP" sz="2400" kern="0" dirty="0"/>
+          </a:p>
+          <a:p>
+            <a:pPr marL="0" indent="0">
+              <a:buNone/>
+            </a:pPr>
+            <a:r>
+              <a:rPr lang="ja-JP" altLang="en-US" sz="1800" kern="0" dirty="0">
+                <a:solidFill>
+                  <a:schemeClr val="accent3">
+                    <a:lumMod val="50000"/>
+                  </a:schemeClr>
+                </a:solidFill>
+              </a:rPr>
+              <a:t>   </a:t>
+            </a:r>
+            <a:r>
+              <a:rPr lang="en-US" altLang="ja-JP" sz="1800" kern="0" dirty="0">
+                <a:solidFill>
+                  <a:schemeClr val="accent3">
+                    <a:lumMod val="50000"/>
+                  </a:schemeClr>
+                </a:solidFill>
+              </a:rPr>
+              <a:t>x1, x2 : </a:t>
+            </a:r>
+            <a:r>
+              <a:rPr lang="ja-JP" altLang="en-US" sz="1800" kern="0" dirty="0">
+                <a:solidFill>
+                  <a:schemeClr val="accent3">
+                    <a:lumMod val="50000"/>
+                  </a:schemeClr>
+                </a:solidFill>
+              </a:rPr>
+              <a:t>データ</a:t>
+            </a:r>
+            <a:r>
+              <a:rPr lang="en-US" altLang="ja-JP" sz="1800" kern="0" dirty="0">
+                <a:solidFill>
+                  <a:schemeClr val="accent3">
+                    <a:lumMod val="50000"/>
+                  </a:schemeClr>
+                </a:solidFill>
+              </a:rPr>
+              <a:t>(-1</a:t>
+            </a:r>
+            <a:r>
+              <a:rPr lang="ja-JP" altLang="en-US" sz="1800" kern="0" dirty="0">
+                <a:solidFill>
+                  <a:schemeClr val="accent3">
+                    <a:lumMod val="50000"/>
+                  </a:schemeClr>
+                </a:solidFill>
+              </a:rPr>
+              <a:t>以上</a:t>
+            </a:r>
+            <a:r>
+              <a:rPr lang="en-US" altLang="ja-JP" sz="1800" kern="0" dirty="0">
+                <a:solidFill>
+                  <a:schemeClr val="accent3">
+                    <a:lumMod val="50000"/>
+                  </a:schemeClr>
+                </a:solidFill>
+              </a:rPr>
+              <a:t>1</a:t>
+            </a:r>
+            <a:r>
+              <a:rPr lang="ja-JP" altLang="en-US" sz="1800" kern="0" dirty="0">
+                <a:solidFill>
+                  <a:schemeClr val="accent3">
+                    <a:lumMod val="50000"/>
+                  </a:schemeClr>
+                </a:solidFill>
+              </a:rPr>
+              <a:t>未満の乱数、</a:t>
+            </a:r>
+            <a:r>
+              <a:rPr lang="en-US" altLang="ja-JP" sz="1800" kern="0" dirty="0">
+                <a:solidFill>
+                  <a:schemeClr val="accent3">
+                    <a:lumMod val="50000"/>
+                  </a:schemeClr>
+                </a:solidFill>
+              </a:rPr>
+              <a:t>50</a:t>
+            </a:r>
+            <a:r>
+              <a:rPr lang="ja-JP" altLang="en-US" sz="1800" kern="0" dirty="0">
+                <a:solidFill>
+                  <a:schemeClr val="accent3">
+                    <a:lumMod val="50000"/>
+                  </a:schemeClr>
+                </a:solidFill>
+              </a:rPr>
+              <a:t>行</a:t>
+            </a:r>
+            <a:r>
+              <a:rPr lang="en-US" altLang="ja-JP" sz="1800" kern="0" dirty="0">
+                <a:solidFill>
+                  <a:schemeClr val="accent3">
+                    <a:lumMod val="50000"/>
+                  </a:schemeClr>
+                </a:solidFill>
+              </a:rPr>
+              <a:t>×</a:t>
+            </a:r>
+            <a:r>
+              <a:rPr lang="ja-JP" altLang="en-US" sz="1800" kern="0" dirty="0">
+                <a:solidFill>
+                  <a:schemeClr val="accent3">
+                    <a:lumMod val="50000"/>
+                  </a:schemeClr>
+                </a:solidFill>
+              </a:rPr>
+              <a:t>２列</a:t>
+            </a:r>
+            <a:r>
+              <a:rPr lang="en-US" altLang="ja-JP" sz="1800" kern="0" dirty="0">
+                <a:solidFill>
+                  <a:schemeClr val="accent3">
+                    <a:lumMod val="50000"/>
+                  </a:schemeClr>
+                </a:solidFill>
+              </a:rPr>
+              <a:t>)</a:t>
+            </a:r>
+          </a:p>
+          <a:p>
+            <a:pPr marL="0" indent="0">
+              <a:buNone/>
+            </a:pPr>
+            <a:r>
+              <a:rPr lang="en-US" altLang="ja-JP" sz="1800" kern="0" dirty="0">
+                <a:solidFill>
+                  <a:schemeClr val="accent3">
+                    <a:lumMod val="50000"/>
+                  </a:schemeClr>
+                </a:solidFill>
+              </a:rPr>
+              <a:t>   y1 : 0</a:t>
+            </a:r>
+            <a:r>
+              <a:rPr lang="ja-JP" altLang="en-US" sz="1800" kern="0" dirty="0">
+                <a:solidFill>
+                  <a:schemeClr val="accent3">
+                    <a:lumMod val="50000"/>
+                  </a:schemeClr>
+                </a:solidFill>
+              </a:rPr>
+              <a:t>のラベル</a:t>
+            </a:r>
+            <a:r>
+              <a:rPr lang="en-US" altLang="ja-JP" sz="1800" kern="0" dirty="0">
+                <a:solidFill>
+                  <a:schemeClr val="accent3">
+                    <a:lumMod val="50000"/>
+                  </a:schemeClr>
+                </a:solidFill>
+              </a:rPr>
+              <a:t>(50</a:t>
+            </a:r>
+            <a:r>
+              <a:rPr lang="ja-JP" altLang="en-US" sz="1800" kern="0" dirty="0">
+                <a:solidFill>
+                  <a:schemeClr val="accent3">
+                    <a:lumMod val="50000"/>
+                  </a:schemeClr>
+                </a:solidFill>
+              </a:rPr>
+              <a:t>個</a:t>
+            </a:r>
+            <a:r>
+              <a:rPr lang="en-US" altLang="ja-JP" sz="1800" kern="0" dirty="0">
+                <a:solidFill>
+                  <a:schemeClr val="accent3">
+                    <a:lumMod val="50000"/>
+                  </a:schemeClr>
+                </a:solidFill>
+              </a:rPr>
+              <a:t>)</a:t>
+            </a:r>
+          </a:p>
+          <a:p>
+            <a:pPr marL="0" indent="0">
+              <a:buNone/>
+            </a:pPr>
+            <a:r>
+              <a:rPr lang="ja-JP" altLang="en-US" sz="1800" kern="0" dirty="0">
+                <a:solidFill>
+                  <a:schemeClr val="accent3">
+                    <a:lumMod val="50000"/>
+                  </a:schemeClr>
+                </a:solidFill>
+              </a:rPr>
+              <a:t>   </a:t>
+            </a:r>
+            <a:r>
+              <a:rPr lang="en-US" altLang="ja-JP" sz="1800" kern="0" dirty="0">
+                <a:solidFill>
+                  <a:schemeClr val="accent3">
+                    <a:lumMod val="50000"/>
+                  </a:schemeClr>
+                </a:solidFill>
+              </a:rPr>
+              <a:t>y2 : 1</a:t>
+            </a:r>
+            <a:r>
+              <a:rPr lang="ja-JP" altLang="en-US" sz="1800" kern="0" dirty="0">
+                <a:solidFill>
+                  <a:schemeClr val="accent3">
+                    <a:lumMod val="50000"/>
+                  </a:schemeClr>
+                </a:solidFill>
+              </a:rPr>
+              <a:t>のラベル</a:t>
+            </a:r>
+            <a:r>
+              <a:rPr lang="en-US" altLang="ja-JP" sz="1800" kern="0" dirty="0">
+                <a:solidFill>
+                  <a:schemeClr val="accent3">
+                    <a:lumMod val="50000"/>
+                  </a:schemeClr>
+                </a:solidFill>
+              </a:rPr>
+              <a:t>(50</a:t>
+            </a:r>
+            <a:r>
+              <a:rPr lang="ja-JP" altLang="en-US" sz="1800" kern="0" dirty="0">
+                <a:solidFill>
+                  <a:schemeClr val="accent3">
+                    <a:lumMod val="50000"/>
+                  </a:schemeClr>
+                </a:solidFill>
+              </a:rPr>
+              <a:t>個</a:t>
+            </a:r>
+            <a:r>
+              <a:rPr lang="en-US" altLang="ja-JP" sz="1800" kern="0" dirty="0">
+                <a:solidFill>
+                  <a:schemeClr val="accent3">
+                    <a:lumMod val="50000"/>
+                  </a:schemeClr>
+                </a:solidFill>
+              </a:rPr>
+              <a:t>)</a:t>
+            </a:r>
+          </a:p>
+          <a:p>
+            <a:pPr marL="0" indent="0">
+              <a:buNone/>
+            </a:pPr>
+            <a:r>
+              <a:rPr lang="en-US" altLang="ja-JP" sz="1800" kern="0" dirty="0">
+                <a:solidFill>
+                  <a:schemeClr val="accent3">
+                    <a:lumMod val="50000"/>
+                  </a:schemeClr>
+                </a:solidFill>
+              </a:rPr>
+              <a:t>   x1 </a:t>
+            </a:r>
+            <a:r>
+              <a:rPr lang="ja-JP" altLang="en-US" sz="1800" kern="0" dirty="0">
+                <a:solidFill>
+                  <a:schemeClr val="accent3">
+                    <a:lumMod val="50000"/>
+                  </a:schemeClr>
+                </a:solidFill>
+              </a:rPr>
+              <a:t>と </a:t>
+            </a:r>
+            <a:r>
+              <a:rPr lang="en-US" altLang="ja-JP" sz="1800" kern="0" dirty="0">
+                <a:solidFill>
+                  <a:schemeClr val="accent3">
+                    <a:lumMod val="50000"/>
+                  </a:schemeClr>
+                </a:solidFill>
+              </a:rPr>
+              <a:t>x2</a:t>
+            </a:r>
+            <a:r>
+              <a:rPr lang="ja-JP" altLang="en-US" sz="1800" kern="0" dirty="0">
+                <a:solidFill>
+                  <a:schemeClr val="accent3">
+                    <a:lumMod val="50000"/>
+                  </a:schemeClr>
+                </a:solidFill>
+              </a:rPr>
+              <a:t> を行方向に結合 → </a:t>
+            </a:r>
+            <a:r>
+              <a:rPr lang="en-US" altLang="ja-JP" sz="1800" kern="0" dirty="0" err="1">
+                <a:solidFill>
+                  <a:schemeClr val="accent3">
+                    <a:lumMod val="50000"/>
+                  </a:schemeClr>
+                </a:solidFill>
+              </a:rPr>
+              <a:t>xd</a:t>
+            </a:r>
+            <a:endParaRPr lang="en-US" altLang="ja-JP" sz="1800" kern="0" dirty="0">
+              <a:solidFill>
+                <a:schemeClr val="accent3">
+                  <a:lumMod val="50000"/>
+                </a:schemeClr>
+              </a:solidFill>
+            </a:endParaRPr>
+          </a:p>
+          <a:p>
+            <a:pPr marL="0" indent="0">
+              <a:buNone/>
+            </a:pPr>
+            <a:r>
+              <a:rPr lang="en-US" altLang="ja-JP" sz="1800" kern="0" dirty="0">
+                <a:solidFill>
+                  <a:schemeClr val="accent3">
+                    <a:lumMod val="50000"/>
+                  </a:schemeClr>
+                </a:solidFill>
+              </a:rPr>
+              <a:t>   y1 </a:t>
+            </a:r>
+            <a:r>
+              <a:rPr lang="ja-JP" altLang="en-US" sz="1800" kern="0" dirty="0">
+                <a:solidFill>
+                  <a:schemeClr val="accent3">
+                    <a:lumMod val="50000"/>
+                  </a:schemeClr>
+                </a:solidFill>
+              </a:rPr>
+              <a:t>と </a:t>
+            </a:r>
+            <a:r>
+              <a:rPr lang="en-US" altLang="ja-JP" sz="1800" kern="0" dirty="0">
+                <a:solidFill>
+                  <a:schemeClr val="accent3">
+                    <a:lumMod val="50000"/>
+                  </a:schemeClr>
+                </a:solidFill>
+              </a:rPr>
+              <a:t>y2 </a:t>
+            </a:r>
+            <a:r>
+              <a:rPr lang="ja-JP" altLang="en-US" sz="1800" kern="0" dirty="0">
+                <a:solidFill>
+                  <a:schemeClr val="accent3">
+                    <a:lumMod val="50000"/>
+                  </a:schemeClr>
+                </a:solidFill>
+              </a:rPr>
+              <a:t>を結合 → </a:t>
+            </a:r>
+            <a:r>
+              <a:rPr lang="en-US" altLang="ja-JP" sz="1800" kern="0" dirty="0">
+                <a:solidFill>
+                  <a:schemeClr val="accent3">
+                    <a:lumMod val="50000"/>
+                  </a:schemeClr>
+                </a:solidFill>
+              </a:rPr>
+              <a:t>yd</a:t>
+            </a:r>
+          </a:p>
+          <a:p>
+            <a:pPr marL="0" indent="0">
+              <a:buNone/>
+            </a:pPr>
+            <a:endParaRPr lang="en-US" altLang="ja-JP" sz="2400" kern="0" dirty="0"/>
+          </a:p>
+          <a:p>
+            <a:pPr marL="0" indent="0">
+              <a:buNone/>
+            </a:pPr>
+            <a:r>
+              <a:rPr lang="ja-JP" altLang="en-US" sz="2400" kern="0" dirty="0"/>
+              <a:t>　</a:t>
+            </a:r>
+            <a:endParaRPr lang="en-US" altLang="ja-JP" sz="2400" kern="0" dirty="0"/>
+          </a:p>
+        </p:txBody>
+      </p:sp>
+      <p:sp>
+        <p:nvSpPr>
+          <p:cNvPr id="2" name="タイトル 1">
+            <a:extLst>
+              <a:ext uri="{FF2B5EF4-FFF2-40B4-BE49-F238E27FC236}">
+                <a16:creationId xmlns:a16="http://schemas.microsoft.com/office/drawing/2014/main" id="{24908C1C-E1BE-7B66-9AE3-98D91F134D10}"/>
+              </a:ext>
+            </a:extLst>
+          </p:cNvPr>
+          <p:cNvSpPr>
+            <a:spLocks noGrp="1"/>
+          </p:cNvSpPr>
+          <p:nvPr>
+            <p:ph type="title"/>
+          </p:nvPr>
+        </p:nvSpPr>
+        <p:spPr/>
+        <p:txBody>
+          <a:bodyPr/>
+          <a:lstStyle/>
+          <a:p>
+            <a:r>
+              <a:rPr kumimoji="1" lang="en-US" altLang="ja-JP" dirty="0" err="1"/>
+              <a:t>random_plot.ipynb</a:t>
+            </a:r>
+            <a:endParaRPr kumimoji="1" lang="ja-JP" altLang="en-US" dirty="0"/>
+          </a:p>
+        </p:txBody>
+      </p:sp>
+      <p:graphicFrame>
+        <p:nvGraphicFramePr>
+          <p:cNvPr id="8" name="表 7">
+            <a:extLst>
+              <a:ext uri="{FF2B5EF4-FFF2-40B4-BE49-F238E27FC236}">
+                <a16:creationId xmlns:a16="http://schemas.microsoft.com/office/drawing/2014/main" id="{2BB8C37D-34E4-940C-5C11-2E0CC3E5957B}"/>
+              </a:ext>
+            </a:extLst>
+          </p:cNvPr>
+          <p:cNvGraphicFramePr>
+            <a:graphicFrameLocks noGrp="1"/>
+          </p:cNvGraphicFramePr>
+          <p:nvPr>
+            <p:extLst>
+              <p:ext uri="{D42A27DB-BD31-4B8C-83A1-F6EECF244321}">
+                <p14:modId xmlns:p14="http://schemas.microsoft.com/office/powerpoint/2010/main" val="2737400920"/>
+              </p:ext>
+            </p:extLst>
+          </p:nvPr>
+        </p:nvGraphicFramePr>
+        <p:xfrm>
+          <a:off x="4982002" y="4569718"/>
+          <a:ext cx="6636942" cy="1325880"/>
+        </p:xfrm>
+        <a:graphic>
+          <a:graphicData uri="http://schemas.openxmlformats.org/drawingml/2006/table">
+            <a:tbl>
+              <a:tblPr firstRow="1" firstCol="1" bandRow="1">
+                <a:tableStyleId>{21E4AEA4-8DFA-4A89-87EB-49C32662AFE0}</a:tableStyleId>
+              </a:tblPr>
+              <a:tblGrid>
+                <a:gridCol w="1483271">
+                  <a:extLst>
+                    <a:ext uri="{9D8B030D-6E8A-4147-A177-3AD203B41FA5}">
+                      <a16:colId xmlns:a16="http://schemas.microsoft.com/office/drawing/2014/main" val="165235932"/>
+                    </a:ext>
+                  </a:extLst>
+                </a:gridCol>
+                <a:gridCol w="3174264">
+                  <a:extLst>
+                    <a:ext uri="{9D8B030D-6E8A-4147-A177-3AD203B41FA5}">
+                      <a16:colId xmlns:a16="http://schemas.microsoft.com/office/drawing/2014/main" val="1387312990"/>
+                    </a:ext>
+                  </a:extLst>
+                </a:gridCol>
+                <a:gridCol w="1979407">
+                  <a:extLst>
+                    <a:ext uri="{9D8B030D-6E8A-4147-A177-3AD203B41FA5}">
+                      <a16:colId xmlns:a16="http://schemas.microsoft.com/office/drawing/2014/main" val="2241803932"/>
+                    </a:ext>
+                  </a:extLst>
+                </a:gridCol>
+              </a:tblGrid>
+              <a:tr h="121111">
+                <a:tc>
+                  <a:txBody>
+                    <a:bodyPr/>
+                    <a:lstStyle/>
+                    <a:p>
+                      <a:endParaRPr kumimoji="1" lang="ja-JP" altLang="en-US" dirty="0"/>
+                    </a:p>
+                  </a:txBody>
+                  <a:tcPr/>
+                </a:tc>
+                <a:tc>
+                  <a:txBody>
+                    <a:bodyPr/>
+                    <a:lstStyle/>
+                    <a:p>
+                      <a:r>
+                        <a:rPr kumimoji="1" lang="en-US" altLang="ja-JP" dirty="0"/>
+                        <a:t>Python</a:t>
+                      </a:r>
+                      <a:endParaRPr kumimoji="1" lang="ja-JP" altLang="en-US" dirty="0"/>
+                    </a:p>
+                  </a:txBody>
+                  <a:tcPr/>
+                </a:tc>
+                <a:tc>
+                  <a:txBody>
+                    <a:bodyPr/>
+                    <a:lstStyle/>
+                    <a:p>
+                      <a:r>
+                        <a:rPr kumimoji="1" lang="en-US" altLang="ja-JP" dirty="0"/>
+                        <a:t>R</a:t>
+                      </a:r>
+                      <a:endParaRPr kumimoji="1" lang="ja-JP" altLang="en-US" dirty="0"/>
+                    </a:p>
+                  </a:txBody>
+                  <a:tcPr/>
+                </a:tc>
+                <a:extLst>
+                  <a:ext uri="{0D108BD9-81ED-4DB2-BD59-A6C34878D82A}">
+                    <a16:rowId xmlns:a16="http://schemas.microsoft.com/office/drawing/2014/main" val="12414329"/>
+                  </a:ext>
+                </a:extLst>
+              </a:tr>
+              <a:tr h="280807">
+                <a:tc>
+                  <a:txBody>
+                    <a:bodyPr/>
+                    <a:lstStyle/>
+                    <a:p>
+                      <a:r>
+                        <a:rPr kumimoji="1" lang="ja-JP" altLang="en-US" sz="1500" b="0" dirty="0">
+                          <a:solidFill>
+                            <a:schemeClr val="tx1"/>
+                          </a:solidFill>
+                        </a:rPr>
+                        <a:t>乱数生成</a:t>
+                      </a:r>
+                    </a:p>
+                  </a:txBody>
+                  <a:tcPr>
+                    <a:solidFill>
+                      <a:schemeClr val="bg2">
+                        <a:lumMod val="20000"/>
+                        <a:lumOff val="80000"/>
+                      </a:schemeClr>
+                    </a:solidFill>
+                  </a:tcPr>
+                </a:tc>
+                <a:tc>
+                  <a:txBody>
+                    <a:bodyPr/>
+                    <a:lstStyle/>
+                    <a:p>
+                      <a:r>
+                        <a:rPr kumimoji="1" lang="en-US" altLang="ja-JP" sz="1500" dirty="0" err="1"/>
+                        <a:t>np.random.uniform</a:t>
+                      </a:r>
+                      <a:r>
+                        <a:rPr kumimoji="1" lang="en-US" altLang="ja-JP" sz="1500" dirty="0"/>
+                        <a:t>(low, high, size)</a:t>
+                      </a:r>
+                      <a:endParaRPr kumimoji="1" lang="ja-JP" altLang="en-US" sz="1500" dirty="0"/>
+                    </a:p>
+                  </a:txBody>
+                  <a:tcPr/>
+                </a:tc>
+                <a:tc>
+                  <a:txBody>
+                    <a:bodyPr/>
+                    <a:lstStyle/>
+                    <a:p>
+                      <a:r>
+                        <a:rPr kumimoji="1" lang="en-US" altLang="ja-JP" sz="1500" dirty="0" err="1"/>
+                        <a:t>runif</a:t>
+                      </a:r>
+                      <a:r>
+                        <a:rPr kumimoji="1" lang="en-US" altLang="ja-JP" sz="1500" dirty="0"/>
+                        <a:t>(</a:t>
+                      </a:r>
+                      <a:r>
+                        <a:rPr kumimoji="1" lang="en-US" altLang="ja-JP" sz="1500" dirty="0" err="1"/>
+                        <a:t>n,min</a:t>
+                      </a:r>
+                      <a:r>
+                        <a:rPr kumimoji="1" lang="en-US" altLang="ja-JP" sz="1500" dirty="0"/>
+                        <a:t>, max, )</a:t>
+                      </a:r>
+                    </a:p>
+                  </a:txBody>
+                  <a:tcPr/>
+                </a:tc>
+                <a:extLst>
+                  <a:ext uri="{0D108BD9-81ED-4DB2-BD59-A6C34878D82A}">
+                    <a16:rowId xmlns:a16="http://schemas.microsoft.com/office/drawing/2014/main" val="1531238374"/>
+                  </a:ext>
+                </a:extLst>
+              </a:tr>
+              <a:tr h="280807">
+                <a:tc>
+                  <a:txBody>
+                    <a:bodyPr/>
+                    <a:lstStyle/>
+                    <a:p>
+                      <a:r>
+                        <a:rPr kumimoji="1" lang="ja-JP" altLang="en-US" sz="1500" b="0" dirty="0">
+                          <a:solidFill>
+                            <a:schemeClr val="tx1"/>
+                          </a:solidFill>
+                        </a:rPr>
+                        <a:t>行方向に結合</a:t>
+                      </a:r>
+                    </a:p>
+                  </a:txBody>
+                  <a:tcPr>
+                    <a:solidFill>
+                      <a:schemeClr val="bg2">
+                        <a:lumMod val="20000"/>
+                        <a:lumOff val="80000"/>
+                      </a:schemeClr>
+                    </a:solidFill>
+                  </a:tcPr>
+                </a:tc>
+                <a:tc>
+                  <a:txBody>
+                    <a:bodyPr/>
+                    <a:lstStyle/>
+                    <a:p>
+                      <a:r>
+                        <a:rPr kumimoji="1" lang="en-US" altLang="ja-JP" sz="1500" dirty="0" err="1"/>
+                        <a:t>np.append</a:t>
+                      </a:r>
+                      <a:r>
+                        <a:rPr kumimoji="1" lang="en-US" altLang="ja-JP" sz="1500" dirty="0"/>
+                        <a:t>(… , axis = 0)</a:t>
+                      </a:r>
+                      <a:endParaRPr kumimoji="1" lang="ja-JP" altLang="en-US" sz="1500" dirty="0"/>
+                    </a:p>
+                  </a:txBody>
+                  <a:tcPr/>
+                </a:tc>
+                <a:tc>
+                  <a:txBody>
+                    <a:bodyPr/>
+                    <a:lstStyle/>
+                    <a:p>
+                      <a:r>
+                        <a:rPr kumimoji="1" lang="en-US" altLang="ja-JP" sz="1500" dirty="0" err="1"/>
+                        <a:t>rbind</a:t>
+                      </a:r>
+                      <a:r>
+                        <a:rPr kumimoji="1" lang="en-US" altLang="ja-JP" sz="1500" dirty="0"/>
+                        <a:t>()</a:t>
+                      </a:r>
+                    </a:p>
+                  </a:txBody>
+                  <a:tcPr/>
+                </a:tc>
+                <a:extLst>
+                  <a:ext uri="{0D108BD9-81ED-4DB2-BD59-A6C34878D82A}">
+                    <a16:rowId xmlns:a16="http://schemas.microsoft.com/office/drawing/2014/main" val="3835439253"/>
+                  </a:ext>
+                </a:extLst>
+              </a:tr>
+              <a:tr h="0">
+                <a:tc>
+                  <a:txBody>
+                    <a:bodyPr/>
+                    <a:lstStyle/>
+                    <a:p>
+                      <a:r>
+                        <a:rPr kumimoji="1" lang="ja-JP" altLang="en-US" sz="1500" b="0" dirty="0">
+                          <a:solidFill>
+                            <a:schemeClr val="tx1"/>
+                          </a:solidFill>
+                        </a:rPr>
+                        <a:t>ベクトルの結合</a:t>
+                      </a:r>
+                    </a:p>
+                  </a:txBody>
+                  <a:tcPr>
+                    <a:solidFill>
+                      <a:schemeClr val="bg2">
+                        <a:lumMod val="20000"/>
+                        <a:lumOff val="80000"/>
+                      </a:schemeClr>
+                    </a:solidFill>
+                  </a:tcPr>
+                </a:tc>
+                <a:tc>
+                  <a:txBody>
+                    <a:bodyPr/>
+                    <a:lstStyle/>
+                    <a:p>
+                      <a:r>
+                        <a:rPr kumimoji="1" lang="en-US" altLang="ja-JP" sz="1500" dirty="0" err="1"/>
+                        <a:t>np.append</a:t>
+                      </a:r>
+                      <a:r>
+                        <a:rPr kumimoji="1" lang="en-US" altLang="ja-JP" sz="1500" dirty="0"/>
+                        <a:t>()</a:t>
+                      </a:r>
+                      <a:endParaRPr kumimoji="1" lang="ja-JP" altLang="en-US" sz="1500" dirty="0"/>
+                    </a:p>
+                  </a:txBody>
+                  <a:tcPr/>
+                </a:tc>
+                <a:tc>
+                  <a:txBody>
+                    <a:bodyPr/>
+                    <a:lstStyle/>
+                    <a:p>
+                      <a:r>
+                        <a:rPr kumimoji="1" lang="en-US" altLang="ja-JP" sz="1500" dirty="0"/>
+                        <a:t>c()</a:t>
+                      </a:r>
+                    </a:p>
+                  </a:txBody>
+                  <a:tcPr/>
+                </a:tc>
+                <a:extLst>
+                  <a:ext uri="{0D108BD9-81ED-4DB2-BD59-A6C34878D82A}">
+                    <a16:rowId xmlns:a16="http://schemas.microsoft.com/office/drawing/2014/main" val="1251462625"/>
+                  </a:ext>
+                </a:extLst>
+              </a:tr>
+            </a:tbl>
+          </a:graphicData>
+        </a:graphic>
+      </p:graphicFrame>
+      <p:sp>
+        <p:nvSpPr>
+          <p:cNvPr id="14" name="正方形/長方形 13">
+            <a:extLst>
+              <a:ext uri="{FF2B5EF4-FFF2-40B4-BE49-F238E27FC236}">
+                <a16:creationId xmlns:a16="http://schemas.microsoft.com/office/drawing/2014/main" id="{A082B75C-8B32-C889-B5AA-7E197128E2D2}"/>
+              </a:ext>
+            </a:extLst>
+          </p:cNvPr>
+          <p:cNvSpPr/>
+          <p:nvPr/>
+        </p:nvSpPr>
+        <p:spPr bwMode="auto">
+          <a:xfrm>
+            <a:off x="3063380" y="1004700"/>
+            <a:ext cx="3752451" cy="1976512"/>
+          </a:xfrm>
+          <a:prstGeom prst="rect">
+            <a:avLst/>
+          </a:prstGeom>
+          <a:solidFill>
+            <a:schemeClr val="accent5">
+              <a:lumMod val="40000"/>
+              <a:lumOff val="60000"/>
+            </a:schemeClr>
+          </a:solidFill>
+          <a:ln w="9525" cap="flat" cmpd="sng" algn="ctr">
+            <a:noFill/>
+            <a:prstDash val="solid"/>
+            <a:miter lim="800000"/>
+            <a:headEnd type="none" w="med" len="med"/>
+            <a:tailEnd type="none" w="med" len="med"/>
+          </a:ln>
+          <a:effectLst/>
+        </p:spPr>
+        <p:txBody>
+          <a:bodyPr vert="horz" wrap="none" lIns="91440" tIns="45720" rIns="91440" bIns="45720" numCol="1" rtlCol="0" anchor="t" anchorCtr="0" compatLnSpc="1">
+            <a:prstTxWarp prst="textNoShape">
+              <a:avLst/>
+            </a:prstTxWarp>
+          </a:bodyPr>
+          <a:lstStyle/>
+          <a:p>
+            <a:pPr marL="0" marR="0" indent="0" defTabSz="914400" rtl="0" eaLnBrk="1" fontAlgn="base" latinLnBrk="0" hangingPunct="1">
+              <a:spcBef>
+                <a:spcPct val="0"/>
+              </a:spcBef>
+              <a:spcAft>
+                <a:spcPct val="0"/>
+              </a:spcAft>
+              <a:buClrTx/>
+              <a:buSzTx/>
+              <a:buFontTx/>
+              <a:buNone/>
+              <a:tabLst/>
+            </a:pPr>
+            <a:r>
+              <a:rPr kumimoji="1" lang="en-US" altLang="ja-JP" sz="1500" b="0" i="0" u="none" strike="noStrike" cap="none" normalizeH="0" baseline="0" dirty="0">
+                <a:ln>
+                  <a:noFill/>
+                </a:ln>
+                <a:solidFill>
+                  <a:schemeClr val="accent5">
+                    <a:lumMod val="50000"/>
+                  </a:schemeClr>
+                </a:solidFill>
+                <a:effectLst/>
+                <a:latin typeface="Arial" charset="0"/>
+                <a:ea typeface="ＭＳ Ｐゴシック" pitchFamily="50" charset="-128"/>
+              </a:rPr>
+              <a:t>Python</a:t>
+            </a:r>
+            <a:endParaRPr kumimoji="1" lang="ja-JP" altLang="en-US" sz="1500" b="0" i="0" u="none" strike="noStrike" cap="none" normalizeH="0" baseline="0" dirty="0">
+              <a:ln>
+                <a:noFill/>
+              </a:ln>
+              <a:solidFill>
+                <a:schemeClr val="accent5">
+                  <a:lumMod val="50000"/>
+                </a:schemeClr>
+              </a:solidFill>
+              <a:effectLst/>
+              <a:latin typeface="Arial" charset="0"/>
+              <a:ea typeface="ＭＳ Ｐゴシック" pitchFamily="50" charset="-128"/>
+            </a:endParaRPr>
+          </a:p>
+        </p:txBody>
+      </p:sp>
+      <p:sp>
+        <p:nvSpPr>
+          <p:cNvPr id="16" name="正方形/長方形 15">
+            <a:extLst>
+              <a:ext uri="{FF2B5EF4-FFF2-40B4-BE49-F238E27FC236}">
+                <a16:creationId xmlns:a16="http://schemas.microsoft.com/office/drawing/2014/main" id="{E1056466-E41D-8B4C-8C91-CDACA1D6D7B1}"/>
+              </a:ext>
+            </a:extLst>
+          </p:cNvPr>
+          <p:cNvSpPr/>
+          <p:nvPr/>
+        </p:nvSpPr>
+        <p:spPr bwMode="auto">
+          <a:xfrm>
+            <a:off x="6887228" y="1000912"/>
+            <a:ext cx="5215125" cy="2584304"/>
+          </a:xfrm>
+          <a:prstGeom prst="rect">
+            <a:avLst/>
+          </a:prstGeom>
+          <a:solidFill>
+            <a:schemeClr val="accent3">
+              <a:lumMod val="85000"/>
+            </a:schemeClr>
+          </a:solidFill>
+          <a:ln w="9525" cap="flat" cmpd="sng" algn="ctr">
+            <a:noFill/>
+            <a:prstDash val="solid"/>
+            <a:miter lim="800000"/>
+            <a:headEnd type="none" w="med" len="med"/>
+            <a:tailEnd type="none" w="med" len="med"/>
+          </a:ln>
+          <a:effectLst/>
+        </p:spPr>
+        <p:txBody>
+          <a:bodyPr vert="horz" wrap="none" lIns="91440" tIns="45720" rIns="91440" bIns="45720" numCol="1" rtlCol="0" anchor="t" anchorCtr="0" compatLnSpc="1">
+            <a:prstTxWarp prst="textNoShape">
+              <a:avLst/>
+            </a:prstTxWarp>
+          </a:bodyPr>
+          <a:lstStyle/>
+          <a:p>
+            <a:pPr marL="0" marR="0" indent="0" defTabSz="914400" rtl="0" eaLnBrk="1" fontAlgn="base" latinLnBrk="0" hangingPunct="1">
+              <a:spcBef>
+                <a:spcPct val="0"/>
+              </a:spcBef>
+              <a:spcAft>
+                <a:spcPct val="0"/>
+              </a:spcAft>
+              <a:buClrTx/>
+              <a:buSzTx/>
+              <a:buFontTx/>
+              <a:buNone/>
+              <a:tabLst/>
+            </a:pPr>
+            <a:r>
+              <a:rPr lang="en-US" altLang="ja-JP" sz="1500" dirty="0">
+                <a:solidFill>
+                  <a:schemeClr val="accent4">
+                    <a:lumMod val="65000"/>
+                    <a:lumOff val="35000"/>
+                  </a:schemeClr>
+                </a:solidFill>
+                <a:latin typeface="Arial" charset="0"/>
+                <a:ea typeface="ＭＳ Ｐゴシック" pitchFamily="50" charset="-128"/>
+              </a:rPr>
+              <a:t>R</a:t>
+            </a:r>
+          </a:p>
+        </p:txBody>
+      </p:sp>
+      <p:pic>
+        <p:nvPicPr>
+          <p:cNvPr id="5" name="図 4">
+            <a:extLst>
+              <a:ext uri="{FF2B5EF4-FFF2-40B4-BE49-F238E27FC236}">
+                <a16:creationId xmlns:a16="http://schemas.microsoft.com/office/drawing/2014/main" id="{941B0197-329A-EA69-ABB6-C099EEFCE059}"/>
+              </a:ext>
+            </a:extLst>
+          </p:cNvPr>
+          <p:cNvPicPr>
+            <a:picLocks noChangeAspect="1"/>
+          </p:cNvPicPr>
+          <p:nvPr/>
+        </p:nvPicPr>
+        <p:blipFill>
+          <a:blip r:embed="rId3"/>
+          <a:stretch>
+            <a:fillRect/>
+          </a:stretch>
+        </p:blipFill>
+        <p:spPr>
+          <a:xfrm>
+            <a:off x="3212933" y="1349059"/>
+            <a:ext cx="3524742" cy="1495634"/>
+          </a:xfrm>
+          <a:prstGeom prst="rect">
+            <a:avLst/>
+          </a:prstGeom>
+          <a:ln>
+            <a:solidFill>
+              <a:schemeClr val="accent5">
+                <a:lumMod val="75000"/>
+              </a:schemeClr>
+            </a:solidFill>
+          </a:ln>
+        </p:spPr>
+      </p:pic>
+      <p:pic>
+        <p:nvPicPr>
+          <p:cNvPr id="10" name="図 9">
+            <a:extLst>
+              <a:ext uri="{FF2B5EF4-FFF2-40B4-BE49-F238E27FC236}">
+                <a16:creationId xmlns:a16="http://schemas.microsoft.com/office/drawing/2014/main" id="{006CBFF3-11C6-A214-9E29-84C46F6D5356}"/>
+              </a:ext>
+            </a:extLst>
+          </p:cNvPr>
+          <p:cNvPicPr>
+            <a:picLocks noChangeAspect="1"/>
+          </p:cNvPicPr>
+          <p:nvPr/>
+        </p:nvPicPr>
+        <p:blipFill>
+          <a:blip r:embed="rId4"/>
+          <a:stretch>
+            <a:fillRect/>
+          </a:stretch>
+        </p:blipFill>
+        <p:spPr>
+          <a:xfrm>
+            <a:off x="6968760" y="1404722"/>
+            <a:ext cx="5048955" cy="2019582"/>
+          </a:xfrm>
+          <a:prstGeom prst="rect">
+            <a:avLst/>
+          </a:prstGeom>
+          <a:ln>
+            <a:solidFill>
+              <a:schemeClr val="accent3">
+                <a:lumMod val="65000"/>
+              </a:schemeClr>
+            </a:solidFill>
+          </a:ln>
+        </p:spPr>
+      </p:pic>
+      <p:sp>
+        <p:nvSpPr>
+          <p:cNvPr id="12" name="正方形/長方形 11">
+            <a:extLst>
+              <a:ext uri="{FF2B5EF4-FFF2-40B4-BE49-F238E27FC236}">
+                <a16:creationId xmlns:a16="http://schemas.microsoft.com/office/drawing/2014/main" id="{F4B036FB-11D4-7E47-37A4-F4D4FB3EE24E}"/>
+              </a:ext>
+            </a:extLst>
+          </p:cNvPr>
+          <p:cNvSpPr/>
+          <p:nvPr/>
+        </p:nvSpPr>
+        <p:spPr bwMode="auto">
+          <a:xfrm>
+            <a:off x="1835536" y="5382647"/>
+            <a:ext cx="2754794" cy="512951"/>
+          </a:xfrm>
+          <a:prstGeom prst="rect">
+            <a:avLst/>
+          </a:prstGeom>
+          <a:solidFill>
+            <a:schemeClr val="accent6">
+              <a:lumMod val="20000"/>
+              <a:lumOff val="80000"/>
+            </a:schemeClr>
+          </a:solidFill>
+          <a:ln w="9525" cap="flat" cmpd="sng" algn="ctr">
+            <a:solidFill>
+              <a:schemeClr val="accent6">
+                <a:lumMod val="75000"/>
+              </a:schemeClr>
+            </a:solidFill>
+            <a:prstDash val="solid"/>
+            <a:miter lim="800000"/>
+            <a:headEnd type="none" w="med" len="med"/>
+            <a:tailEnd type="none" w="med" len="med"/>
+          </a:ln>
+          <a:effectLst/>
+        </p:spPr>
+        <p:txBody>
+          <a:bodyPr vert="horz" wrap="none" lIns="91440" tIns="45720" rIns="91440" bIns="45720" numCol="1" rtlCol="0" anchor="t" anchorCtr="0" compatLnSpc="1">
+            <a:prstTxWarp prst="textNoShape">
+              <a:avLst/>
+            </a:prstTxWarp>
+          </a:bodyPr>
+          <a:lstStyle/>
+          <a:p>
+            <a:pPr marL="0" marR="0" indent="0" algn="ctr" defTabSz="914400" rtl="0" eaLnBrk="1" fontAlgn="base" latinLnBrk="0" hangingPunct="1">
+              <a:spcBef>
+                <a:spcPct val="0"/>
+              </a:spcBef>
+              <a:spcAft>
+                <a:spcPct val="0"/>
+              </a:spcAft>
+              <a:buClrTx/>
+              <a:buSzTx/>
+              <a:buFontTx/>
+              <a:buNone/>
+              <a:tabLst/>
+            </a:pPr>
+            <a:r>
+              <a:rPr kumimoji="1" lang="en-US" altLang="ja-JP" sz="1200" b="0" i="0" u="none" strike="noStrike" cap="none" normalizeH="0" baseline="0" dirty="0" err="1">
+                <a:ln>
+                  <a:noFill/>
+                </a:ln>
+                <a:solidFill>
+                  <a:schemeClr val="accent4"/>
+                </a:solidFill>
+                <a:effectLst/>
+                <a:latin typeface="Arial" charset="0"/>
+                <a:ea typeface="ＭＳ Ｐゴシック" pitchFamily="50" charset="-128"/>
+              </a:rPr>
+              <a:t>runif</a:t>
+            </a:r>
+            <a:r>
+              <a:rPr kumimoji="1" lang="en-US" altLang="ja-JP" sz="1200" b="0" i="0" u="none" strike="noStrike" cap="none" normalizeH="0" baseline="0" dirty="0">
+                <a:ln>
+                  <a:noFill/>
+                </a:ln>
+                <a:solidFill>
+                  <a:schemeClr val="accent4"/>
+                </a:solidFill>
+                <a:effectLst/>
+                <a:latin typeface="Arial" charset="0"/>
+                <a:ea typeface="ＭＳ Ｐゴシック" pitchFamily="50" charset="-128"/>
+              </a:rPr>
+              <a:t>()</a:t>
+            </a:r>
+          </a:p>
+          <a:p>
+            <a:pPr marL="0" marR="0" indent="0" algn="ctr" defTabSz="914400" rtl="0" eaLnBrk="1" fontAlgn="base" latinLnBrk="0" hangingPunct="1">
+              <a:spcBef>
+                <a:spcPct val="0"/>
+              </a:spcBef>
+              <a:spcAft>
+                <a:spcPct val="0"/>
+              </a:spcAft>
+              <a:buClrTx/>
+              <a:buSzTx/>
+              <a:buFontTx/>
+              <a:buNone/>
+              <a:tabLst/>
+            </a:pPr>
+            <a:r>
+              <a:rPr lang="ja-JP" altLang="en-US" sz="1200" dirty="0">
+                <a:solidFill>
+                  <a:schemeClr val="accent4"/>
+                </a:solidFill>
+                <a:latin typeface="Arial" charset="0"/>
+                <a:ea typeface="ＭＳ Ｐゴシック" pitchFamily="50" charset="-128"/>
+              </a:rPr>
+              <a:t>新しいデータから乱数を生成</a:t>
+            </a:r>
+            <a:r>
+              <a:rPr lang="en-US" altLang="ja-JP" sz="1200" dirty="0">
+                <a:solidFill>
+                  <a:schemeClr val="accent4"/>
+                </a:solidFill>
+                <a:latin typeface="Arial" charset="0"/>
+                <a:ea typeface="ＭＳ Ｐゴシック" pitchFamily="50" charset="-128"/>
+              </a:rPr>
+              <a:t>(</a:t>
+            </a:r>
+            <a:r>
+              <a:rPr lang="ja-JP" altLang="en-US" sz="1200" dirty="0">
+                <a:solidFill>
+                  <a:schemeClr val="accent4"/>
+                </a:solidFill>
+                <a:latin typeface="Arial" charset="0"/>
+                <a:ea typeface="ＭＳ Ｐゴシック" pitchFamily="50" charset="-128"/>
+              </a:rPr>
+              <a:t>一様分布</a:t>
+            </a:r>
+            <a:r>
+              <a:rPr lang="en-US" altLang="ja-JP" sz="1200" dirty="0">
+                <a:solidFill>
+                  <a:schemeClr val="accent4"/>
+                </a:solidFill>
+                <a:latin typeface="Arial" charset="0"/>
+                <a:ea typeface="ＭＳ Ｐゴシック" pitchFamily="50" charset="-128"/>
+              </a:rPr>
+              <a:t>)</a:t>
+            </a:r>
+            <a:endParaRPr kumimoji="1" lang="ja-JP" altLang="en-US" sz="1200" b="0" i="0" u="none" strike="noStrike" cap="none" normalizeH="0" baseline="0" dirty="0">
+              <a:ln>
+                <a:noFill/>
+              </a:ln>
+              <a:solidFill>
+                <a:schemeClr val="accent4"/>
+              </a:solidFill>
+              <a:effectLst/>
+              <a:latin typeface="Arial" charset="0"/>
+              <a:ea typeface="ＭＳ Ｐゴシック" pitchFamily="50" charset="-128"/>
+            </a:endParaRPr>
+          </a:p>
+        </p:txBody>
+      </p:sp>
+    </p:spTree>
+    <p:extLst>
+      <p:ext uri="{BB962C8B-B14F-4D97-AF65-F5344CB8AC3E}">
+        <p14:creationId xmlns:p14="http://schemas.microsoft.com/office/powerpoint/2010/main" val="716933886"/>
+      </p:ext>
+    </p:extLst>
+  </p:cSld>
+  <p:clrMapOvr>
+    <a:masterClrMapping/>
+  </p:clrMapOvr>
+</p:sld>
+</file>
+
+<file path=ppt/slides/slide16.xml><?xml version="1.0" encoding="utf-8"?>
+<p:sld xmlns:a="http://schemas.openxmlformats.org/drawingml/2006/main" xmlns:r="http://schemas.openxmlformats.org/officeDocument/2006/relationships" xmlns:p="http://schemas.openxmlformats.org/presentationml/2006/main">
+  <p:cSld>
+    <p:spTree>
+      <p:nvGrpSpPr>
+        <p:cNvPr id="1" name="">
+          <a:extLst>
+            <a:ext uri="{FF2B5EF4-FFF2-40B4-BE49-F238E27FC236}">
+              <a16:creationId xmlns:a16="http://schemas.microsoft.com/office/drawing/2014/main" id="{60DC8073-E444-51DF-CE36-45100F5D20DD}"/>
+            </a:ext>
+          </a:extLst>
+        </p:cNvPr>
+        <p:cNvGrpSpPr/>
+        <p:nvPr/>
+      </p:nvGrpSpPr>
+      <p:grpSpPr>
+        <a:xfrm>
+          <a:off x="0" y="0"/>
+          <a:ext cx="0" cy="0"/>
+          <a:chOff x="0" y="0"/>
+          <a:chExt cx="0" cy="0"/>
+        </a:xfrm>
+      </p:grpSpPr>
+      <p:sp>
+        <p:nvSpPr>
+          <p:cNvPr id="3" name="コンテンツ プレースホルダー 2">
+            <a:extLst>
+              <a:ext uri="{FF2B5EF4-FFF2-40B4-BE49-F238E27FC236}">
+                <a16:creationId xmlns:a16="http://schemas.microsoft.com/office/drawing/2014/main" id="{94A60E52-4A48-8A44-9D10-73F89E54D7B5}"/>
+              </a:ext>
+            </a:extLst>
+          </p:cNvPr>
+          <p:cNvSpPr txBox="1">
+            <a:spLocks/>
+          </p:cNvSpPr>
+          <p:nvPr/>
+        </p:nvSpPr>
+        <p:spPr>
+          <a:xfrm>
+            <a:off x="762000" y="1203306"/>
+            <a:ext cx="7396729" cy="557598"/>
+          </a:xfrm>
+          <a:prstGeom prst="rect">
+            <a:avLst/>
+          </a:prstGeom>
+        </p:spPr>
+        <p:txBody>
+          <a:bodyPr/>
+          <a:lstStyle>
+            <a:lvl1pPr marL="342900" indent="-342900" algn="l" rtl="0" eaLnBrk="1" fontAlgn="base" hangingPunct="1">
+              <a:spcBef>
+                <a:spcPct val="20000"/>
+              </a:spcBef>
+              <a:spcAft>
+                <a:spcPct val="0"/>
+              </a:spcAft>
+              <a:buClr>
+                <a:schemeClr val="accent1"/>
+              </a:buClr>
+              <a:buSzPct val="65000"/>
+              <a:buFont typeface="Wingdings" pitchFamily="2" charset="2"/>
+              <a:buChar char="n"/>
+              <a:defRPr kumimoji="1" sz="3200">
+                <a:solidFill>
+                  <a:schemeClr val="tx1"/>
+                </a:solidFill>
+                <a:latin typeface="+mn-lt"/>
+                <a:ea typeface="+mn-ea"/>
+                <a:cs typeface="+mn-cs"/>
+              </a:defRPr>
+            </a:lvl1pPr>
+            <a:lvl2pPr marL="669925" indent="-325438" algn="l" rtl="0" eaLnBrk="1" fontAlgn="base" hangingPunct="1">
+              <a:spcBef>
+                <a:spcPct val="20000"/>
+              </a:spcBef>
+              <a:spcAft>
+                <a:spcPct val="0"/>
+              </a:spcAft>
+              <a:buClr>
+                <a:schemeClr val="accent2"/>
+              </a:buClr>
+              <a:buSzPct val="60000"/>
+              <a:buFont typeface="Wingdings" pitchFamily="2" charset="2"/>
+              <a:buChar char="q"/>
+              <a:defRPr kumimoji="1" sz="2800">
+                <a:solidFill>
+                  <a:schemeClr val="tx1"/>
+                </a:solidFill>
+                <a:latin typeface="+mn-lt"/>
+                <a:ea typeface="+mn-ea"/>
+              </a:defRPr>
+            </a:lvl2pPr>
+            <a:lvl3pPr marL="1022350" indent="-350838" algn="l" rtl="0" eaLnBrk="1" fontAlgn="base" hangingPunct="1">
+              <a:spcBef>
+                <a:spcPct val="20000"/>
+              </a:spcBef>
+              <a:spcAft>
+                <a:spcPct val="0"/>
+              </a:spcAft>
+              <a:buClr>
+                <a:schemeClr val="accent1"/>
+              </a:buClr>
+              <a:buSzPct val="65000"/>
+              <a:buFont typeface="Wingdings" pitchFamily="2" charset="2"/>
+              <a:buChar char="n"/>
+              <a:defRPr kumimoji="1" sz="2400">
+                <a:solidFill>
+                  <a:schemeClr val="tx1"/>
+                </a:solidFill>
+                <a:latin typeface="+mn-lt"/>
+                <a:ea typeface="+mn-ea"/>
+              </a:defRPr>
+            </a:lvl3pPr>
+            <a:lvl4pPr marL="1339850" indent="-315913" algn="l" rtl="0" eaLnBrk="1" fontAlgn="base" hangingPunct="1">
+              <a:spcBef>
+                <a:spcPct val="20000"/>
+              </a:spcBef>
+              <a:spcAft>
+                <a:spcPct val="0"/>
+              </a:spcAft>
+              <a:buClr>
+                <a:schemeClr val="accent2"/>
+              </a:buClr>
+              <a:buSzPct val="70000"/>
+              <a:buFont typeface="Wingdings" pitchFamily="2" charset="2"/>
+              <a:buChar char="q"/>
+              <a:defRPr kumimoji="1" sz="2000">
+                <a:solidFill>
+                  <a:schemeClr val="tx1"/>
+                </a:solidFill>
+                <a:latin typeface="+mn-lt"/>
+                <a:ea typeface="+mn-ea"/>
+              </a:defRPr>
+            </a:lvl4pPr>
+            <a:lvl5pPr marL="1681163" indent="-339725" algn="l" rtl="0" eaLnBrk="1" fontAlgn="base" hangingPunct="1">
+              <a:spcBef>
+                <a:spcPct val="20000"/>
+              </a:spcBef>
+              <a:spcAft>
+                <a:spcPct val="0"/>
+              </a:spcAft>
+              <a:buClr>
+                <a:schemeClr val="accent1"/>
+              </a:buClr>
+              <a:buSzPct val="75000"/>
+              <a:buFont typeface="Wingdings" pitchFamily="2" charset="2"/>
+              <a:buChar char="§"/>
+              <a:defRPr kumimoji="1">
+                <a:solidFill>
+                  <a:schemeClr val="tx1"/>
+                </a:solidFill>
+                <a:latin typeface="+mn-lt"/>
+                <a:ea typeface="+mn-ea"/>
+              </a:defRPr>
+            </a:lvl5pPr>
+            <a:lvl6pPr marL="2138363" indent="-339725" algn="l" rtl="0" eaLnBrk="1" fontAlgn="base" hangingPunct="1">
+              <a:spcBef>
+                <a:spcPct val="20000"/>
+              </a:spcBef>
+              <a:spcAft>
+                <a:spcPct val="0"/>
+              </a:spcAft>
+              <a:buClr>
+                <a:schemeClr val="accent1"/>
+              </a:buClr>
+              <a:buSzPct val="75000"/>
+              <a:buFont typeface="Wingdings" pitchFamily="2" charset="2"/>
+              <a:buChar char="§"/>
+              <a:defRPr kumimoji="1">
+                <a:solidFill>
+                  <a:schemeClr val="tx1"/>
+                </a:solidFill>
+                <a:latin typeface="+mn-lt"/>
+                <a:ea typeface="+mn-ea"/>
+              </a:defRPr>
+            </a:lvl6pPr>
+            <a:lvl7pPr marL="2595563" indent="-339725" algn="l" rtl="0" eaLnBrk="1" fontAlgn="base" hangingPunct="1">
+              <a:spcBef>
+                <a:spcPct val="20000"/>
+              </a:spcBef>
+              <a:spcAft>
+                <a:spcPct val="0"/>
+              </a:spcAft>
+              <a:buClr>
+                <a:schemeClr val="accent1"/>
+              </a:buClr>
+              <a:buSzPct val="75000"/>
+              <a:buFont typeface="Wingdings" pitchFamily="2" charset="2"/>
+              <a:buChar char="§"/>
+              <a:defRPr kumimoji="1">
+                <a:solidFill>
+                  <a:schemeClr val="tx1"/>
+                </a:solidFill>
+                <a:latin typeface="+mn-lt"/>
+                <a:ea typeface="+mn-ea"/>
+              </a:defRPr>
+            </a:lvl7pPr>
+            <a:lvl8pPr marL="3052763" indent="-339725" algn="l" rtl="0" eaLnBrk="1" fontAlgn="base" hangingPunct="1">
+              <a:spcBef>
+                <a:spcPct val="20000"/>
+              </a:spcBef>
+              <a:spcAft>
+                <a:spcPct val="0"/>
+              </a:spcAft>
+              <a:buClr>
+                <a:schemeClr val="accent1"/>
+              </a:buClr>
+              <a:buSzPct val="75000"/>
+              <a:buFont typeface="Wingdings" pitchFamily="2" charset="2"/>
+              <a:buChar char="§"/>
+              <a:defRPr kumimoji="1">
+                <a:solidFill>
+                  <a:schemeClr val="tx1"/>
+                </a:solidFill>
+                <a:latin typeface="+mn-lt"/>
+                <a:ea typeface="+mn-ea"/>
+              </a:defRPr>
+            </a:lvl8pPr>
+            <a:lvl9pPr marL="3509963" indent="-339725" algn="l" rtl="0" eaLnBrk="1" fontAlgn="base" hangingPunct="1">
+              <a:spcBef>
+                <a:spcPct val="20000"/>
+              </a:spcBef>
+              <a:spcAft>
+                <a:spcPct val="0"/>
+              </a:spcAft>
+              <a:buClr>
+                <a:schemeClr val="accent1"/>
+              </a:buClr>
+              <a:buSzPct val="75000"/>
+              <a:buFont typeface="Wingdings" pitchFamily="2" charset="2"/>
+              <a:buChar char="§"/>
+              <a:defRPr kumimoji="1">
+                <a:solidFill>
+                  <a:schemeClr val="tx1"/>
+                </a:solidFill>
+                <a:latin typeface="+mn-lt"/>
+                <a:ea typeface="+mn-ea"/>
+              </a:defRPr>
+            </a:lvl9pPr>
+          </a:lstStyle>
+          <a:p>
+            <a:pPr marL="0" indent="0">
+              <a:buNone/>
+            </a:pPr>
+            <a:r>
+              <a:rPr lang="ja-JP" altLang="en-US" b="1" kern="0" dirty="0"/>
+              <a:t>学習</a:t>
+            </a:r>
+            <a:endParaRPr lang="en-US" altLang="ja-JP" sz="2000" kern="0" dirty="0">
+              <a:solidFill>
+                <a:schemeClr val="accent6"/>
+              </a:solidFill>
+            </a:endParaRPr>
+          </a:p>
+        </p:txBody>
+      </p:sp>
+      <p:sp>
+        <p:nvSpPr>
+          <p:cNvPr id="11" name="コンテンツ プレースホルダー 2">
+            <a:extLst>
+              <a:ext uri="{FF2B5EF4-FFF2-40B4-BE49-F238E27FC236}">
+                <a16:creationId xmlns:a16="http://schemas.microsoft.com/office/drawing/2014/main" id="{C5352A9B-147A-270B-B02A-4A45E1AABB12}"/>
+              </a:ext>
+            </a:extLst>
+          </p:cNvPr>
+          <p:cNvSpPr txBox="1">
+            <a:spLocks/>
+          </p:cNvSpPr>
+          <p:nvPr/>
+        </p:nvSpPr>
+        <p:spPr>
+          <a:xfrm>
+            <a:off x="773722" y="2143598"/>
+            <a:ext cx="5433439" cy="2642416"/>
+          </a:xfrm>
+          <a:prstGeom prst="rect">
+            <a:avLst/>
+          </a:prstGeom>
+        </p:spPr>
+        <p:txBody>
+          <a:bodyPr/>
+          <a:lstStyle>
+            <a:lvl1pPr marL="342900" indent="-342900" algn="l" rtl="0" eaLnBrk="1" fontAlgn="base" hangingPunct="1">
+              <a:spcBef>
+                <a:spcPct val="20000"/>
+              </a:spcBef>
+              <a:spcAft>
+                <a:spcPct val="0"/>
+              </a:spcAft>
+              <a:buClr>
+                <a:schemeClr val="accent1"/>
+              </a:buClr>
+              <a:buSzPct val="65000"/>
+              <a:buFont typeface="Wingdings" pitchFamily="2" charset="2"/>
+              <a:buChar char="n"/>
+              <a:defRPr kumimoji="1" sz="3200">
+                <a:solidFill>
+                  <a:schemeClr val="tx1"/>
+                </a:solidFill>
+                <a:latin typeface="+mn-lt"/>
+                <a:ea typeface="+mn-ea"/>
+                <a:cs typeface="+mn-cs"/>
+              </a:defRPr>
+            </a:lvl1pPr>
+            <a:lvl2pPr marL="669925" indent="-325438" algn="l" rtl="0" eaLnBrk="1" fontAlgn="base" hangingPunct="1">
+              <a:spcBef>
+                <a:spcPct val="20000"/>
+              </a:spcBef>
+              <a:spcAft>
+                <a:spcPct val="0"/>
+              </a:spcAft>
+              <a:buClr>
+                <a:schemeClr val="accent2"/>
+              </a:buClr>
+              <a:buSzPct val="60000"/>
+              <a:buFont typeface="Wingdings" pitchFamily="2" charset="2"/>
+              <a:buChar char="q"/>
+              <a:defRPr kumimoji="1" sz="2800">
+                <a:solidFill>
+                  <a:schemeClr val="tx1"/>
+                </a:solidFill>
+                <a:latin typeface="+mn-lt"/>
+                <a:ea typeface="+mn-ea"/>
+              </a:defRPr>
+            </a:lvl2pPr>
+            <a:lvl3pPr marL="1022350" indent="-350838" algn="l" rtl="0" eaLnBrk="1" fontAlgn="base" hangingPunct="1">
+              <a:spcBef>
+                <a:spcPct val="20000"/>
+              </a:spcBef>
+              <a:spcAft>
+                <a:spcPct val="0"/>
+              </a:spcAft>
+              <a:buClr>
+                <a:schemeClr val="accent1"/>
+              </a:buClr>
+              <a:buSzPct val="65000"/>
+              <a:buFont typeface="Wingdings" pitchFamily="2" charset="2"/>
+              <a:buChar char="n"/>
+              <a:defRPr kumimoji="1" sz="2400">
+                <a:solidFill>
+                  <a:schemeClr val="tx1"/>
+                </a:solidFill>
+                <a:latin typeface="+mn-lt"/>
+                <a:ea typeface="+mn-ea"/>
+              </a:defRPr>
+            </a:lvl3pPr>
+            <a:lvl4pPr marL="1339850" indent="-315913" algn="l" rtl="0" eaLnBrk="1" fontAlgn="base" hangingPunct="1">
+              <a:spcBef>
+                <a:spcPct val="20000"/>
+              </a:spcBef>
+              <a:spcAft>
+                <a:spcPct val="0"/>
+              </a:spcAft>
+              <a:buClr>
+                <a:schemeClr val="accent2"/>
+              </a:buClr>
+              <a:buSzPct val="70000"/>
+              <a:buFont typeface="Wingdings" pitchFamily="2" charset="2"/>
+              <a:buChar char="q"/>
+              <a:defRPr kumimoji="1" sz="2000">
+                <a:solidFill>
+                  <a:schemeClr val="tx1"/>
+                </a:solidFill>
+                <a:latin typeface="+mn-lt"/>
+                <a:ea typeface="+mn-ea"/>
+              </a:defRPr>
+            </a:lvl4pPr>
+            <a:lvl5pPr marL="1681163" indent="-339725" algn="l" rtl="0" eaLnBrk="1" fontAlgn="base" hangingPunct="1">
+              <a:spcBef>
+                <a:spcPct val="20000"/>
+              </a:spcBef>
+              <a:spcAft>
+                <a:spcPct val="0"/>
+              </a:spcAft>
+              <a:buClr>
+                <a:schemeClr val="accent1"/>
+              </a:buClr>
+              <a:buSzPct val="75000"/>
+              <a:buFont typeface="Wingdings" pitchFamily="2" charset="2"/>
+              <a:buChar char="§"/>
+              <a:defRPr kumimoji="1">
+                <a:solidFill>
+                  <a:schemeClr val="tx1"/>
+                </a:solidFill>
+                <a:latin typeface="+mn-lt"/>
+                <a:ea typeface="+mn-ea"/>
+              </a:defRPr>
+            </a:lvl5pPr>
+            <a:lvl6pPr marL="2138363" indent="-339725" algn="l" rtl="0" eaLnBrk="1" fontAlgn="base" hangingPunct="1">
+              <a:spcBef>
+                <a:spcPct val="20000"/>
+              </a:spcBef>
+              <a:spcAft>
+                <a:spcPct val="0"/>
+              </a:spcAft>
+              <a:buClr>
+                <a:schemeClr val="accent1"/>
+              </a:buClr>
+              <a:buSzPct val="75000"/>
+              <a:buFont typeface="Wingdings" pitchFamily="2" charset="2"/>
+              <a:buChar char="§"/>
+              <a:defRPr kumimoji="1">
+                <a:solidFill>
+                  <a:schemeClr val="tx1"/>
+                </a:solidFill>
+                <a:latin typeface="+mn-lt"/>
+                <a:ea typeface="+mn-ea"/>
+              </a:defRPr>
+            </a:lvl6pPr>
+            <a:lvl7pPr marL="2595563" indent="-339725" algn="l" rtl="0" eaLnBrk="1" fontAlgn="base" hangingPunct="1">
+              <a:spcBef>
+                <a:spcPct val="20000"/>
+              </a:spcBef>
+              <a:spcAft>
+                <a:spcPct val="0"/>
+              </a:spcAft>
+              <a:buClr>
+                <a:schemeClr val="accent1"/>
+              </a:buClr>
+              <a:buSzPct val="75000"/>
+              <a:buFont typeface="Wingdings" pitchFamily="2" charset="2"/>
+              <a:buChar char="§"/>
+              <a:defRPr kumimoji="1">
+                <a:solidFill>
+                  <a:schemeClr val="tx1"/>
+                </a:solidFill>
+                <a:latin typeface="+mn-lt"/>
+                <a:ea typeface="+mn-ea"/>
+              </a:defRPr>
+            </a:lvl7pPr>
+            <a:lvl8pPr marL="3052763" indent="-339725" algn="l" rtl="0" eaLnBrk="1" fontAlgn="base" hangingPunct="1">
+              <a:spcBef>
+                <a:spcPct val="20000"/>
+              </a:spcBef>
+              <a:spcAft>
+                <a:spcPct val="0"/>
+              </a:spcAft>
+              <a:buClr>
+                <a:schemeClr val="accent1"/>
+              </a:buClr>
+              <a:buSzPct val="75000"/>
+              <a:buFont typeface="Wingdings" pitchFamily="2" charset="2"/>
+              <a:buChar char="§"/>
+              <a:defRPr kumimoji="1">
+                <a:solidFill>
+                  <a:schemeClr val="tx1"/>
+                </a:solidFill>
+                <a:latin typeface="+mn-lt"/>
+                <a:ea typeface="+mn-ea"/>
+              </a:defRPr>
+            </a:lvl8pPr>
+            <a:lvl9pPr marL="3509963" indent="-339725" algn="l" rtl="0" eaLnBrk="1" fontAlgn="base" hangingPunct="1">
+              <a:spcBef>
+                <a:spcPct val="20000"/>
+              </a:spcBef>
+              <a:spcAft>
+                <a:spcPct val="0"/>
+              </a:spcAft>
+              <a:buClr>
+                <a:schemeClr val="accent1"/>
+              </a:buClr>
+              <a:buSzPct val="75000"/>
+              <a:buFont typeface="Wingdings" pitchFamily="2" charset="2"/>
+              <a:buChar char="§"/>
+              <a:defRPr kumimoji="1">
+                <a:solidFill>
+                  <a:schemeClr val="tx1"/>
+                </a:solidFill>
+                <a:latin typeface="+mn-lt"/>
+                <a:ea typeface="+mn-ea"/>
+              </a:defRPr>
+            </a:lvl9pPr>
+          </a:lstStyle>
+          <a:p>
+            <a:r>
+              <a:rPr lang="en-US" altLang="ja-JP" sz="2400" kern="0" dirty="0" err="1"/>
+              <a:t>x,y</a:t>
+            </a:r>
+            <a:r>
+              <a:rPr lang="ja-JP" altLang="en-US" sz="2400" kern="0" dirty="0"/>
+              <a:t> に代入</a:t>
+            </a:r>
+            <a:endParaRPr lang="en-US" altLang="ja-JP" sz="2400" kern="0" dirty="0"/>
+          </a:p>
+          <a:p>
+            <a:r>
+              <a:rPr lang="en-US" altLang="ja-JP" sz="2400" kern="0" dirty="0"/>
+              <a:t>SVM</a:t>
+            </a:r>
+          </a:p>
+          <a:p>
+            <a:pPr marL="0" indent="0">
+              <a:buNone/>
+            </a:pPr>
+            <a:r>
+              <a:rPr lang="en-US" altLang="ja-JP" sz="1800" kern="0" dirty="0">
+                <a:solidFill>
+                  <a:schemeClr val="accent3">
+                    <a:lumMod val="50000"/>
+                  </a:schemeClr>
+                </a:solidFill>
+              </a:rPr>
+              <a:t>   </a:t>
+            </a:r>
+            <a:r>
+              <a:rPr lang="en-US" altLang="ja-JP" sz="1800" kern="0" dirty="0" err="1">
+                <a:solidFill>
+                  <a:schemeClr val="accent3">
+                    <a:lumMod val="50000"/>
+                  </a:schemeClr>
+                </a:solidFill>
+              </a:rPr>
+              <a:t>svm</a:t>
+            </a:r>
+            <a:r>
+              <a:rPr lang="en-US" altLang="ja-JP" sz="1800" kern="0" dirty="0">
+                <a:solidFill>
+                  <a:schemeClr val="accent3">
+                    <a:lumMod val="50000"/>
+                  </a:schemeClr>
+                </a:solidFill>
+              </a:rPr>
+              <a:t>() : </a:t>
+            </a:r>
+            <a:r>
+              <a:rPr lang="ja-JP" altLang="en-US" sz="1800" kern="0" dirty="0">
+                <a:solidFill>
+                  <a:schemeClr val="accent3">
+                    <a:lumMod val="50000"/>
+                  </a:schemeClr>
+                </a:solidFill>
+              </a:rPr>
+              <a:t>モデルの作成・学習</a:t>
+            </a:r>
+            <a:endParaRPr lang="en-US" altLang="ja-JP" sz="1800" kern="0" dirty="0"/>
+          </a:p>
+          <a:p>
+            <a:r>
+              <a:rPr lang="ja-JP" altLang="en-US" sz="2400" kern="0" dirty="0"/>
+              <a:t>予測</a:t>
+            </a:r>
+            <a:endParaRPr lang="en-US" altLang="ja-JP" sz="2400" kern="0" dirty="0"/>
+          </a:p>
+          <a:p>
+            <a:pPr marL="0" indent="0">
+              <a:buNone/>
+            </a:pPr>
+            <a:r>
+              <a:rPr kumimoji="1" lang="en-US" altLang="ja-JP" sz="1800" b="0" i="0" u="none" strike="noStrike" kern="0" cap="none" spc="0" normalizeH="0" baseline="0" noProof="0" dirty="0">
+                <a:ln>
+                  <a:noFill/>
+                </a:ln>
+                <a:solidFill>
+                  <a:srgbClr val="FFFFFF">
+                    <a:lumMod val="50000"/>
+                  </a:srgbClr>
+                </a:solidFill>
+                <a:effectLst/>
+                <a:uLnTx/>
+                <a:uFillTx/>
+                <a:latin typeface="Arial"/>
+                <a:ea typeface="ＭＳ Ｐゴシック"/>
+                <a:cs typeface="+mn-cs"/>
+              </a:rPr>
+              <a:t>   </a:t>
+            </a:r>
+            <a:r>
+              <a:rPr kumimoji="1" lang="en-US" altLang="ja-JP" sz="1800" b="0" i="0" u="none" strike="noStrike" kern="0" cap="none" spc="0" normalizeH="0" baseline="0" noProof="0" dirty="0" err="1">
+                <a:ln>
+                  <a:noFill/>
+                </a:ln>
+                <a:solidFill>
+                  <a:srgbClr val="FFFFFF">
+                    <a:lumMod val="50000"/>
+                  </a:srgbClr>
+                </a:solidFill>
+                <a:effectLst/>
+                <a:uLnTx/>
+                <a:uFillTx/>
+                <a:latin typeface="Arial"/>
+                <a:ea typeface="ＭＳ Ｐゴシック"/>
+                <a:cs typeface="+mn-cs"/>
+              </a:rPr>
+              <a:t>predicr</a:t>
+            </a:r>
+            <a:r>
+              <a:rPr kumimoji="1" lang="en-US" altLang="ja-JP" sz="1800" b="0" i="0" u="none" strike="noStrike" kern="0" cap="none" spc="0" normalizeH="0" baseline="0" noProof="0" dirty="0">
+                <a:ln>
+                  <a:noFill/>
+                </a:ln>
+                <a:solidFill>
+                  <a:srgbClr val="FFFFFF">
+                    <a:lumMod val="50000"/>
+                  </a:srgbClr>
+                </a:solidFill>
+                <a:effectLst/>
+                <a:uLnTx/>
+                <a:uFillTx/>
+                <a:latin typeface="Arial"/>
+                <a:ea typeface="ＭＳ Ｐゴシック"/>
+                <a:cs typeface="+mn-cs"/>
+              </a:rPr>
+              <a:t>() : </a:t>
+            </a:r>
+            <a:r>
+              <a:rPr kumimoji="1" lang="ja-JP" altLang="en-US" sz="1800" b="0" i="0" u="none" strike="noStrike" kern="0" cap="none" spc="0" normalizeH="0" baseline="0" noProof="0" dirty="0">
+                <a:ln>
+                  <a:noFill/>
+                </a:ln>
+                <a:solidFill>
+                  <a:srgbClr val="FFFFFF">
+                    <a:lumMod val="50000"/>
+                  </a:srgbClr>
+                </a:solidFill>
+                <a:effectLst/>
+                <a:uLnTx/>
+                <a:uFillTx/>
+                <a:latin typeface="Arial"/>
+                <a:ea typeface="ＭＳ Ｐゴシック"/>
+                <a:cs typeface="+mn-cs"/>
+              </a:rPr>
+              <a:t>学習したモデルでラベルを予測</a:t>
+            </a:r>
+            <a:endParaRPr lang="en-US" altLang="ja-JP" sz="1800" kern="0" dirty="0"/>
+          </a:p>
+          <a:p>
+            <a:r>
+              <a:rPr lang="ja-JP" altLang="en-US" sz="2400" kern="0" dirty="0"/>
+              <a:t>正解率</a:t>
+            </a:r>
+            <a:endParaRPr lang="en-US" altLang="ja-JP" sz="2400" kern="0" dirty="0"/>
+          </a:p>
+          <a:p>
+            <a:pPr marL="0" indent="0">
+              <a:buNone/>
+            </a:pPr>
+            <a:r>
+              <a:rPr kumimoji="1" lang="en-US" altLang="ja-JP" sz="1800" b="0" i="0" u="none" strike="noStrike" kern="0" cap="none" spc="0" normalizeH="0" baseline="0" noProof="0" dirty="0">
+                <a:ln>
+                  <a:noFill/>
+                </a:ln>
+                <a:solidFill>
+                  <a:srgbClr val="FFFFFF">
+                    <a:lumMod val="50000"/>
+                  </a:srgbClr>
+                </a:solidFill>
+                <a:effectLst/>
+                <a:uLnTx/>
+                <a:uFillTx/>
+                <a:latin typeface="Arial"/>
+                <a:ea typeface="ＭＳ Ｐゴシック"/>
+                <a:cs typeface="+mn-cs"/>
+              </a:rPr>
+              <a:t>    mean(</a:t>
+            </a:r>
+            <a:r>
+              <a:rPr kumimoji="1" lang="en-US" altLang="ja-JP" sz="1800" b="0" i="0" u="none" strike="noStrike" kern="0" cap="none" spc="0" normalizeH="0" baseline="0" noProof="0" dirty="0" err="1">
+                <a:ln>
+                  <a:noFill/>
+                </a:ln>
+                <a:solidFill>
+                  <a:srgbClr val="FFFFFF">
+                    <a:lumMod val="50000"/>
+                  </a:srgbClr>
+                </a:solidFill>
+                <a:effectLst/>
+                <a:uLnTx/>
+                <a:uFillTx/>
+                <a:latin typeface="Arial"/>
+                <a:ea typeface="ＭＳ Ｐゴシック"/>
+                <a:cs typeface="+mn-cs"/>
+              </a:rPr>
+              <a:t>y_pred</a:t>
+            </a:r>
+            <a:r>
+              <a:rPr kumimoji="1" lang="en-US" altLang="ja-JP" sz="1800" b="0" i="0" u="none" strike="noStrike" kern="0" cap="none" spc="0" normalizeH="0" baseline="0" noProof="0" dirty="0">
+                <a:ln>
+                  <a:noFill/>
+                </a:ln>
+                <a:solidFill>
+                  <a:srgbClr val="FFFFFF">
+                    <a:lumMod val="50000"/>
+                  </a:srgbClr>
+                </a:solidFill>
+                <a:effectLst/>
+                <a:uLnTx/>
+                <a:uFillTx/>
+                <a:latin typeface="Arial"/>
+                <a:ea typeface="ＭＳ Ｐゴシック"/>
+                <a:cs typeface="+mn-cs"/>
+              </a:rPr>
+              <a:t> == y) : </a:t>
+            </a:r>
+            <a:r>
+              <a:rPr kumimoji="1" lang="ja-JP" altLang="en-US" sz="1800" b="0" i="0" u="none" strike="noStrike" kern="0" cap="none" spc="0" normalizeH="0" baseline="0" noProof="0" dirty="0">
+                <a:ln>
+                  <a:noFill/>
+                </a:ln>
+                <a:solidFill>
+                  <a:srgbClr val="FFFFFF">
+                    <a:lumMod val="50000"/>
+                  </a:srgbClr>
+                </a:solidFill>
+                <a:effectLst/>
+                <a:uLnTx/>
+                <a:uFillTx/>
+                <a:latin typeface="Arial"/>
+                <a:ea typeface="ＭＳ Ｐゴシック"/>
+                <a:cs typeface="+mn-cs"/>
+              </a:rPr>
+              <a:t>予測と正解が一致した割合</a:t>
+            </a:r>
+            <a:endParaRPr lang="en-US" altLang="ja-JP" sz="2400" kern="0" dirty="0"/>
+          </a:p>
+        </p:txBody>
+      </p:sp>
+      <p:sp>
+        <p:nvSpPr>
+          <p:cNvPr id="2" name="タイトル 1">
+            <a:extLst>
+              <a:ext uri="{FF2B5EF4-FFF2-40B4-BE49-F238E27FC236}">
+                <a16:creationId xmlns:a16="http://schemas.microsoft.com/office/drawing/2014/main" id="{24908C1C-E1BE-7B66-9AE3-98D91F134D10}"/>
+              </a:ext>
+            </a:extLst>
+          </p:cNvPr>
+          <p:cNvSpPr>
+            <a:spLocks noGrp="1"/>
+          </p:cNvSpPr>
+          <p:nvPr>
+            <p:ph type="title"/>
+          </p:nvPr>
+        </p:nvSpPr>
+        <p:spPr/>
+        <p:txBody>
+          <a:bodyPr/>
+          <a:lstStyle/>
+          <a:p>
+            <a:r>
+              <a:rPr kumimoji="1" lang="en-US" altLang="ja-JP" dirty="0" err="1"/>
+              <a:t>random_plot.ipynb</a:t>
+            </a:r>
+            <a:endParaRPr kumimoji="1" lang="ja-JP" altLang="en-US" dirty="0"/>
+          </a:p>
+        </p:txBody>
+      </p:sp>
+      <p:graphicFrame>
+        <p:nvGraphicFramePr>
+          <p:cNvPr id="8" name="表 7">
+            <a:extLst>
+              <a:ext uri="{FF2B5EF4-FFF2-40B4-BE49-F238E27FC236}">
+                <a16:creationId xmlns:a16="http://schemas.microsoft.com/office/drawing/2014/main" id="{2BB8C37D-34E4-940C-5C11-2E0CC3E5957B}"/>
+              </a:ext>
+            </a:extLst>
+          </p:cNvPr>
+          <p:cNvGraphicFramePr>
+            <a:graphicFrameLocks noGrp="1"/>
+          </p:cNvGraphicFramePr>
+          <p:nvPr>
+            <p:extLst>
+              <p:ext uri="{D42A27DB-BD31-4B8C-83A1-F6EECF244321}">
+                <p14:modId xmlns:p14="http://schemas.microsoft.com/office/powerpoint/2010/main" val="3691030119"/>
+              </p:ext>
+            </p:extLst>
+          </p:nvPr>
+        </p:nvGraphicFramePr>
+        <p:xfrm>
+          <a:off x="4446574" y="5277280"/>
+          <a:ext cx="3298851" cy="1005840"/>
+        </p:xfrm>
+        <a:graphic>
+          <a:graphicData uri="http://schemas.openxmlformats.org/drawingml/2006/table">
+            <a:tbl>
+              <a:tblPr firstRow="1" firstCol="1" bandRow="1">
+                <a:tableStyleId>{21E4AEA4-8DFA-4A89-87EB-49C32662AFE0}</a:tableStyleId>
+              </a:tblPr>
+              <a:tblGrid>
+                <a:gridCol w="1473725">
+                  <a:extLst>
+                    <a:ext uri="{9D8B030D-6E8A-4147-A177-3AD203B41FA5}">
+                      <a16:colId xmlns:a16="http://schemas.microsoft.com/office/drawing/2014/main" val="165235932"/>
+                    </a:ext>
+                  </a:extLst>
+                </a:gridCol>
+                <a:gridCol w="1090176">
+                  <a:extLst>
+                    <a:ext uri="{9D8B030D-6E8A-4147-A177-3AD203B41FA5}">
+                      <a16:colId xmlns:a16="http://schemas.microsoft.com/office/drawing/2014/main" val="1387312990"/>
+                    </a:ext>
+                  </a:extLst>
+                </a:gridCol>
+                <a:gridCol w="734950">
+                  <a:extLst>
+                    <a:ext uri="{9D8B030D-6E8A-4147-A177-3AD203B41FA5}">
+                      <a16:colId xmlns:a16="http://schemas.microsoft.com/office/drawing/2014/main" val="2241803932"/>
+                    </a:ext>
+                  </a:extLst>
+                </a:gridCol>
+              </a:tblGrid>
+              <a:tr h="121111">
+                <a:tc>
+                  <a:txBody>
+                    <a:bodyPr/>
+                    <a:lstStyle/>
+                    <a:p>
+                      <a:endParaRPr kumimoji="1" lang="ja-JP" altLang="en-US" dirty="0"/>
+                    </a:p>
+                  </a:txBody>
+                  <a:tcPr/>
+                </a:tc>
+                <a:tc>
+                  <a:txBody>
+                    <a:bodyPr/>
+                    <a:lstStyle/>
+                    <a:p>
+                      <a:r>
+                        <a:rPr kumimoji="1" lang="en-US" altLang="ja-JP" dirty="0"/>
+                        <a:t>Python</a:t>
+                      </a:r>
+                      <a:endParaRPr kumimoji="1" lang="ja-JP" altLang="en-US" dirty="0"/>
+                    </a:p>
+                  </a:txBody>
+                  <a:tcPr/>
+                </a:tc>
+                <a:tc>
+                  <a:txBody>
+                    <a:bodyPr/>
+                    <a:lstStyle/>
+                    <a:p>
+                      <a:r>
+                        <a:rPr kumimoji="1" lang="en-US" altLang="ja-JP" dirty="0"/>
+                        <a:t>R</a:t>
+                      </a:r>
+                      <a:endParaRPr kumimoji="1" lang="ja-JP" altLang="en-US" dirty="0"/>
+                    </a:p>
+                  </a:txBody>
+                  <a:tcPr/>
+                </a:tc>
+                <a:extLst>
+                  <a:ext uri="{0D108BD9-81ED-4DB2-BD59-A6C34878D82A}">
+                    <a16:rowId xmlns:a16="http://schemas.microsoft.com/office/drawing/2014/main" val="12414329"/>
+                  </a:ext>
+                </a:extLst>
+              </a:tr>
+              <a:tr h="280807">
+                <a:tc>
+                  <a:txBody>
+                    <a:bodyPr/>
+                    <a:lstStyle/>
+                    <a:p>
+                      <a:r>
+                        <a:rPr kumimoji="1" lang="ja-JP" altLang="en-US" sz="1500" b="0" dirty="0">
+                          <a:solidFill>
+                            <a:schemeClr val="tx1"/>
+                          </a:solidFill>
+                        </a:rPr>
+                        <a:t>モデルを作成</a:t>
+                      </a:r>
+                    </a:p>
+                  </a:txBody>
+                  <a:tcPr>
+                    <a:solidFill>
+                      <a:schemeClr val="bg2">
+                        <a:lumMod val="20000"/>
+                        <a:lumOff val="80000"/>
+                      </a:schemeClr>
+                    </a:solidFill>
+                  </a:tcPr>
+                </a:tc>
+                <a:tc>
+                  <a:txBody>
+                    <a:bodyPr/>
+                    <a:lstStyle/>
+                    <a:p>
+                      <a:r>
+                        <a:rPr kumimoji="1" lang="en-US" altLang="ja-JP" sz="1500" dirty="0" err="1"/>
+                        <a:t>svm</a:t>
+                      </a:r>
+                      <a:r>
+                        <a:rPr kumimoji="1" lang="en-US" altLang="ja-JP" sz="1500" dirty="0"/>
+                        <a:t>()</a:t>
+                      </a:r>
+                      <a:endParaRPr kumimoji="1" lang="ja-JP" altLang="en-US" sz="1500" dirty="0"/>
+                    </a:p>
+                  </a:txBody>
+                  <a:tcPr/>
+                </a:tc>
+                <a:tc rowSpan="2">
+                  <a:txBody>
+                    <a:bodyPr/>
+                    <a:lstStyle/>
+                    <a:p>
+                      <a:r>
+                        <a:rPr kumimoji="1" lang="en-US" altLang="ja-JP" sz="1500" dirty="0" err="1"/>
+                        <a:t>svm</a:t>
+                      </a:r>
+                      <a:r>
+                        <a:rPr kumimoji="1" lang="en-US" altLang="ja-JP" sz="1500" dirty="0"/>
+                        <a:t>()</a:t>
+                      </a:r>
+                    </a:p>
+                  </a:txBody>
+                  <a:tcPr anchor="ctr"/>
+                </a:tc>
+                <a:extLst>
+                  <a:ext uri="{0D108BD9-81ED-4DB2-BD59-A6C34878D82A}">
+                    <a16:rowId xmlns:a16="http://schemas.microsoft.com/office/drawing/2014/main" val="1531238374"/>
+                  </a:ext>
+                </a:extLst>
+              </a:tr>
+              <a:tr h="280807">
+                <a:tc>
+                  <a:txBody>
+                    <a:bodyPr/>
+                    <a:lstStyle/>
+                    <a:p>
+                      <a:r>
+                        <a:rPr kumimoji="1" lang="ja-JP" altLang="en-US" sz="1500" b="0" dirty="0">
+                          <a:solidFill>
+                            <a:schemeClr val="tx1"/>
+                          </a:solidFill>
+                        </a:rPr>
+                        <a:t>モデルを学習</a:t>
+                      </a:r>
+                    </a:p>
+                  </a:txBody>
+                  <a:tcPr>
+                    <a:solidFill>
+                      <a:schemeClr val="bg2">
+                        <a:lumMod val="20000"/>
+                        <a:lumOff val="80000"/>
+                      </a:schemeClr>
+                    </a:solidFill>
+                  </a:tcPr>
+                </a:tc>
+                <a:tc>
+                  <a:txBody>
+                    <a:bodyPr/>
+                    <a:lstStyle/>
+                    <a:p>
+                      <a:r>
+                        <a:rPr kumimoji="1" lang="en-US" altLang="ja-JP" sz="1500" dirty="0"/>
+                        <a:t>fit()</a:t>
+                      </a:r>
+                      <a:endParaRPr kumimoji="1" lang="ja-JP" altLang="en-US" sz="1500" dirty="0"/>
+                    </a:p>
+                  </a:txBody>
+                  <a:tcPr/>
+                </a:tc>
+                <a:tc vMerge="1">
+                  <a:txBody>
+                    <a:bodyPr/>
+                    <a:lstStyle/>
+                    <a:p>
+                      <a:r>
+                        <a:rPr kumimoji="1" lang="en-US" altLang="ja-JP" sz="1500" dirty="0" err="1"/>
+                        <a:t>rbind</a:t>
+                      </a:r>
+                      <a:r>
+                        <a:rPr kumimoji="1" lang="en-US" altLang="ja-JP" sz="1500" dirty="0"/>
+                        <a:t>()</a:t>
+                      </a:r>
+                    </a:p>
+                  </a:txBody>
+                  <a:tcPr/>
+                </a:tc>
+                <a:extLst>
+                  <a:ext uri="{0D108BD9-81ED-4DB2-BD59-A6C34878D82A}">
+                    <a16:rowId xmlns:a16="http://schemas.microsoft.com/office/drawing/2014/main" val="3835439253"/>
+                  </a:ext>
+                </a:extLst>
+              </a:tr>
+            </a:tbl>
+          </a:graphicData>
+        </a:graphic>
+      </p:graphicFrame>
+      <p:sp>
+        <p:nvSpPr>
+          <p:cNvPr id="14" name="正方形/長方形 13">
+            <a:extLst>
+              <a:ext uri="{FF2B5EF4-FFF2-40B4-BE49-F238E27FC236}">
+                <a16:creationId xmlns:a16="http://schemas.microsoft.com/office/drawing/2014/main" id="{A082B75C-8B32-C889-B5AA-7E197128E2D2}"/>
+              </a:ext>
+            </a:extLst>
+          </p:cNvPr>
+          <p:cNvSpPr/>
+          <p:nvPr/>
+        </p:nvSpPr>
+        <p:spPr bwMode="auto">
+          <a:xfrm>
+            <a:off x="8982635" y="1066146"/>
+            <a:ext cx="2847682" cy="1596232"/>
+          </a:xfrm>
+          <a:prstGeom prst="rect">
+            <a:avLst/>
+          </a:prstGeom>
+          <a:solidFill>
+            <a:schemeClr val="accent5">
+              <a:lumMod val="40000"/>
+              <a:lumOff val="60000"/>
+            </a:schemeClr>
+          </a:solidFill>
+          <a:ln w="9525" cap="flat" cmpd="sng" algn="ctr">
+            <a:noFill/>
+            <a:prstDash val="solid"/>
+            <a:miter lim="800000"/>
+            <a:headEnd type="none" w="med" len="med"/>
+            <a:tailEnd type="none" w="med" len="med"/>
+          </a:ln>
+          <a:effectLst/>
+        </p:spPr>
+        <p:txBody>
+          <a:bodyPr vert="horz" wrap="none" lIns="91440" tIns="45720" rIns="91440" bIns="45720" numCol="1" rtlCol="0" anchor="t" anchorCtr="0" compatLnSpc="1">
+            <a:prstTxWarp prst="textNoShape">
+              <a:avLst/>
+            </a:prstTxWarp>
+          </a:bodyPr>
+          <a:lstStyle/>
+          <a:p>
+            <a:pPr marL="0" marR="0" indent="0" defTabSz="914400" rtl="0" eaLnBrk="1" fontAlgn="base" latinLnBrk="0" hangingPunct="1">
+              <a:spcBef>
+                <a:spcPct val="0"/>
+              </a:spcBef>
+              <a:spcAft>
+                <a:spcPct val="0"/>
+              </a:spcAft>
+              <a:buClrTx/>
+              <a:buSzTx/>
+              <a:buFontTx/>
+              <a:buNone/>
+              <a:tabLst/>
+            </a:pPr>
+            <a:r>
+              <a:rPr kumimoji="1" lang="en-US" altLang="ja-JP" sz="1500" b="0" i="0" u="none" strike="noStrike" cap="none" normalizeH="0" baseline="0" dirty="0">
+                <a:ln>
+                  <a:noFill/>
+                </a:ln>
+                <a:solidFill>
+                  <a:schemeClr val="accent5">
+                    <a:lumMod val="50000"/>
+                  </a:schemeClr>
+                </a:solidFill>
+                <a:effectLst/>
+                <a:latin typeface="Arial" charset="0"/>
+                <a:ea typeface="ＭＳ Ｐゴシック" pitchFamily="50" charset="-128"/>
+              </a:rPr>
+              <a:t>Python</a:t>
+            </a:r>
+            <a:endParaRPr kumimoji="1" lang="ja-JP" altLang="en-US" sz="1500" b="0" i="0" u="none" strike="noStrike" cap="none" normalizeH="0" baseline="0" dirty="0">
+              <a:ln>
+                <a:noFill/>
+              </a:ln>
+              <a:solidFill>
+                <a:schemeClr val="accent5">
+                  <a:lumMod val="50000"/>
+                </a:schemeClr>
+              </a:solidFill>
+              <a:effectLst/>
+              <a:latin typeface="Arial" charset="0"/>
+              <a:ea typeface="ＭＳ Ｐゴシック" pitchFamily="50" charset="-128"/>
+            </a:endParaRPr>
+          </a:p>
+        </p:txBody>
+      </p:sp>
+      <p:sp>
+        <p:nvSpPr>
+          <p:cNvPr id="16" name="正方形/長方形 15">
+            <a:extLst>
+              <a:ext uri="{FF2B5EF4-FFF2-40B4-BE49-F238E27FC236}">
+                <a16:creationId xmlns:a16="http://schemas.microsoft.com/office/drawing/2014/main" id="{E1056466-E41D-8B4C-8C91-CDACA1D6D7B1}"/>
+              </a:ext>
+            </a:extLst>
+          </p:cNvPr>
+          <p:cNvSpPr/>
+          <p:nvPr/>
+        </p:nvSpPr>
+        <p:spPr bwMode="auto">
+          <a:xfrm>
+            <a:off x="5103462" y="2755090"/>
+            <a:ext cx="6726855" cy="1766237"/>
+          </a:xfrm>
+          <a:prstGeom prst="rect">
+            <a:avLst/>
+          </a:prstGeom>
+          <a:solidFill>
+            <a:schemeClr val="accent3">
+              <a:lumMod val="85000"/>
+            </a:schemeClr>
+          </a:solidFill>
+          <a:ln w="9525" cap="flat" cmpd="sng" algn="ctr">
+            <a:noFill/>
+            <a:prstDash val="solid"/>
+            <a:miter lim="800000"/>
+            <a:headEnd type="none" w="med" len="med"/>
+            <a:tailEnd type="none" w="med" len="med"/>
+          </a:ln>
+          <a:effectLst/>
+        </p:spPr>
+        <p:txBody>
+          <a:bodyPr vert="horz" wrap="none" lIns="91440" tIns="45720" rIns="91440" bIns="45720" numCol="1" rtlCol="0" anchor="t" anchorCtr="0" compatLnSpc="1">
+            <a:prstTxWarp prst="textNoShape">
+              <a:avLst/>
+            </a:prstTxWarp>
+          </a:bodyPr>
+          <a:lstStyle/>
+          <a:p>
+            <a:pPr marL="0" marR="0" indent="0" defTabSz="914400" rtl="0" eaLnBrk="1" fontAlgn="base" latinLnBrk="0" hangingPunct="1">
+              <a:spcBef>
+                <a:spcPct val="0"/>
+              </a:spcBef>
+              <a:spcAft>
+                <a:spcPct val="0"/>
+              </a:spcAft>
+              <a:buClrTx/>
+              <a:buSzTx/>
+              <a:buFontTx/>
+              <a:buNone/>
+              <a:tabLst/>
+            </a:pPr>
+            <a:r>
+              <a:rPr lang="en-US" altLang="ja-JP" sz="1500" dirty="0">
+                <a:solidFill>
+                  <a:schemeClr val="accent4">
+                    <a:lumMod val="65000"/>
+                    <a:lumOff val="35000"/>
+                  </a:schemeClr>
+                </a:solidFill>
+                <a:latin typeface="Arial" charset="0"/>
+                <a:ea typeface="ＭＳ Ｐゴシック" pitchFamily="50" charset="-128"/>
+              </a:rPr>
+              <a:t>R</a:t>
+            </a:r>
+          </a:p>
+        </p:txBody>
+      </p:sp>
+      <p:pic>
+        <p:nvPicPr>
+          <p:cNvPr id="6" name="図 5">
+            <a:extLst>
+              <a:ext uri="{FF2B5EF4-FFF2-40B4-BE49-F238E27FC236}">
+                <a16:creationId xmlns:a16="http://schemas.microsoft.com/office/drawing/2014/main" id="{0EFBDBEB-1208-60AD-96EE-0B9B93824A1C}"/>
+              </a:ext>
+            </a:extLst>
+          </p:cNvPr>
+          <p:cNvPicPr>
+            <a:picLocks noChangeAspect="1"/>
+          </p:cNvPicPr>
+          <p:nvPr/>
+        </p:nvPicPr>
+        <p:blipFill rotWithShape="1">
+          <a:blip r:embed="rId3"/>
+          <a:srcRect b="15856"/>
+          <a:stretch/>
+        </p:blipFill>
+        <p:spPr>
+          <a:xfrm>
+            <a:off x="5252663" y="3113592"/>
+            <a:ext cx="6329737" cy="1289852"/>
+          </a:xfrm>
+          <a:prstGeom prst="rect">
+            <a:avLst/>
+          </a:prstGeom>
+          <a:ln>
+            <a:solidFill>
+              <a:schemeClr val="accent3">
+                <a:lumMod val="65000"/>
+              </a:schemeClr>
+            </a:solidFill>
+          </a:ln>
+        </p:spPr>
+      </p:pic>
+      <p:pic>
+        <p:nvPicPr>
+          <p:cNvPr id="9" name="図 8">
+            <a:extLst>
+              <a:ext uri="{FF2B5EF4-FFF2-40B4-BE49-F238E27FC236}">
+                <a16:creationId xmlns:a16="http://schemas.microsoft.com/office/drawing/2014/main" id="{6EBA4022-CAC0-3F32-3E5C-DC2B07D866DB}"/>
+              </a:ext>
+            </a:extLst>
+          </p:cNvPr>
+          <p:cNvPicPr>
+            <a:picLocks noChangeAspect="1"/>
+          </p:cNvPicPr>
+          <p:nvPr/>
+        </p:nvPicPr>
+        <p:blipFill>
+          <a:blip r:embed="rId4"/>
+          <a:stretch>
+            <a:fillRect/>
+          </a:stretch>
+        </p:blipFill>
+        <p:spPr>
+          <a:xfrm>
+            <a:off x="9248681" y="1357686"/>
+            <a:ext cx="2362530" cy="1181265"/>
+          </a:xfrm>
+          <a:prstGeom prst="rect">
+            <a:avLst/>
+          </a:prstGeom>
+          <a:ln>
+            <a:solidFill>
+              <a:schemeClr val="accent5">
+                <a:lumMod val="75000"/>
+              </a:schemeClr>
+            </a:solidFill>
+          </a:ln>
+        </p:spPr>
+      </p:pic>
+      <p:pic>
+        <p:nvPicPr>
+          <p:cNvPr id="15" name="図 14">
+            <a:extLst>
+              <a:ext uri="{FF2B5EF4-FFF2-40B4-BE49-F238E27FC236}">
+                <a16:creationId xmlns:a16="http://schemas.microsoft.com/office/drawing/2014/main" id="{6CE36CC1-E2E6-091B-8AEC-38E229D078C8}"/>
+              </a:ext>
+            </a:extLst>
+          </p:cNvPr>
+          <p:cNvPicPr>
+            <a:picLocks noChangeAspect="1"/>
+          </p:cNvPicPr>
+          <p:nvPr/>
+        </p:nvPicPr>
+        <p:blipFill>
+          <a:blip r:embed="rId5"/>
+          <a:stretch>
+            <a:fillRect/>
+          </a:stretch>
+        </p:blipFill>
+        <p:spPr>
+          <a:xfrm>
+            <a:off x="11173000" y="2433746"/>
+            <a:ext cx="438211" cy="228632"/>
+          </a:xfrm>
+          <a:prstGeom prst="rect">
+            <a:avLst/>
+          </a:prstGeom>
+          <a:ln>
+            <a:solidFill>
+              <a:schemeClr val="accent5">
+                <a:lumMod val="75000"/>
+              </a:schemeClr>
+            </a:solidFill>
+          </a:ln>
+        </p:spPr>
+      </p:pic>
+      <p:pic>
+        <p:nvPicPr>
+          <p:cNvPr id="20" name="図 19">
+            <a:extLst>
+              <a:ext uri="{FF2B5EF4-FFF2-40B4-BE49-F238E27FC236}">
+                <a16:creationId xmlns:a16="http://schemas.microsoft.com/office/drawing/2014/main" id="{60C50EA6-8EA8-262C-2A0C-23C52AB2E90C}"/>
+              </a:ext>
+            </a:extLst>
+          </p:cNvPr>
+          <p:cNvPicPr>
+            <a:picLocks noChangeAspect="1"/>
+          </p:cNvPicPr>
+          <p:nvPr/>
+        </p:nvPicPr>
+        <p:blipFill>
+          <a:blip r:embed="rId6"/>
+          <a:stretch>
+            <a:fillRect/>
+          </a:stretch>
+        </p:blipFill>
+        <p:spPr>
+          <a:xfrm>
+            <a:off x="10086998" y="4245063"/>
+            <a:ext cx="1524213" cy="276264"/>
+          </a:xfrm>
+          <a:prstGeom prst="rect">
+            <a:avLst/>
+          </a:prstGeom>
+          <a:ln>
+            <a:solidFill>
+              <a:schemeClr val="accent3">
+                <a:lumMod val="65000"/>
+              </a:schemeClr>
+            </a:solidFill>
+          </a:ln>
+        </p:spPr>
+      </p:pic>
+    </p:spTree>
+    <p:extLst>
+      <p:ext uri="{BB962C8B-B14F-4D97-AF65-F5344CB8AC3E}">
+        <p14:creationId xmlns:p14="http://schemas.microsoft.com/office/powerpoint/2010/main" val="1871408228"/>
+      </p:ext>
+    </p:extLst>
+  </p:cSld>
+  <p:clrMapOvr>
+    <a:masterClrMapping/>
+  </p:clrMapOvr>
+</p:sld>
+</file>
+
+<file path=ppt/slides/slide17.xml><?xml version="1.0" encoding="utf-8"?>
+<p:sld xmlns:a="http://schemas.openxmlformats.org/drawingml/2006/main" xmlns:r="http://schemas.openxmlformats.org/officeDocument/2006/relationships" xmlns:p="http://schemas.openxmlformats.org/presentationml/2006/main">
+  <p:cSld>
+    <p:spTree>
+      <p:nvGrpSpPr>
+        <p:cNvPr id="1" name="">
+          <a:extLst>
+            <a:ext uri="{FF2B5EF4-FFF2-40B4-BE49-F238E27FC236}">
+              <a16:creationId xmlns:a16="http://schemas.microsoft.com/office/drawing/2014/main" id="{60DC8073-E444-51DF-CE36-45100F5D20DD}"/>
+            </a:ext>
+          </a:extLst>
+        </p:cNvPr>
+        <p:cNvGrpSpPr/>
+        <p:nvPr/>
+      </p:nvGrpSpPr>
+      <p:grpSpPr>
+        <a:xfrm>
+          <a:off x="0" y="0"/>
+          <a:ext cx="0" cy="0"/>
+          <a:chOff x="0" y="0"/>
+          <a:chExt cx="0" cy="0"/>
+        </a:xfrm>
+      </p:grpSpPr>
+      <p:sp>
+        <p:nvSpPr>
+          <p:cNvPr id="3" name="コンテンツ プレースホルダー 2">
+            <a:extLst>
+              <a:ext uri="{FF2B5EF4-FFF2-40B4-BE49-F238E27FC236}">
+                <a16:creationId xmlns:a16="http://schemas.microsoft.com/office/drawing/2014/main" id="{94A60E52-4A48-8A44-9D10-73F89E54D7B5}"/>
+              </a:ext>
+            </a:extLst>
+          </p:cNvPr>
+          <p:cNvSpPr txBox="1">
+            <a:spLocks/>
+          </p:cNvSpPr>
+          <p:nvPr/>
+        </p:nvSpPr>
+        <p:spPr>
+          <a:xfrm>
+            <a:off x="762000" y="1203306"/>
+            <a:ext cx="7396729" cy="557598"/>
+          </a:xfrm>
+          <a:prstGeom prst="rect">
+            <a:avLst/>
+          </a:prstGeom>
+        </p:spPr>
+        <p:txBody>
+          <a:bodyPr/>
+          <a:lstStyle>
+            <a:lvl1pPr marL="342900" indent="-342900" algn="l" rtl="0" eaLnBrk="1" fontAlgn="base" hangingPunct="1">
+              <a:spcBef>
+                <a:spcPct val="20000"/>
+              </a:spcBef>
+              <a:spcAft>
+                <a:spcPct val="0"/>
+              </a:spcAft>
+              <a:buClr>
+                <a:schemeClr val="accent1"/>
+              </a:buClr>
+              <a:buSzPct val="65000"/>
+              <a:buFont typeface="Wingdings" pitchFamily="2" charset="2"/>
+              <a:buChar char="n"/>
+              <a:defRPr kumimoji="1" sz="3200">
+                <a:solidFill>
+                  <a:schemeClr val="tx1"/>
+                </a:solidFill>
+                <a:latin typeface="+mn-lt"/>
+                <a:ea typeface="+mn-ea"/>
+                <a:cs typeface="+mn-cs"/>
+              </a:defRPr>
+            </a:lvl1pPr>
+            <a:lvl2pPr marL="669925" indent="-325438" algn="l" rtl="0" eaLnBrk="1" fontAlgn="base" hangingPunct="1">
+              <a:spcBef>
+                <a:spcPct val="20000"/>
+              </a:spcBef>
+              <a:spcAft>
+                <a:spcPct val="0"/>
+              </a:spcAft>
+              <a:buClr>
+                <a:schemeClr val="accent2"/>
+              </a:buClr>
+              <a:buSzPct val="60000"/>
+              <a:buFont typeface="Wingdings" pitchFamily="2" charset="2"/>
+              <a:buChar char="q"/>
+              <a:defRPr kumimoji="1" sz="2800">
+                <a:solidFill>
+                  <a:schemeClr val="tx1"/>
+                </a:solidFill>
+                <a:latin typeface="+mn-lt"/>
+                <a:ea typeface="+mn-ea"/>
+              </a:defRPr>
+            </a:lvl2pPr>
+            <a:lvl3pPr marL="1022350" indent="-350838" algn="l" rtl="0" eaLnBrk="1" fontAlgn="base" hangingPunct="1">
+              <a:spcBef>
+                <a:spcPct val="20000"/>
+              </a:spcBef>
+              <a:spcAft>
+                <a:spcPct val="0"/>
+              </a:spcAft>
+              <a:buClr>
+                <a:schemeClr val="accent1"/>
+              </a:buClr>
+              <a:buSzPct val="65000"/>
+              <a:buFont typeface="Wingdings" pitchFamily="2" charset="2"/>
+              <a:buChar char="n"/>
+              <a:defRPr kumimoji="1" sz="2400">
+                <a:solidFill>
+                  <a:schemeClr val="tx1"/>
+                </a:solidFill>
+                <a:latin typeface="+mn-lt"/>
+                <a:ea typeface="+mn-ea"/>
+              </a:defRPr>
+            </a:lvl3pPr>
+            <a:lvl4pPr marL="1339850" indent="-315913" algn="l" rtl="0" eaLnBrk="1" fontAlgn="base" hangingPunct="1">
+              <a:spcBef>
+                <a:spcPct val="20000"/>
+              </a:spcBef>
+              <a:spcAft>
+                <a:spcPct val="0"/>
+              </a:spcAft>
+              <a:buClr>
+                <a:schemeClr val="accent2"/>
+              </a:buClr>
+              <a:buSzPct val="70000"/>
+              <a:buFont typeface="Wingdings" pitchFamily="2" charset="2"/>
+              <a:buChar char="q"/>
+              <a:defRPr kumimoji="1" sz="2000">
+                <a:solidFill>
+                  <a:schemeClr val="tx1"/>
+                </a:solidFill>
+                <a:latin typeface="+mn-lt"/>
+                <a:ea typeface="+mn-ea"/>
+              </a:defRPr>
+            </a:lvl4pPr>
+            <a:lvl5pPr marL="1681163" indent="-339725" algn="l" rtl="0" eaLnBrk="1" fontAlgn="base" hangingPunct="1">
+              <a:spcBef>
+                <a:spcPct val="20000"/>
+              </a:spcBef>
+              <a:spcAft>
+                <a:spcPct val="0"/>
+              </a:spcAft>
+              <a:buClr>
+                <a:schemeClr val="accent1"/>
+              </a:buClr>
+              <a:buSzPct val="75000"/>
+              <a:buFont typeface="Wingdings" pitchFamily="2" charset="2"/>
+              <a:buChar char="§"/>
+              <a:defRPr kumimoji="1">
+                <a:solidFill>
+                  <a:schemeClr val="tx1"/>
+                </a:solidFill>
+                <a:latin typeface="+mn-lt"/>
+                <a:ea typeface="+mn-ea"/>
+              </a:defRPr>
+            </a:lvl5pPr>
+            <a:lvl6pPr marL="2138363" indent="-339725" algn="l" rtl="0" eaLnBrk="1" fontAlgn="base" hangingPunct="1">
+              <a:spcBef>
+                <a:spcPct val="20000"/>
+              </a:spcBef>
+              <a:spcAft>
+                <a:spcPct val="0"/>
+              </a:spcAft>
+              <a:buClr>
+                <a:schemeClr val="accent1"/>
+              </a:buClr>
+              <a:buSzPct val="75000"/>
+              <a:buFont typeface="Wingdings" pitchFamily="2" charset="2"/>
+              <a:buChar char="§"/>
+              <a:defRPr kumimoji="1">
+                <a:solidFill>
+                  <a:schemeClr val="tx1"/>
+                </a:solidFill>
+                <a:latin typeface="+mn-lt"/>
+                <a:ea typeface="+mn-ea"/>
+              </a:defRPr>
+            </a:lvl6pPr>
+            <a:lvl7pPr marL="2595563" indent="-339725" algn="l" rtl="0" eaLnBrk="1" fontAlgn="base" hangingPunct="1">
+              <a:spcBef>
+                <a:spcPct val="20000"/>
+              </a:spcBef>
+              <a:spcAft>
+                <a:spcPct val="0"/>
+              </a:spcAft>
+              <a:buClr>
+                <a:schemeClr val="accent1"/>
+              </a:buClr>
+              <a:buSzPct val="75000"/>
+              <a:buFont typeface="Wingdings" pitchFamily="2" charset="2"/>
+              <a:buChar char="§"/>
+              <a:defRPr kumimoji="1">
+                <a:solidFill>
+                  <a:schemeClr val="tx1"/>
+                </a:solidFill>
+                <a:latin typeface="+mn-lt"/>
+                <a:ea typeface="+mn-ea"/>
+              </a:defRPr>
+            </a:lvl7pPr>
+            <a:lvl8pPr marL="3052763" indent="-339725" algn="l" rtl="0" eaLnBrk="1" fontAlgn="base" hangingPunct="1">
+              <a:spcBef>
+                <a:spcPct val="20000"/>
+              </a:spcBef>
+              <a:spcAft>
+                <a:spcPct val="0"/>
+              </a:spcAft>
+              <a:buClr>
+                <a:schemeClr val="accent1"/>
+              </a:buClr>
+              <a:buSzPct val="75000"/>
+              <a:buFont typeface="Wingdings" pitchFamily="2" charset="2"/>
+              <a:buChar char="§"/>
+              <a:defRPr kumimoji="1">
+                <a:solidFill>
+                  <a:schemeClr val="tx1"/>
+                </a:solidFill>
+                <a:latin typeface="+mn-lt"/>
+                <a:ea typeface="+mn-ea"/>
+              </a:defRPr>
+            </a:lvl8pPr>
+            <a:lvl9pPr marL="3509963" indent="-339725" algn="l" rtl="0" eaLnBrk="1" fontAlgn="base" hangingPunct="1">
+              <a:spcBef>
+                <a:spcPct val="20000"/>
+              </a:spcBef>
+              <a:spcAft>
+                <a:spcPct val="0"/>
+              </a:spcAft>
+              <a:buClr>
+                <a:schemeClr val="accent1"/>
+              </a:buClr>
+              <a:buSzPct val="75000"/>
+              <a:buFont typeface="Wingdings" pitchFamily="2" charset="2"/>
+              <a:buChar char="§"/>
+              <a:defRPr kumimoji="1">
+                <a:solidFill>
+                  <a:schemeClr val="tx1"/>
+                </a:solidFill>
+                <a:latin typeface="+mn-lt"/>
+                <a:ea typeface="+mn-ea"/>
+              </a:defRPr>
+            </a:lvl9pPr>
+          </a:lstStyle>
+          <a:p>
+            <a:pPr marL="0" indent="0">
+              <a:buNone/>
+            </a:pPr>
+            <a:r>
+              <a:rPr lang="ja-JP" altLang="en-US" b="1" kern="0" dirty="0"/>
+              <a:t>図</a:t>
+            </a:r>
+            <a:endParaRPr lang="en-US" altLang="ja-JP" sz="1800" kern="0" dirty="0">
+              <a:solidFill>
+                <a:schemeClr val="accent3">
+                  <a:lumMod val="50000"/>
+                </a:schemeClr>
+              </a:solidFill>
+            </a:endParaRPr>
+          </a:p>
+          <a:p>
+            <a:pPr marL="0" indent="0">
+              <a:buNone/>
+            </a:pPr>
+            <a:endParaRPr lang="en-US" altLang="ja-JP" sz="2000" kern="0" dirty="0">
+              <a:solidFill>
+                <a:schemeClr val="accent6"/>
+              </a:solidFill>
+            </a:endParaRPr>
+          </a:p>
+        </p:txBody>
+      </p:sp>
+      <p:sp>
+        <p:nvSpPr>
+          <p:cNvPr id="11" name="コンテンツ プレースホルダー 2">
+            <a:extLst>
+              <a:ext uri="{FF2B5EF4-FFF2-40B4-BE49-F238E27FC236}">
+                <a16:creationId xmlns:a16="http://schemas.microsoft.com/office/drawing/2014/main" id="{C5352A9B-147A-270B-B02A-4A45E1AABB12}"/>
+              </a:ext>
+            </a:extLst>
+          </p:cNvPr>
+          <p:cNvSpPr txBox="1">
+            <a:spLocks/>
+          </p:cNvSpPr>
+          <p:nvPr/>
+        </p:nvSpPr>
+        <p:spPr>
+          <a:xfrm>
+            <a:off x="773722" y="2143598"/>
+            <a:ext cx="5433439" cy="2642416"/>
+          </a:xfrm>
+          <a:prstGeom prst="rect">
+            <a:avLst/>
+          </a:prstGeom>
+        </p:spPr>
+        <p:txBody>
+          <a:bodyPr/>
+          <a:lstStyle>
+            <a:lvl1pPr marL="342900" indent="-342900" algn="l" rtl="0" eaLnBrk="1" fontAlgn="base" hangingPunct="1">
+              <a:spcBef>
+                <a:spcPct val="20000"/>
+              </a:spcBef>
+              <a:spcAft>
+                <a:spcPct val="0"/>
+              </a:spcAft>
+              <a:buClr>
+                <a:schemeClr val="accent1"/>
+              </a:buClr>
+              <a:buSzPct val="65000"/>
+              <a:buFont typeface="Wingdings" pitchFamily="2" charset="2"/>
+              <a:buChar char="n"/>
+              <a:defRPr kumimoji="1" sz="3200">
+                <a:solidFill>
+                  <a:schemeClr val="tx1"/>
+                </a:solidFill>
+                <a:latin typeface="+mn-lt"/>
+                <a:ea typeface="+mn-ea"/>
+                <a:cs typeface="+mn-cs"/>
+              </a:defRPr>
+            </a:lvl1pPr>
+            <a:lvl2pPr marL="669925" indent="-325438" algn="l" rtl="0" eaLnBrk="1" fontAlgn="base" hangingPunct="1">
+              <a:spcBef>
+                <a:spcPct val="20000"/>
+              </a:spcBef>
+              <a:spcAft>
+                <a:spcPct val="0"/>
+              </a:spcAft>
+              <a:buClr>
+                <a:schemeClr val="accent2"/>
+              </a:buClr>
+              <a:buSzPct val="60000"/>
+              <a:buFont typeface="Wingdings" pitchFamily="2" charset="2"/>
+              <a:buChar char="q"/>
+              <a:defRPr kumimoji="1" sz="2800">
+                <a:solidFill>
+                  <a:schemeClr val="tx1"/>
+                </a:solidFill>
+                <a:latin typeface="+mn-lt"/>
+                <a:ea typeface="+mn-ea"/>
+              </a:defRPr>
+            </a:lvl2pPr>
+            <a:lvl3pPr marL="1022350" indent="-350838" algn="l" rtl="0" eaLnBrk="1" fontAlgn="base" hangingPunct="1">
+              <a:spcBef>
+                <a:spcPct val="20000"/>
+              </a:spcBef>
+              <a:spcAft>
+                <a:spcPct val="0"/>
+              </a:spcAft>
+              <a:buClr>
+                <a:schemeClr val="accent1"/>
+              </a:buClr>
+              <a:buSzPct val="65000"/>
+              <a:buFont typeface="Wingdings" pitchFamily="2" charset="2"/>
+              <a:buChar char="n"/>
+              <a:defRPr kumimoji="1" sz="2400">
+                <a:solidFill>
+                  <a:schemeClr val="tx1"/>
+                </a:solidFill>
+                <a:latin typeface="+mn-lt"/>
+                <a:ea typeface="+mn-ea"/>
+              </a:defRPr>
+            </a:lvl3pPr>
+            <a:lvl4pPr marL="1339850" indent="-315913" algn="l" rtl="0" eaLnBrk="1" fontAlgn="base" hangingPunct="1">
+              <a:spcBef>
+                <a:spcPct val="20000"/>
+              </a:spcBef>
+              <a:spcAft>
+                <a:spcPct val="0"/>
+              </a:spcAft>
+              <a:buClr>
+                <a:schemeClr val="accent2"/>
+              </a:buClr>
+              <a:buSzPct val="70000"/>
+              <a:buFont typeface="Wingdings" pitchFamily="2" charset="2"/>
+              <a:buChar char="q"/>
+              <a:defRPr kumimoji="1" sz="2000">
+                <a:solidFill>
+                  <a:schemeClr val="tx1"/>
+                </a:solidFill>
+                <a:latin typeface="+mn-lt"/>
+                <a:ea typeface="+mn-ea"/>
+              </a:defRPr>
+            </a:lvl4pPr>
+            <a:lvl5pPr marL="1681163" indent="-339725" algn="l" rtl="0" eaLnBrk="1" fontAlgn="base" hangingPunct="1">
+              <a:spcBef>
+                <a:spcPct val="20000"/>
+              </a:spcBef>
+              <a:spcAft>
+                <a:spcPct val="0"/>
+              </a:spcAft>
+              <a:buClr>
+                <a:schemeClr val="accent1"/>
+              </a:buClr>
+              <a:buSzPct val="75000"/>
+              <a:buFont typeface="Wingdings" pitchFamily="2" charset="2"/>
+              <a:buChar char="§"/>
+              <a:defRPr kumimoji="1">
+                <a:solidFill>
+                  <a:schemeClr val="tx1"/>
+                </a:solidFill>
+                <a:latin typeface="+mn-lt"/>
+                <a:ea typeface="+mn-ea"/>
+              </a:defRPr>
+            </a:lvl5pPr>
+            <a:lvl6pPr marL="2138363" indent="-339725" algn="l" rtl="0" eaLnBrk="1" fontAlgn="base" hangingPunct="1">
+              <a:spcBef>
+                <a:spcPct val="20000"/>
+              </a:spcBef>
+              <a:spcAft>
+                <a:spcPct val="0"/>
+              </a:spcAft>
+              <a:buClr>
+                <a:schemeClr val="accent1"/>
+              </a:buClr>
+              <a:buSzPct val="75000"/>
+              <a:buFont typeface="Wingdings" pitchFamily="2" charset="2"/>
+              <a:buChar char="§"/>
+              <a:defRPr kumimoji="1">
+                <a:solidFill>
+                  <a:schemeClr val="tx1"/>
+                </a:solidFill>
+                <a:latin typeface="+mn-lt"/>
+                <a:ea typeface="+mn-ea"/>
+              </a:defRPr>
+            </a:lvl6pPr>
+            <a:lvl7pPr marL="2595563" indent="-339725" algn="l" rtl="0" eaLnBrk="1" fontAlgn="base" hangingPunct="1">
+              <a:spcBef>
+                <a:spcPct val="20000"/>
+              </a:spcBef>
+              <a:spcAft>
+                <a:spcPct val="0"/>
+              </a:spcAft>
+              <a:buClr>
+                <a:schemeClr val="accent1"/>
+              </a:buClr>
+              <a:buSzPct val="75000"/>
+              <a:buFont typeface="Wingdings" pitchFamily="2" charset="2"/>
+              <a:buChar char="§"/>
+              <a:defRPr kumimoji="1">
+                <a:solidFill>
+                  <a:schemeClr val="tx1"/>
+                </a:solidFill>
+                <a:latin typeface="+mn-lt"/>
+                <a:ea typeface="+mn-ea"/>
+              </a:defRPr>
+            </a:lvl7pPr>
+            <a:lvl8pPr marL="3052763" indent="-339725" algn="l" rtl="0" eaLnBrk="1" fontAlgn="base" hangingPunct="1">
+              <a:spcBef>
+                <a:spcPct val="20000"/>
+              </a:spcBef>
+              <a:spcAft>
+                <a:spcPct val="0"/>
+              </a:spcAft>
+              <a:buClr>
+                <a:schemeClr val="accent1"/>
+              </a:buClr>
+              <a:buSzPct val="75000"/>
+              <a:buFont typeface="Wingdings" pitchFamily="2" charset="2"/>
+              <a:buChar char="§"/>
+              <a:defRPr kumimoji="1">
+                <a:solidFill>
+                  <a:schemeClr val="tx1"/>
+                </a:solidFill>
+                <a:latin typeface="+mn-lt"/>
+                <a:ea typeface="+mn-ea"/>
+              </a:defRPr>
+            </a:lvl8pPr>
+            <a:lvl9pPr marL="3509963" indent="-339725" algn="l" rtl="0" eaLnBrk="1" fontAlgn="base" hangingPunct="1">
+              <a:spcBef>
+                <a:spcPct val="20000"/>
+              </a:spcBef>
+              <a:spcAft>
+                <a:spcPct val="0"/>
+              </a:spcAft>
+              <a:buClr>
+                <a:schemeClr val="accent1"/>
+              </a:buClr>
+              <a:buSzPct val="75000"/>
+              <a:buFont typeface="Wingdings" pitchFamily="2" charset="2"/>
+              <a:buChar char="§"/>
+              <a:defRPr kumimoji="1">
+                <a:solidFill>
+                  <a:schemeClr val="tx1"/>
+                </a:solidFill>
+                <a:latin typeface="+mn-lt"/>
+                <a:ea typeface="+mn-ea"/>
+              </a:defRPr>
+            </a:lvl9pPr>
+          </a:lstStyle>
+          <a:p>
+            <a:r>
+              <a:rPr lang="ja-JP" altLang="en-US" sz="2400" kern="0" dirty="0"/>
+              <a:t>乱数を固定</a:t>
+            </a:r>
+            <a:endParaRPr lang="en-US" altLang="ja-JP" sz="2400" kern="0" dirty="0"/>
+          </a:p>
+          <a:p>
+            <a:r>
+              <a:rPr lang="ja-JP" altLang="en-US" sz="2400" kern="0" dirty="0"/>
+              <a:t>データを用意</a:t>
+            </a:r>
+            <a:endParaRPr lang="en-US" altLang="ja-JP" sz="2400" kern="0" dirty="0"/>
+          </a:p>
+          <a:p>
+            <a:pPr marL="0" indent="0">
+              <a:buNone/>
+            </a:pPr>
+            <a:r>
+              <a:rPr lang="ja-JP" altLang="en-US" sz="1800" kern="0" dirty="0">
+                <a:solidFill>
+                  <a:schemeClr val="accent3">
+                    <a:lumMod val="50000"/>
+                  </a:schemeClr>
+                </a:solidFill>
+              </a:rPr>
+              <a:t>   </a:t>
+            </a:r>
+            <a:r>
+              <a:rPr lang="en-US" altLang="ja-JP" sz="1800" kern="0" dirty="0">
+                <a:solidFill>
+                  <a:schemeClr val="accent3">
+                    <a:lumMod val="50000"/>
+                  </a:schemeClr>
+                </a:solidFill>
+              </a:rPr>
+              <a:t>x1, x2 : </a:t>
+            </a:r>
+            <a:r>
+              <a:rPr lang="ja-JP" altLang="en-US" sz="1800" kern="0" dirty="0">
+                <a:solidFill>
+                  <a:schemeClr val="accent3">
+                    <a:lumMod val="50000"/>
+                  </a:schemeClr>
+                </a:solidFill>
+              </a:rPr>
+              <a:t>データ</a:t>
+            </a:r>
+            <a:r>
+              <a:rPr lang="en-US" altLang="ja-JP" sz="1800" kern="0" dirty="0">
+                <a:solidFill>
+                  <a:schemeClr val="accent3">
+                    <a:lumMod val="50000"/>
+                  </a:schemeClr>
+                </a:solidFill>
+              </a:rPr>
+              <a:t>(-1</a:t>
+            </a:r>
+            <a:r>
+              <a:rPr lang="ja-JP" altLang="en-US" sz="1800" kern="0" dirty="0">
+                <a:solidFill>
+                  <a:schemeClr val="accent3">
+                    <a:lumMod val="50000"/>
+                  </a:schemeClr>
+                </a:solidFill>
+              </a:rPr>
+              <a:t>以上</a:t>
+            </a:r>
+            <a:r>
+              <a:rPr lang="en-US" altLang="ja-JP" sz="1800" kern="0" dirty="0">
+                <a:solidFill>
+                  <a:schemeClr val="accent3">
+                    <a:lumMod val="50000"/>
+                  </a:schemeClr>
+                </a:solidFill>
+              </a:rPr>
+              <a:t>1</a:t>
+            </a:r>
+            <a:r>
+              <a:rPr lang="ja-JP" altLang="en-US" sz="1800" kern="0" dirty="0">
+                <a:solidFill>
+                  <a:schemeClr val="accent3">
+                    <a:lumMod val="50000"/>
+                  </a:schemeClr>
+                </a:solidFill>
+              </a:rPr>
+              <a:t>未満の乱数、</a:t>
+            </a:r>
+            <a:r>
+              <a:rPr lang="en-US" altLang="ja-JP" sz="1800" kern="0" dirty="0">
+                <a:solidFill>
+                  <a:schemeClr val="accent3">
+                    <a:lumMod val="50000"/>
+                  </a:schemeClr>
+                </a:solidFill>
+              </a:rPr>
+              <a:t>50</a:t>
+            </a:r>
+            <a:r>
+              <a:rPr lang="ja-JP" altLang="en-US" sz="1800" kern="0" dirty="0">
+                <a:solidFill>
+                  <a:schemeClr val="accent3">
+                    <a:lumMod val="50000"/>
+                  </a:schemeClr>
+                </a:solidFill>
+              </a:rPr>
+              <a:t>行</a:t>
+            </a:r>
+            <a:r>
+              <a:rPr lang="en-US" altLang="ja-JP" sz="1800" kern="0" dirty="0">
+                <a:solidFill>
+                  <a:schemeClr val="accent3">
+                    <a:lumMod val="50000"/>
+                  </a:schemeClr>
+                </a:solidFill>
+              </a:rPr>
+              <a:t>×</a:t>
+            </a:r>
+            <a:r>
+              <a:rPr lang="ja-JP" altLang="en-US" sz="1800" kern="0" dirty="0">
+                <a:solidFill>
+                  <a:schemeClr val="accent3">
+                    <a:lumMod val="50000"/>
+                  </a:schemeClr>
+                </a:solidFill>
+              </a:rPr>
+              <a:t>２列</a:t>
+            </a:r>
+            <a:r>
+              <a:rPr lang="en-US" altLang="ja-JP" sz="1800" kern="0" dirty="0">
+                <a:solidFill>
+                  <a:schemeClr val="accent3">
+                    <a:lumMod val="50000"/>
+                  </a:schemeClr>
+                </a:solidFill>
+              </a:rPr>
+              <a:t>)</a:t>
+            </a:r>
+          </a:p>
+          <a:p>
+            <a:pPr marL="0" indent="0">
+              <a:buNone/>
+            </a:pPr>
+            <a:r>
+              <a:rPr lang="en-US" altLang="ja-JP" sz="1800" kern="0" dirty="0">
+                <a:solidFill>
+                  <a:schemeClr val="accent3">
+                    <a:lumMod val="50000"/>
+                  </a:schemeClr>
+                </a:solidFill>
+              </a:rPr>
+              <a:t>   y1 : 0</a:t>
+            </a:r>
+            <a:r>
+              <a:rPr lang="ja-JP" altLang="en-US" sz="1800" kern="0" dirty="0">
+                <a:solidFill>
+                  <a:schemeClr val="accent3">
+                    <a:lumMod val="50000"/>
+                  </a:schemeClr>
+                </a:solidFill>
+              </a:rPr>
+              <a:t>のラベル</a:t>
+            </a:r>
+            <a:r>
+              <a:rPr lang="en-US" altLang="ja-JP" sz="1800" kern="0" dirty="0">
+                <a:solidFill>
+                  <a:schemeClr val="accent3">
+                    <a:lumMod val="50000"/>
+                  </a:schemeClr>
+                </a:solidFill>
+              </a:rPr>
+              <a:t>(50</a:t>
+            </a:r>
+            <a:r>
+              <a:rPr lang="ja-JP" altLang="en-US" sz="1800" kern="0" dirty="0">
+                <a:solidFill>
+                  <a:schemeClr val="accent3">
+                    <a:lumMod val="50000"/>
+                  </a:schemeClr>
+                </a:solidFill>
+              </a:rPr>
+              <a:t>個</a:t>
+            </a:r>
+            <a:r>
+              <a:rPr lang="en-US" altLang="ja-JP" sz="1800" kern="0" dirty="0">
+                <a:solidFill>
+                  <a:schemeClr val="accent3">
+                    <a:lumMod val="50000"/>
+                  </a:schemeClr>
+                </a:solidFill>
+              </a:rPr>
+              <a:t>)</a:t>
+            </a:r>
+          </a:p>
+          <a:p>
+            <a:pPr marL="0" indent="0">
+              <a:buNone/>
+            </a:pPr>
+            <a:r>
+              <a:rPr lang="ja-JP" altLang="en-US" sz="1800" kern="0" dirty="0">
+                <a:solidFill>
+                  <a:schemeClr val="accent3">
+                    <a:lumMod val="50000"/>
+                  </a:schemeClr>
+                </a:solidFill>
+              </a:rPr>
+              <a:t>   </a:t>
+            </a:r>
+            <a:r>
+              <a:rPr lang="en-US" altLang="ja-JP" sz="1800" kern="0" dirty="0">
+                <a:solidFill>
+                  <a:schemeClr val="accent3">
+                    <a:lumMod val="50000"/>
+                  </a:schemeClr>
+                </a:solidFill>
+              </a:rPr>
+              <a:t>y2 : 1</a:t>
+            </a:r>
+            <a:r>
+              <a:rPr lang="ja-JP" altLang="en-US" sz="1800" kern="0" dirty="0">
+                <a:solidFill>
+                  <a:schemeClr val="accent3">
+                    <a:lumMod val="50000"/>
+                  </a:schemeClr>
+                </a:solidFill>
+              </a:rPr>
+              <a:t>のラベル</a:t>
+            </a:r>
+            <a:r>
+              <a:rPr lang="en-US" altLang="ja-JP" sz="1800" kern="0" dirty="0">
+                <a:solidFill>
+                  <a:schemeClr val="accent3">
+                    <a:lumMod val="50000"/>
+                  </a:schemeClr>
+                </a:solidFill>
+              </a:rPr>
+              <a:t>(50</a:t>
+            </a:r>
+            <a:r>
+              <a:rPr lang="ja-JP" altLang="en-US" sz="1800" kern="0" dirty="0">
+                <a:solidFill>
+                  <a:schemeClr val="accent3">
+                    <a:lumMod val="50000"/>
+                  </a:schemeClr>
+                </a:solidFill>
+              </a:rPr>
+              <a:t>個</a:t>
+            </a:r>
+            <a:r>
+              <a:rPr lang="en-US" altLang="ja-JP" sz="1800" kern="0" dirty="0">
+                <a:solidFill>
+                  <a:schemeClr val="accent3">
+                    <a:lumMod val="50000"/>
+                  </a:schemeClr>
+                </a:solidFill>
+              </a:rPr>
+              <a:t>)</a:t>
+            </a:r>
+          </a:p>
+          <a:p>
+            <a:pPr marL="0" indent="0">
+              <a:buNone/>
+            </a:pPr>
+            <a:r>
+              <a:rPr lang="en-US" altLang="ja-JP" sz="1800" kern="0" dirty="0">
+                <a:solidFill>
+                  <a:schemeClr val="accent3">
+                    <a:lumMod val="50000"/>
+                  </a:schemeClr>
+                </a:solidFill>
+              </a:rPr>
+              <a:t>   x1 </a:t>
+            </a:r>
+            <a:r>
+              <a:rPr lang="ja-JP" altLang="en-US" sz="1800" kern="0" dirty="0">
+                <a:solidFill>
+                  <a:schemeClr val="accent3">
+                    <a:lumMod val="50000"/>
+                  </a:schemeClr>
+                </a:solidFill>
+              </a:rPr>
+              <a:t>と </a:t>
+            </a:r>
+            <a:r>
+              <a:rPr lang="en-US" altLang="ja-JP" sz="1800" kern="0" dirty="0">
+                <a:solidFill>
+                  <a:schemeClr val="accent3">
+                    <a:lumMod val="50000"/>
+                  </a:schemeClr>
+                </a:solidFill>
+              </a:rPr>
+              <a:t>x2</a:t>
+            </a:r>
+            <a:r>
+              <a:rPr lang="ja-JP" altLang="en-US" sz="1800" kern="0" dirty="0">
+                <a:solidFill>
+                  <a:schemeClr val="accent3">
+                    <a:lumMod val="50000"/>
+                  </a:schemeClr>
+                </a:solidFill>
+              </a:rPr>
+              <a:t> を行方向に結合 → </a:t>
+            </a:r>
+            <a:r>
+              <a:rPr lang="en-US" altLang="ja-JP" sz="1800" kern="0" dirty="0" err="1">
+                <a:solidFill>
+                  <a:schemeClr val="accent3">
+                    <a:lumMod val="50000"/>
+                  </a:schemeClr>
+                </a:solidFill>
+              </a:rPr>
+              <a:t>xd</a:t>
+            </a:r>
+            <a:endParaRPr lang="en-US" altLang="ja-JP" sz="1800" kern="0" dirty="0">
+              <a:solidFill>
+                <a:schemeClr val="accent3">
+                  <a:lumMod val="50000"/>
+                </a:schemeClr>
+              </a:solidFill>
+            </a:endParaRPr>
+          </a:p>
+          <a:p>
+            <a:pPr marL="0" indent="0">
+              <a:buNone/>
+            </a:pPr>
+            <a:r>
+              <a:rPr lang="en-US" altLang="ja-JP" sz="1800" kern="0" dirty="0">
+                <a:solidFill>
+                  <a:schemeClr val="accent3">
+                    <a:lumMod val="50000"/>
+                  </a:schemeClr>
+                </a:solidFill>
+              </a:rPr>
+              <a:t>   y1 </a:t>
+            </a:r>
+            <a:r>
+              <a:rPr lang="ja-JP" altLang="en-US" sz="1800" kern="0" dirty="0">
+                <a:solidFill>
+                  <a:schemeClr val="accent3">
+                    <a:lumMod val="50000"/>
+                  </a:schemeClr>
+                </a:solidFill>
+              </a:rPr>
+              <a:t>と </a:t>
+            </a:r>
+            <a:r>
+              <a:rPr lang="en-US" altLang="ja-JP" sz="1800" kern="0" dirty="0">
+                <a:solidFill>
+                  <a:schemeClr val="accent3">
+                    <a:lumMod val="50000"/>
+                  </a:schemeClr>
+                </a:solidFill>
+              </a:rPr>
+              <a:t>y2 </a:t>
+            </a:r>
+            <a:r>
+              <a:rPr lang="ja-JP" altLang="en-US" sz="1800" kern="0" dirty="0">
+                <a:solidFill>
+                  <a:schemeClr val="accent3">
+                    <a:lumMod val="50000"/>
+                  </a:schemeClr>
+                </a:solidFill>
+              </a:rPr>
+              <a:t>を結合 → </a:t>
+            </a:r>
+            <a:r>
+              <a:rPr lang="en-US" altLang="ja-JP" sz="1800" kern="0" dirty="0">
+                <a:solidFill>
+                  <a:schemeClr val="accent3">
+                    <a:lumMod val="50000"/>
+                  </a:schemeClr>
+                </a:solidFill>
+              </a:rPr>
+              <a:t>yd</a:t>
+            </a:r>
+          </a:p>
+          <a:p>
+            <a:pPr marL="0" indent="0">
+              <a:buNone/>
+            </a:pPr>
+            <a:endParaRPr lang="en-US" altLang="ja-JP" sz="2400" kern="0" dirty="0"/>
+          </a:p>
+          <a:p>
+            <a:pPr marL="0" indent="0">
+              <a:buNone/>
+            </a:pPr>
+            <a:r>
+              <a:rPr lang="ja-JP" altLang="en-US" sz="2400" kern="0" dirty="0"/>
+              <a:t>　</a:t>
+            </a:r>
+            <a:endParaRPr lang="en-US" altLang="ja-JP" sz="2400" kern="0" dirty="0"/>
+          </a:p>
+        </p:txBody>
+      </p:sp>
+      <p:sp>
+        <p:nvSpPr>
+          <p:cNvPr id="2" name="タイトル 1">
+            <a:extLst>
+              <a:ext uri="{FF2B5EF4-FFF2-40B4-BE49-F238E27FC236}">
+                <a16:creationId xmlns:a16="http://schemas.microsoft.com/office/drawing/2014/main" id="{24908C1C-E1BE-7B66-9AE3-98D91F134D10}"/>
+              </a:ext>
+            </a:extLst>
+          </p:cNvPr>
+          <p:cNvSpPr>
+            <a:spLocks noGrp="1"/>
+          </p:cNvSpPr>
+          <p:nvPr>
+            <p:ph type="title"/>
+          </p:nvPr>
+        </p:nvSpPr>
+        <p:spPr/>
+        <p:txBody>
+          <a:bodyPr/>
+          <a:lstStyle/>
+          <a:p>
+            <a:r>
+              <a:rPr kumimoji="1" lang="en-US" altLang="ja-JP" dirty="0" err="1"/>
+              <a:t>random_plot.ipynb</a:t>
+            </a:r>
+            <a:endParaRPr kumimoji="1" lang="ja-JP" altLang="en-US" dirty="0"/>
+          </a:p>
+        </p:txBody>
+      </p:sp>
+      <p:graphicFrame>
+        <p:nvGraphicFramePr>
+          <p:cNvPr id="8" name="表 7">
+            <a:extLst>
+              <a:ext uri="{FF2B5EF4-FFF2-40B4-BE49-F238E27FC236}">
+                <a16:creationId xmlns:a16="http://schemas.microsoft.com/office/drawing/2014/main" id="{2BB8C37D-34E4-940C-5C11-2E0CC3E5957B}"/>
+              </a:ext>
+            </a:extLst>
+          </p:cNvPr>
+          <p:cNvGraphicFramePr>
+            <a:graphicFrameLocks noGrp="1"/>
+          </p:cNvGraphicFramePr>
+          <p:nvPr/>
+        </p:nvGraphicFramePr>
+        <p:xfrm>
+          <a:off x="4982002" y="4569718"/>
+          <a:ext cx="6636942" cy="1325880"/>
+        </p:xfrm>
+        <a:graphic>
+          <a:graphicData uri="http://schemas.openxmlformats.org/drawingml/2006/table">
+            <a:tbl>
+              <a:tblPr firstRow="1" firstCol="1" bandRow="1">
+                <a:tableStyleId>{21E4AEA4-8DFA-4A89-87EB-49C32662AFE0}</a:tableStyleId>
+              </a:tblPr>
+              <a:tblGrid>
+                <a:gridCol w="1483271">
+                  <a:extLst>
+                    <a:ext uri="{9D8B030D-6E8A-4147-A177-3AD203B41FA5}">
+                      <a16:colId xmlns:a16="http://schemas.microsoft.com/office/drawing/2014/main" val="165235932"/>
+                    </a:ext>
+                  </a:extLst>
+                </a:gridCol>
+                <a:gridCol w="3174264">
+                  <a:extLst>
+                    <a:ext uri="{9D8B030D-6E8A-4147-A177-3AD203B41FA5}">
+                      <a16:colId xmlns:a16="http://schemas.microsoft.com/office/drawing/2014/main" val="1387312990"/>
+                    </a:ext>
+                  </a:extLst>
+                </a:gridCol>
+                <a:gridCol w="1979407">
+                  <a:extLst>
+                    <a:ext uri="{9D8B030D-6E8A-4147-A177-3AD203B41FA5}">
+                      <a16:colId xmlns:a16="http://schemas.microsoft.com/office/drawing/2014/main" val="2241803932"/>
+                    </a:ext>
+                  </a:extLst>
+                </a:gridCol>
+              </a:tblGrid>
+              <a:tr h="121111">
+                <a:tc>
+                  <a:txBody>
+                    <a:bodyPr/>
+                    <a:lstStyle/>
+                    <a:p>
+                      <a:endParaRPr kumimoji="1" lang="ja-JP" altLang="en-US" dirty="0"/>
+                    </a:p>
+                  </a:txBody>
+                  <a:tcPr/>
+                </a:tc>
+                <a:tc>
+                  <a:txBody>
+                    <a:bodyPr/>
+                    <a:lstStyle/>
+                    <a:p>
+                      <a:r>
+                        <a:rPr kumimoji="1" lang="en-US" altLang="ja-JP" dirty="0"/>
+                        <a:t>Python</a:t>
+                      </a:r>
+                      <a:endParaRPr kumimoji="1" lang="ja-JP" altLang="en-US" dirty="0"/>
+                    </a:p>
+                  </a:txBody>
+                  <a:tcPr/>
+                </a:tc>
+                <a:tc>
+                  <a:txBody>
+                    <a:bodyPr/>
+                    <a:lstStyle/>
+                    <a:p>
+                      <a:r>
+                        <a:rPr kumimoji="1" lang="en-US" altLang="ja-JP" dirty="0"/>
+                        <a:t>R</a:t>
+                      </a:r>
+                      <a:endParaRPr kumimoji="1" lang="ja-JP" altLang="en-US" dirty="0"/>
+                    </a:p>
+                  </a:txBody>
+                  <a:tcPr/>
+                </a:tc>
+                <a:extLst>
+                  <a:ext uri="{0D108BD9-81ED-4DB2-BD59-A6C34878D82A}">
+                    <a16:rowId xmlns:a16="http://schemas.microsoft.com/office/drawing/2014/main" val="12414329"/>
+                  </a:ext>
+                </a:extLst>
+              </a:tr>
+              <a:tr h="280807">
+                <a:tc>
+                  <a:txBody>
+                    <a:bodyPr/>
+                    <a:lstStyle/>
+                    <a:p>
+                      <a:r>
+                        <a:rPr kumimoji="1" lang="ja-JP" altLang="en-US" sz="1500" b="0" dirty="0">
+                          <a:solidFill>
+                            <a:schemeClr val="tx1"/>
+                          </a:solidFill>
+                        </a:rPr>
+                        <a:t>乱数生成</a:t>
+                      </a:r>
+                    </a:p>
+                  </a:txBody>
+                  <a:tcPr>
+                    <a:solidFill>
+                      <a:schemeClr val="bg2">
+                        <a:lumMod val="20000"/>
+                        <a:lumOff val="80000"/>
+                      </a:schemeClr>
+                    </a:solidFill>
+                  </a:tcPr>
+                </a:tc>
+                <a:tc>
+                  <a:txBody>
+                    <a:bodyPr/>
+                    <a:lstStyle/>
+                    <a:p>
+                      <a:r>
+                        <a:rPr kumimoji="1" lang="en-US" altLang="ja-JP" sz="1500" dirty="0" err="1"/>
+                        <a:t>np.random.uniform</a:t>
+                      </a:r>
+                      <a:r>
+                        <a:rPr kumimoji="1" lang="en-US" altLang="ja-JP" sz="1500" dirty="0"/>
+                        <a:t>(low, high, size)</a:t>
+                      </a:r>
+                      <a:endParaRPr kumimoji="1" lang="ja-JP" altLang="en-US" sz="1500" dirty="0"/>
+                    </a:p>
+                  </a:txBody>
+                  <a:tcPr/>
+                </a:tc>
+                <a:tc>
+                  <a:txBody>
+                    <a:bodyPr/>
+                    <a:lstStyle/>
+                    <a:p>
+                      <a:r>
+                        <a:rPr kumimoji="1" lang="en-US" altLang="ja-JP" sz="1500" dirty="0" err="1"/>
+                        <a:t>runif</a:t>
+                      </a:r>
+                      <a:r>
+                        <a:rPr kumimoji="1" lang="en-US" altLang="ja-JP" sz="1500" dirty="0"/>
+                        <a:t>(</a:t>
+                      </a:r>
+                      <a:r>
+                        <a:rPr kumimoji="1" lang="en-US" altLang="ja-JP" sz="1500" dirty="0" err="1"/>
+                        <a:t>n,min</a:t>
+                      </a:r>
+                      <a:r>
+                        <a:rPr kumimoji="1" lang="en-US" altLang="ja-JP" sz="1500" dirty="0"/>
+                        <a:t>, max, )</a:t>
+                      </a:r>
+                    </a:p>
+                  </a:txBody>
+                  <a:tcPr/>
+                </a:tc>
+                <a:extLst>
+                  <a:ext uri="{0D108BD9-81ED-4DB2-BD59-A6C34878D82A}">
+                    <a16:rowId xmlns:a16="http://schemas.microsoft.com/office/drawing/2014/main" val="1531238374"/>
+                  </a:ext>
+                </a:extLst>
+              </a:tr>
+              <a:tr h="280807">
+                <a:tc>
+                  <a:txBody>
+                    <a:bodyPr/>
+                    <a:lstStyle/>
+                    <a:p>
+                      <a:r>
+                        <a:rPr kumimoji="1" lang="ja-JP" altLang="en-US" sz="1500" b="0" dirty="0">
+                          <a:solidFill>
+                            <a:schemeClr val="tx1"/>
+                          </a:solidFill>
+                        </a:rPr>
+                        <a:t>行方向に結合</a:t>
+                      </a:r>
+                    </a:p>
+                  </a:txBody>
+                  <a:tcPr>
+                    <a:solidFill>
+                      <a:schemeClr val="bg2">
+                        <a:lumMod val="20000"/>
+                        <a:lumOff val="80000"/>
+                      </a:schemeClr>
+                    </a:solidFill>
+                  </a:tcPr>
+                </a:tc>
+                <a:tc>
+                  <a:txBody>
+                    <a:bodyPr/>
+                    <a:lstStyle/>
+                    <a:p>
+                      <a:r>
+                        <a:rPr kumimoji="1" lang="en-US" altLang="ja-JP" sz="1500" dirty="0" err="1"/>
+                        <a:t>np.append</a:t>
+                      </a:r>
+                      <a:r>
+                        <a:rPr kumimoji="1" lang="en-US" altLang="ja-JP" sz="1500" dirty="0"/>
+                        <a:t>(… , axis = 0)</a:t>
+                      </a:r>
+                      <a:endParaRPr kumimoji="1" lang="ja-JP" altLang="en-US" sz="1500" dirty="0"/>
+                    </a:p>
+                  </a:txBody>
+                  <a:tcPr/>
+                </a:tc>
+                <a:tc>
+                  <a:txBody>
+                    <a:bodyPr/>
+                    <a:lstStyle/>
+                    <a:p>
+                      <a:r>
+                        <a:rPr kumimoji="1" lang="en-US" altLang="ja-JP" sz="1500" dirty="0" err="1"/>
+                        <a:t>rbind</a:t>
+                      </a:r>
+                      <a:r>
+                        <a:rPr kumimoji="1" lang="en-US" altLang="ja-JP" sz="1500" dirty="0"/>
+                        <a:t>()</a:t>
+                      </a:r>
+                    </a:p>
+                  </a:txBody>
+                  <a:tcPr/>
+                </a:tc>
+                <a:extLst>
+                  <a:ext uri="{0D108BD9-81ED-4DB2-BD59-A6C34878D82A}">
+                    <a16:rowId xmlns:a16="http://schemas.microsoft.com/office/drawing/2014/main" val="3835439253"/>
+                  </a:ext>
+                </a:extLst>
+              </a:tr>
+              <a:tr h="0">
+                <a:tc>
+                  <a:txBody>
+                    <a:bodyPr/>
+                    <a:lstStyle/>
+                    <a:p>
+                      <a:r>
+                        <a:rPr kumimoji="1" lang="ja-JP" altLang="en-US" sz="1500" b="0" dirty="0">
+                          <a:solidFill>
+                            <a:schemeClr val="tx1"/>
+                          </a:solidFill>
+                        </a:rPr>
+                        <a:t>ベクトルの結合</a:t>
+                      </a:r>
+                    </a:p>
+                  </a:txBody>
+                  <a:tcPr>
+                    <a:solidFill>
+                      <a:schemeClr val="bg2">
+                        <a:lumMod val="20000"/>
+                        <a:lumOff val="80000"/>
+                      </a:schemeClr>
+                    </a:solidFill>
+                  </a:tcPr>
+                </a:tc>
+                <a:tc>
+                  <a:txBody>
+                    <a:bodyPr/>
+                    <a:lstStyle/>
+                    <a:p>
+                      <a:r>
+                        <a:rPr kumimoji="1" lang="en-US" altLang="ja-JP" sz="1500" dirty="0" err="1"/>
+                        <a:t>np.append</a:t>
+                      </a:r>
+                      <a:r>
+                        <a:rPr kumimoji="1" lang="en-US" altLang="ja-JP" sz="1500" dirty="0"/>
+                        <a:t>()</a:t>
+                      </a:r>
+                      <a:endParaRPr kumimoji="1" lang="ja-JP" altLang="en-US" sz="1500" dirty="0"/>
+                    </a:p>
+                  </a:txBody>
+                  <a:tcPr/>
+                </a:tc>
+                <a:tc>
+                  <a:txBody>
+                    <a:bodyPr/>
+                    <a:lstStyle/>
+                    <a:p>
+                      <a:r>
+                        <a:rPr kumimoji="1" lang="en-US" altLang="ja-JP" sz="1500" dirty="0"/>
+                        <a:t>c()</a:t>
+                      </a:r>
+                    </a:p>
+                  </a:txBody>
+                  <a:tcPr/>
+                </a:tc>
+                <a:extLst>
+                  <a:ext uri="{0D108BD9-81ED-4DB2-BD59-A6C34878D82A}">
+                    <a16:rowId xmlns:a16="http://schemas.microsoft.com/office/drawing/2014/main" val="1251462625"/>
+                  </a:ext>
+                </a:extLst>
+              </a:tr>
+            </a:tbl>
+          </a:graphicData>
+        </a:graphic>
+      </p:graphicFrame>
+      <p:sp>
+        <p:nvSpPr>
+          <p:cNvPr id="14" name="正方形/長方形 13">
+            <a:extLst>
+              <a:ext uri="{FF2B5EF4-FFF2-40B4-BE49-F238E27FC236}">
+                <a16:creationId xmlns:a16="http://schemas.microsoft.com/office/drawing/2014/main" id="{A082B75C-8B32-C889-B5AA-7E197128E2D2}"/>
+              </a:ext>
+            </a:extLst>
+          </p:cNvPr>
+          <p:cNvSpPr/>
+          <p:nvPr/>
+        </p:nvSpPr>
+        <p:spPr bwMode="auto">
+          <a:xfrm>
+            <a:off x="3063380" y="1004700"/>
+            <a:ext cx="3752451" cy="1976512"/>
+          </a:xfrm>
+          <a:prstGeom prst="rect">
+            <a:avLst/>
+          </a:prstGeom>
+          <a:solidFill>
+            <a:schemeClr val="accent5">
+              <a:lumMod val="40000"/>
+              <a:lumOff val="60000"/>
+            </a:schemeClr>
+          </a:solidFill>
+          <a:ln w="9525" cap="flat" cmpd="sng" algn="ctr">
+            <a:noFill/>
+            <a:prstDash val="solid"/>
+            <a:miter lim="800000"/>
+            <a:headEnd type="none" w="med" len="med"/>
+            <a:tailEnd type="none" w="med" len="med"/>
+          </a:ln>
+          <a:effectLst/>
+        </p:spPr>
+        <p:txBody>
+          <a:bodyPr vert="horz" wrap="none" lIns="91440" tIns="45720" rIns="91440" bIns="45720" numCol="1" rtlCol="0" anchor="t" anchorCtr="0" compatLnSpc="1">
+            <a:prstTxWarp prst="textNoShape">
+              <a:avLst/>
+            </a:prstTxWarp>
+          </a:bodyPr>
+          <a:lstStyle/>
+          <a:p>
+            <a:pPr marL="0" marR="0" indent="0" defTabSz="914400" rtl="0" eaLnBrk="1" fontAlgn="base" latinLnBrk="0" hangingPunct="1">
+              <a:spcBef>
+                <a:spcPct val="0"/>
+              </a:spcBef>
+              <a:spcAft>
+                <a:spcPct val="0"/>
+              </a:spcAft>
+              <a:buClrTx/>
+              <a:buSzTx/>
+              <a:buFontTx/>
+              <a:buNone/>
+              <a:tabLst/>
+            </a:pPr>
+            <a:r>
+              <a:rPr kumimoji="1" lang="en-US" altLang="ja-JP" sz="1500" b="0" i="0" u="none" strike="noStrike" cap="none" normalizeH="0" baseline="0" dirty="0">
+                <a:ln>
+                  <a:noFill/>
+                </a:ln>
+                <a:solidFill>
+                  <a:schemeClr val="accent5">
+                    <a:lumMod val="50000"/>
+                  </a:schemeClr>
+                </a:solidFill>
+                <a:effectLst/>
+                <a:latin typeface="Arial" charset="0"/>
+                <a:ea typeface="ＭＳ Ｐゴシック" pitchFamily="50" charset="-128"/>
+              </a:rPr>
+              <a:t>Python</a:t>
+            </a:r>
+            <a:endParaRPr kumimoji="1" lang="ja-JP" altLang="en-US" sz="1500" b="0" i="0" u="none" strike="noStrike" cap="none" normalizeH="0" baseline="0" dirty="0">
+              <a:ln>
+                <a:noFill/>
+              </a:ln>
+              <a:solidFill>
+                <a:schemeClr val="accent5">
+                  <a:lumMod val="50000"/>
+                </a:schemeClr>
+              </a:solidFill>
+              <a:effectLst/>
+              <a:latin typeface="Arial" charset="0"/>
+              <a:ea typeface="ＭＳ Ｐゴシック" pitchFamily="50" charset="-128"/>
+            </a:endParaRPr>
+          </a:p>
+        </p:txBody>
+      </p:sp>
+      <p:sp>
+        <p:nvSpPr>
+          <p:cNvPr id="16" name="正方形/長方形 15">
+            <a:extLst>
+              <a:ext uri="{FF2B5EF4-FFF2-40B4-BE49-F238E27FC236}">
+                <a16:creationId xmlns:a16="http://schemas.microsoft.com/office/drawing/2014/main" id="{E1056466-E41D-8B4C-8C91-CDACA1D6D7B1}"/>
+              </a:ext>
+            </a:extLst>
+          </p:cNvPr>
+          <p:cNvSpPr/>
+          <p:nvPr/>
+        </p:nvSpPr>
+        <p:spPr bwMode="auto">
+          <a:xfrm>
+            <a:off x="6887228" y="1000912"/>
+            <a:ext cx="5215125" cy="2584304"/>
+          </a:xfrm>
+          <a:prstGeom prst="rect">
+            <a:avLst/>
+          </a:prstGeom>
+          <a:solidFill>
+            <a:schemeClr val="accent3">
+              <a:lumMod val="85000"/>
+            </a:schemeClr>
+          </a:solidFill>
+          <a:ln w="9525" cap="flat" cmpd="sng" algn="ctr">
+            <a:noFill/>
+            <a:prstDash val="solid"/>
+            <a:miter lim="800000"/>
+            <a:headEnd type="none" w="med" len="med"/>
+            <a:tailEnd type="none" w="med" len="med"/>
+          </a:ln>
+          <a:effectLst/>
+        </p:spPr>
+        <p:txBody>
+          <a:bodyPr vert="horz" wrap="none" lIns="91440" tIns="45720" rIns="91440" bIns="45720" numCol="1" rtlCol="0" anchor="t" anchorCtr="0" compatLnSpc="1">
+            <a:prstTxWarp prst="textNoShape">
+              <a:avLst/>
+            </a:prstTxWarp>
+          </a:bodyPr>
+          <a:lstStyle/>
+          <a:p>
+            <a:pPr marL="0" marR="0" indent="0" defTabSz="914400" rtl="0" eaLnBrk="1" fontAlgn="base" latinLnBrk="0" hangingPunct="1">
+              <a:spcBef>
+                <a:spcPct val="0"/>
+              </a:spcBef>
+              <a:spcAft>
+                <a:spcPct val="0"/>
+              </a:spcAft>
+              <a:buClrTx/>
+              <a:buSzTx/>
+              <a:buFontTx/>
+              <a:buNone/>
+              <a:tabLst/>
+            </a:pPr>
+            <a:r>
+              <a:rPr lang="en-US" altLang="ja-JP" sz="1500" dirty="0">
+                <a:solidFill>
+                  <a:schemeClr val="accent4">
+                    <a:lumMod val="65000"/>
+                    <a:lumOff val="35000"/>
+                  </a:schemeClr>
+                </a:solidFill>
+                <a:latin typeface="Arial" charset="0"/>
+                <a:ea typeface="ＭＳ Ｐゴシック" pitchFamily="50" charset="-128"/>
+              </a:rPr>
+              <a:t>R</a:t>
+            </a:r>
+          </a:p>
+        </p:txBody>
+      </p:sp>
+    </p:spTree>
+    <p:extLst>
+      <p:ext uri="{BB962C8B-B14F-4D97-AF65-F5344CB8AC3E}">
+        <p14:creationId xmlns:p14="http://schemas.microsoft.com/office/powerpoint/2010/main" val="2305482368"/>
+      </p:ext>
+    </p:extLst>
+  </p:cSld>
+  <p:clrMapOvr>
+    <a:masterClrMapping/>
+  </p:clrMapOvr>
+</p:sld>
+</file>
+
+<file path=ppt/slides/slide18.xml><?xml version="1.0" encoding="utf-8"?>
+<p:sld xmlns:a="http://schemas.openxmlformats.org/drawingml/2006/main" xmlns:r="http://schemas.openxmlformats.org/officeDocument/2006/relationships" xmlns:p="http://schemas.openxmlformats.org/presentationml/2006/main">
+  <p:cSld>
+    <p:spTree>
+      <p:nvGrpSpPr>
+        <p:cNvPr id="1" name="">
+          <a:extLst>
+            <a:ext uri="{FF2B5EF4-FFF2-40B4-BE49-F238E27FC236}">
+              <a16:creationId xmlns:a16="http://schemas.microsoft.com/office/drawing/2014/main" id="{60DC8073-E444-51DF-CE36-45100F5D20DD}"/>
+            </a:ext>
+          </a:extLst>
+        </p:cNvPr>
+        <p:cNvGrpSpPr/>
+        <p:nvPr/>
+      </p:nvGrpSpPr>
+      <p:grpSpPr>
+        <a:xfrm>
+          <a:off x="0" y="0"/>
+          <a:ext cx="0" cy="0"/>
+          <a:chOff x="0" y="0"/>
+          <a:chExt cx="0" cy="0"/>
+        </a:xfrm>
+      </p:grpSpPr>
+      <p:sp>
+        <p:nvSpPr>
+          <p:cNvPr id="3" name="コンテンツ プレースホルダー 2">
+            <a:extLst>
+              <a:ext uri="{FF2B5EF4-FFF2-40B4-BE49-F238E27FC236}">
+                <a16:creationId xmlns:a16="http://schemas.microsoft.com/office/drawing/2014/main" id="{94A60E52-4A48-8A44-9D10-73F89E54D7B5}"/>
+              </a:ext>
+            </a:extLst>
+          </p:cNvPr>
+          <p:cNvSpPr txBox="1">
+            <a:spLocks/>
+          </p:cNvSpPr>
+          <p:nvPr/>
+        </p:nvSpPr>
+        <p:spPr>
+          <a:xfrm>
+            <a:off x="762000" y="1203306"/>
+            <a:ext cx="7396729" cy="557598"/>
+          </a:xfrm>
+          <a:prstGeom prst="rect">
+            <a:avLst/>
+          </a:prstGeom>
+        </p:spPr>
+        <p:txBody>
+          <a:bodyPr/>
+          <a:lstStyle>
+            <a:lvl1pPr marL="342900" indent="-342900" algn="l" rtl="0" eaLnBrk="1" fontAlgn="base" hangingPunct="1">
+              <a:spcBef>
+                <a:spcPct val="20000"/>
+              </a:spcBef>
+              <a:spcAft>
+                <a:spcPct val="0"/>
+              </a:spcAft>
+              <a:buClr>
+                <a:schemeClr val="accent1"/>
+              </a:buClr>
+              <a:buSzPct val="65000"/>
+              <a:buFont typeface="Wingdings" pitchFamily="2" charset="2"/>
+              <a:buChar char="n"/>
+              <a:defRPr kumimoji="1" sz="3200">
+                <a:solidFill>
+                  <a:schemeClr val="tx1"/>
+                </a:solidFill>
+                <a:latin typeface="+mn-lt"/>
+                <a:ea typeface="+mn-ea"/>
+                <a:cs typeface="+mn-cs"/>
+              </a:defRPr>
+            </a:lvl1pPr>
+            <a:lvl2pPr marL="669925" indent="-325438" algn="l" rtl="0" eaLnBrk="1" fontAlgn="base" hangingPunct="1">
+              <a:spcBef>
+                <a:spcPct val="20000"/>
+              </a:spcBef>
+              <a:spcAft>
+                <a:spcPct val="0"/>
+              </a:spcAft>
+              <a:buClr>
+                <a:schemeClr val="accent2"/>
+              </a:buClr>
+              <a:buSzPct val="60000"/>
+              <a:buFont typeface="Wingdings" pitchFamily="2" charset="2"/>
+              <a:buChar char="q"/>
+              <a:defRPr kumimoji="1" sz="2800">
+                <a:solidFill>
+                  <a:schemeClr val="tx1"/>
+                </a:solidFill>
+                <a:latin typeface="+mn-lt"/>
+                <a:ea typeface="+mn-ea"/>
+              </a:defRPr>
+            </a:lvl2pPr>
+            <a:lvl3pPr marL="1022350" indent="-350838" algn="l" rtl="0" eaLnBrk="1" fontAlgn="base" hangingPunct="1">
+              <a:spcBef>
+                <a:spcPct val="20000"/>
+              </a:spcBef>
+              <a:spcAft>
+                <a:spcPct val="0"/>
+              </a:spcAft>
+              <a:buClr>
+                <a:schemeClr val="accent1"/>
+              </a:buClr>
+              <a:buSzPct val="65000"/>
+              <a:buFont typeface="Wingdings" pitchFamily="2" charset="2"/>
+              <a:buChar char="n"/>
+              <a:defRPr kumimoji="1" sz="2400">
+                <a:solidFill>
+                  <a:schemeClr val="tx1"/>
+                </a:solidFill>
+                <a:latin typeface="+mn-lt"/>
+                <a:ea typeface="+mn-ea"/>
+              </a:defRPr>
+            </a:lvl3pPr>
+            <a:lvl4pPr marL="1339850" indent="-315913" algn="l" rtl="0" eaLnBrk="1" fontAlgn="base" hangingPunct="1">
+              <a:spcBef>
+                <a:spcPct val="20000"/>
+              </a:spcBef>
+              <a:spcAft>
+                <a:spcPct val="0"/>
+              </a:spcAft>
+              <a:buClr>
+                <a:schemeClr val="accent2"/>
+              </a:buClr>
+              <a:buSzPct val="70000"/>
+              <a:buFont typeface="Wingdings" pitchFamily="2" charset="2"/>
+              <a:buChar char="q"/>
+              <a:defRPr kumimoji="1" sz="2000">
+                <a:solidFill>
+                  <a:schemeClr val="tx1"/>
+                </a:solidFill>
+                <a:latin typeface="+mn-lt"/>
+                <a:ea typeface="+mn-ea"/>
+              </a:defRPr>
+            </a:lvl4pPr>
+            <a:lvl5pPr marL="1681163" indent="-339725" algn="l" rtl="0" eaLnBrk="1" fontAlgn="base" hangingPunct="1">
+              <a:spcBef>
+                <a:spcPct val="20000"/>
+              </a:spcBef>
+              <a:spcAft>
+                <a:spcPct val="0"/>
+              </a:spcAft>
+              <a:buClr>
+                <a:schemeClr val="accent1"/>
+              </a:buClr>
+              <a:buSzPct val="75000"/>
+              <a:buFont typeface="Wingdings" pitchFamily="2" charset="2"/>
+              <a:buChar char="§"/>
+              <a:defRPr kumimoji="1">
+                <a:solidFill>
+                  <a:schemeClr val="tx1"/>
+                </a:solidFill>
+                <a:latin typeface="+mn-lt"/>
+                <a:ea typeface="+mn-ea"/>
+              </a:defRPr>
+            </a:lvl5pPr>
+            <a:lvl6pPr marL="2138363" indent="-339725" algn="l" rtl="0" eaLnBrk="1" fontAlgn="base" hangingPunct="1">
+              <a:spcBef>
+                <a:spcPct val="20000"/>
+              </a:spcBef>
+              <a:spcAft>
+                <a:spcPct val="0"/>
+              </a:spcAft>
+              <a:buClr>
+                <a:schemeClr val="accent1"/>
+              </a:buClr>
+              <a:buSzPct val="75000"/>
+              <a:buFont typeface="Wingdings" pitchFamily="2" charset="2"/>
+              <a:buChar char="§"/>
+              <a:defRPr kumimoji="1">
+                <a:solidFill>
+                  <a:schemeClr val="tx1"/>
+                </a:solidFill>
+                <a:latin typeface="+mn-lt"/>
+                <a:ea typeface="+mn-ea"/>
+              </a:defRPr>
+            </a:lvl6pPr>
+            <a:lvl7pPr marL="2595563" indent="-339725" algn="l" rtl="0" eaLnBrk="1" fontAlgn="base" hangingPunct="1">
+              <a:spcBef>
+                <a:spcPct val="20000"/>
+              </a:spcBef>
+              <a:spcAft>
+                <a:spcPct val="0"/>
+              </a:spcAft>
+              <a:buClr>
+                <a:schemeClr val="accent1"/>
+              </a:buClr>
+              <a:buSzPct val="75000"/>
+              <a:buFont typeface="Wingdings" pitchFamily="2" charset="2"/>
+              <a:buChar char="§"/>
+              <a:defRPr kumimoji="1">
+                <a:solidFill>
+                  <a:schemeClr val="tx1"/>
+                </a:solidFill>
+                <a:latin typeface="+mn-lt"/>
+                <a:ea typeface="+mn-ea"/>
+              </a:defRPr>
+            </a:lvl7pPr>
+            <a:lvl8pPr marL="3052763" indent="-339725" algn="l" rtl="0" eaLnBrk="1" fontAlgn="base" hangingPunct="1">
+              <a:spcBef>
+                <a:spcPct val="20000"/>
+              </a:spcBef>
+              <a:spcAft>
+                <a:spcPct val="0"/>
+              </a:spcAft>
+              <a:buClr>
+                <a:schemeClr val="accent1"/>
+              </a:buClr>
+              <a:buSzPct val="75000"/>
+              <a:buFont typeface="Wingdings" pitchFamily="2" charset="2"/>
+              <a:buChar char="§"/>
+              <a:defRPr kumimoji="1">
+                <a:solidFill>
+                  <a:schemeClr val="tx1"/>
+                </a:solidFill>
+                <a:latin typeface="+mn-lt"/>
+                <a:ea typeface="+mn-ea"/>
+              </a:defRPr>
+            </a:lvl8pPr>
+            <a:lvl9pPr marL="3509963" indent="-339725" algn="l" rtl="0" eaLnBrk="1" fontAlgn="base" hangingPunct="1">
+              <a:spcBef>
+                <a:spcPct val="20000"/>
+              </a:spcBef>
+              <a:spcAft>
+                <a:spcPct val="0"/>
+              </a:spcAft>
+              <a:buClr>
+                <a:schemeClr val="accent1"/>
+              </a:buClr>
+              <a:buSzPct val="75000"/>
+              <a:buFont typeface="Wingdings" pitchFamily="2" charset="2"/>
+              <a:buChar char="§"/>
+              <a:defRPr kumimoji="1">
+                <a:solidFill>
+                  <a:schemeClr val="tx1"/>
+                </a:solidFill>
+                <a:latin typeface="+mn-lt"/>
+                <a:ea typeface="+mn-ea"/>
+              </a:defRPr>
+            </a:lvl9pPr>
+          </a:lstStyle>
+          <a:p>
+            <a:pPr marL="0" indent="0">
+              <a:buNone/>
+            </a:pPr>
+            <a:r>
+              <a:rPr lang="ja-JP" altLang="en-US" b="1" kern="0" dirty="0"/>
+              <a:t>図</a:t>
+            </a:r>
+            <a:endParaRPr lang="en-US" altLang="ja-JP" sz="1800" kern="0" dirty="0">
+              <a:solidFill>
+                <a:schemeClr val="accent3">
+                  <a:lumMod val="50000"/>
+                </a:schemeClr>
+              </a:solidFill>
+            </a:endParaRPr>
+          </a:p>
+          <a:p>
+            <a:pPr marL="0" indent="0">
+              <a:buNone/>
+            </a:pPr>
+            <a:endParaRPr lang="en-US" altLang="ja-JP" sz="2000" kern="0" dirty="0">
+              <a:solidFill>
+                <a:schemeClr val="accent6"/>
+              </a:solidFill>
+            </a:endParaRPr>
+          </a:p>
+        </p:txBody>
+      </p:sp>
+      <p:sp>
+        <p:nvSpPr>
+          <p:cNvPr id="11" name="コンテンツ プレースホルダー 2">
+            <a:extLst>
+              <a:ext uri="{FF2B5EF4-FFF2-40B4-BE49-F238E27FC236}">
+                <a16:creationId xmlns:a16="http://schemas.microsoft.com/office/drawing/2014/main" id="{C5352A9B-147A-270B-B02A-4A45E1AABB12}"/>
+              </a:ext>
+            </a:extLst>
+          </p:cNvPr>
+          <p:cNvSpPr txBox="1">
+            <a:spLocks/>
+          </p:cNvSpPr>
+          <p:nvPr/>
+        </p:nvSpPr>
+        <p:spPr>
+          <a:xfrm>
+            <a:off x="762000" y="2143599"/>
+            <a:ext cx="4680604" cy="1361602"/>
+          </a:xfrm>
+          <a:prstGeom prst="rect">
+            <a:avLst/>
+          </a:prstGeom>
+        </p:spPr>
+        <p:txBody>
+          <a:bodyPr/>
+          <a:lstStyle>
+            <a:lvl1pPr marL="342900" indent="-342900" algn="l" rtl="0" eaLnBrk="1" fontAlgn="base" hangingPunct="1">
+              <a:spcBef>
+                <a:spcPct val="20000"/>
+              </a:spcBef>
+              <a:spcAft>
+                <a:spcPct val="0"/>
+              </a:spcAft>
+              <a:buClr>
+                <a:schemeClr val="accent1"/>
+              </a:buClr>
+              <a:buSzPct val="65000"/>
+              <a:buFont typeface="Wingdings" pitchFamily="2" charset="2"/>
+              <a:buChar char="n"/>
+              <a:defRPr kumimoji="1" sz="3200">
+                <a:solidFill>
+                  <a:schemeClr val="tx1"/>
+                </a:solidFill>
+                <a:latin typeface="+mn-lt"/>
+                <a:ea typeface="+mn-ea"/>
+                <a:cs typeface="+mn-cs"/>
+              </a:defRPr>
+            </a:lvl1pPr>
+            <a:lvl2pPr marL="669925" indent="-325438" algn="l" rtl="0" eaLnBrk="1" fontAlgn="base" hangingPunct="1">
+              <a:spcBef>
+                <a:spcPct val="20000"/>
+              </a:spcBef>
+              <a:spcAft>
+                <a:spcPct val="0"/>
+              </a:spcAft>
+              <a:buClr>
+                <a:schemeClr val="accent2"/>
+              </a:buClr>
+              <a:buSzPct val="60000"/>
+              <a:buFont typeface="Wingdings" pitchFamily="2" charset="2"/>
+              <a:buChar char="q"/>
+              <a:defRPr kumimoji="1" sz="2800">
+                <a:solidFill>
+                  <a:schemeClr val="tx1"/>
+                </a:solidFill>
+                <a:latin typeface="+mn-lt"/>
+                <a:ea typeface="+mn-ea"/>
+              </a:defRPr>
+            </a:lvl2pPr>
+            <a:lvl3pPr marL="1022350" indent="-350838" algn="l" rtl="0" eaLnBrk="1" fontAlgn="base" hangingPunct="1">
+              <a:spcBef>
+                <a:spcPct val="20000"/>
+              </a:spcBef>
+              <a:spcAft>
+                <a:spcPct val="0"/>
+              </a:spcAft>
+              <a:buClr>
+                <a:schemeClr val="accent1"/>
+              </a:buClr>
+              <a:buSzPct val="65000"/>
+              <a:buFont typeface="Wingdings" pitchFamily="2" charset="2"/>
+              <a:buChar char="n"/>
+              <a:defRPr kumimoji="1" sz="2400">
+                <a:solidFill>
+                  <a:schemeClr val="tx1"/>
+                </a:solidFill>
+                <a:latin typeface="+mn-lt"/>
+                <a:ea typeface="+mn-ea"/>
+              </a:defRPr>
+            </a:lvl3pPr>
+            <a:lvl4pPr marL="1339850" indent="-315913" algn="l" rtl="0" eaLnBrk="1" fontAlgn="base" hangingPunct="1">
+              <a:spcBef>
+                <a:spcPct val="20000"/>
+              </a:spcBef>
+              <a:spcAft>
+                <a:spcPct val="0"/>
+              </a:spcAft>
+              <a:buClr>
+                <a:schemeClr val="accent2"/>
+              </a:buClr>
+              <a:buSzPct val="70000"/>
+              <a:buFont typeface="Wingdings" pitchFamily="2" charset="2"/>
+              <a:buChar char="q"/>
+              <a:defRPr kumimoji="1" sz="2000">
+                <a:solidFill>
+                  <a:schemeClr val="tx1"/>
+                </a:solidFill>
+                <a:latin typeface="+mn-lt"/>
+                <a:ea typeface="+mn-ea"/>
+              </a:defRPr>
+            </a:lvl4pPr>
+            <a:lvl5pPr marL="1681163" indent="-339725" algn="l" rtl="0" eaLnBrk="1" fontAlgn="base" hangingPunct="1">
+              <a:spcBef>
+                <a:spcPct val="20000"/>
+              </a:spcBef>
+              <a:spcAft>
+                <a:spcPct val="0"/>
+              </a:spcAft>
+              <a:buClr>
+                <a:schemeClr val="accent1"/>
+              </a:buClr>
+              <a:buSzPct val="75000"/>
+              <a:buFont typeface="Wingdings" pitchFamily="2" charset="2"/>
+              <a:buChar char="§"/>
+              <a:defRPr kumimoji="1">
+                <a:solidFill>
+                  <a:schemeClr val="tx1"/>
+                </a:solidFill>
+                <a:latin typeface="+mn-lt"/>
+                <a:ea typeface="+mn-ea"/>
+              </a:defRPr>
+            </a:lvl5pPr>
+            <a:lvl6pPr marL="2138363" indent="-339725" algn="l" rtl="0" eaLnBrk="1" fontAlgn="base" hangingPunct="1">
+              <a:spcBef>
+                <a:spcPct val="20000"/>
+              </a:spcBef>
+              <a:spcAft>
+                <a:spcPct val="0"/>
+              </a:spcAft>
+              <a:buClr>
+                <a:schemeClr val="accent1"/>
+              </a:buClr>
+              <a:buSzPct val="75000"/>
+              <a:buFont typeface="Wingdings" pitchFamily="2" charset="2"/>
+              <a:buChar char="§"/>
+              <a:defRPr kumimoji="1">
+                <a:solidFill>
+                  <a:schemeClr val="tx1"/>
+                </a:solidFill>
+                <a:latin typeface="+mn-lt"/>
+                <a:ea typeface="+mn-ea"/>
+              </a:defRPr>
+            </a:lvl6pPr>
+            <a:lvl7pPr marL="2595563" indent="-339725" algn="l" rtl="0" eaLnBrk="1" fontAlgn="base" hangingPunct="1">
+              <a:spcBef>
+                <a:spcPct val="20000"/>
+              </a:spcBef>
+              <a:spcAft>
+                <a:spcPct val="0"/>
+              </a:spcAft>
+              <a:buClr>
+                <a:schemeClr val="accent1"/>
+              </a:buClr>
+              <a:buSzPct val="75000"/>
+              <a:buFont typeface="Wingdings" pitchFamily="2" charset="2"/>
+              <a:buChar char="§"/>
+              <a:defRPr kumimoji="1">
+                <a:solidFill>
+                  <a:schemeClr val="tx1"/>
+                </a:solidFill>
+                <a:latin typeface="+mn-lt"/>
+                <a:ea typeface="+mn-ea"/>
+              </a:defRPr>
+            </a:lvl7pPr>
+            <a:lvl8pPr marL="3052763" indent="-339725" algn="l" rtl="0" eaLnBrk="1" fontAlgn="base" hangingPunct="1">
+              <a:spcBef>
+                <a:spcPct val="20000"/>
+              </a:spcBef>
+              <a:spcAft>
+                <a:spcPct val="0"/>
+              </a:spcAft>
+              <a:buClr>
+                <a:schemeClr val="accent1"/>
+              </a:buClr>
+              <a:buSzPct val="75000"/>
+              <a:buFont typeface="Wingdings" pitchFamily="2" charset="2"/>
+              <a:buChar char="§"/>
+              <a:defRPr kumimoji="1">
+                <a:solidFill>
+                  <a:schemeClr val="tx1"/>
+                </a:solidFill>
+                <a:latin typeface="+mn-lt"/>
+                <a:ea typeface="+mn-ea"/>
+              </a:defRPr>
+            </a:lvl8pPr>
+            <a:lvl9pPr marL="3509963" indent="-339725" algn="l" rtl="0" eaLnBrk="1" fontAlgn="base" hangingPunct="1">
+              <a:spcBef>
+                <a:spcPct val="20000"/>
+              </a:spcBef>
+              <a:spcAft>
+                <a:spcPct val="0"/>
+              </a:spcAft>
+              <a:buClr>
+                <a:schemeClr val="accent1"/>
+              </a:buClr>
+              <a:buSzPct val="75000"/>
+              <a:buFont typeface="Wingdings" pitchFamily="2" charset="2"/>
+              <a:buChar char="§"/>
+              <a:defRPr kumimoji="1">
+                <a:solidFill>
+                  <a:schemeClr val="tx1"/>
+                </a:solidFill>
+                <a:latin typeface="+mn-lt"/>
+                <a:ea typeface="+mn-ea"/>
+              </a:defRPr>
+            </a:lvl9pPr>
+          </a:lstStyle>
+          <a:p>
+            <a:r>
+              <a:rPr lang="ja-JP" altLang="en-US" sz="2400" kern="0" dirty="0"/>
+              <a:t>図を表示</a:t>
+            </a:r>
+            <a:endParaRPr lang="en-US" altLang="ja-JP" sz="2400" kern="0" dirty="0"/>
+          </a:p>
+          <a:p>
+            <a:r>
+              <a:rPr lang="ja-JP" altLang="en-US" sz="2400" kern="0" dirty="0"/>
+              <a:t>図を保存</a:t>
+            </a:r>
+            <a:endParaRPr lang="en-US" altLang="ja-JP" sz="2400" kern="0" dirty="0"/>
+          </a:p>
+          <a:p>
+            <a:pPr marL="0" indent="0">
+              <a:buNone/>
+            </a:pPr>
+            <a:r>
+              <a:rPr lang="en-US" altLang="ja-JP" sz="2400" kern="0" dirty="0"/>
+              <a:t>   </a:t>
+            </a:r>
+            <a:r>
+              <a:rPr lang="en-US" altLang="ja-JP" sz="1800" kern="0" dirty="0" err="1">
+                <a:solidFill>
+                  <a:schemeClr val="accent3">
+                    <a:lumMod val="50000"/>
+                  </a:schemeClr>
+                </a:solidFill>
+              </a:rPr>
+              <a:t>png</a:t>
+            </a:r>
+            <a:r>
+              <a:rPr lang="ja-JP" altLang="en-US" sz="1800" kern="0" dirty="0">
+                <a:solidFill>
+                  <a:schemeClr val="accent3">
+                    <a:lumMod val="50000"/>
+                  </a:schemeClr>
+                </a:solidFill>
+              </a:rPr>
+              <a:t>形式、</a:t>
+            </a:r>
+            <a:r>
+              <a:rPr lang="en-US" altLang="ja-JP" sz="1800" kern="0" dirty="0">
+                <a:solidFill>
+                  <a:schemeClr val="accent3">
+                    <a:lumMod val="50000"/>
+                  </a:schemeClr>
+                </a:solidFill>
+              </a:rPr>
+              <a:t>jpg</a:t>
+            </a:r>
+            <a:r>
+              <a:rPr lang="ja-JP" altLang="en-US" sz="1800" kern="0" dirty="0">
+                <a:solidFill>
+                  <a:schemeClr val="accent3">
+                    <a:lumMod val="50000"/>
+                  </a:schemeClr>
+                </a:solidFill>
+              </a:rPr>
+              <a:t>形式の２パターンで保存</a:t>
+            </a:r>
+            <a:endParaRPr lang="en-US" altLang="ja-JP" sz="2400" kern="0" dirty="0"/>
+          </a:p>
+          <a:p>
+            <a:pPr marL="0" indent="0">
+              <a:buNone/>
+            </a:pPr>
+            <a:endParaRPr lang="en-US" altLang="ja-JP" sz="2400" kern="0" dirty="0"/>
+          </a:p>
+        </p:txBody>
+      </p:sp>
+      <p:sp>
+        <p:nvSpPr>
+          <p:cNvPr id="2" name="タイトル 1">
+            <a:extLst>
+              <a:ext uri="{FF2B5EF4-FFF2-40B4-BE49-F238E27FC236}">
+                <a16:creationId xmlns:a16="http://schemas.microsoft.com/office/drawing/2014/main" id="{24908C1C-E1BE-7B66-9AE3-98D91F134D10}"/>
+              </a:ext>
+            </a:extLst>
+          </p:cNvPr>
+          <p:cNvSpPr>
+            <a:spLocks noGrp="1"/>
+          </p:cNvSpPr>
+          <p:nvPr>
+            <p:ph type="title"/>
+          </p:nvPr>
+        </p:nvSpPr>
+        <p:spPr/>
+        <p:txBody>
+          <a:bodyPr/>
+          <a:lstStyle/>
+          <a:p>
+            <a:r>
+              <a:rPr kumimoji="1" lang="en-US" altLang="ja-JP" dirty="0" err="1"/>
+              <a:t>random_plot.ipynb</a:t>
+            </a:r>
+            <a:endParaRPr kumimoji="1" lang="ja-JP" altLang="en-US" dirty="0"/>
+          </a:p>
+        </p:txBody>
+      </p:sp>
+      <p:graphicFrame>
+        <p:nvGraphicFramePr>
+          <p:cNvPr id="8" name="表 7">
+            <a:extLst>
+              <a:ext uri="{FF2B5EF4-FFF2-40B4-BE49-F238E27FC236}">
+                <a16:creationId xmlns:a16="http://schemas.microsoft.com/office/drawing/2014/main" id="{2BB8C37D-34E4-940C-5C11-2E0CC3E5957B}"/>
+              </a:ext>
+            </a:extLst>
+          </p:cNvPr>
+          <p:cNvGraphicFramePr>
+            <a:graphicFrameLocks noGrp="1"/>
+          </p:cNvGraphicFramePr>
+          <p:nvPr/>
+        </p:nvGraphicFramePr>
+        <p:xfrm>
+          <a:off x="5676044" y="4923174"/>
+          <a:ext cx="4749737" cy="1463040"/>
+        </p:xfrm>
+        <a:graphic>
+          <a:graphicData uri="http://schemas.openxmlformats.org/drawingml/2006/table">
+            <a:tbl>
+              <a:tblPr firstRow="1" firstCol="1" bandRow="1">
+                <a:tableStyleId>{21E4AEA4-8DFA-4A89-87EB-49C32662AFE0}</a:tableStyleId>
+              </a:tblPr>
+              <a:tblGrid>
+                <a:gridCol w="1099894">
+                  <a:extLst>
+                    <a:ext uri="{9D8B030D-6E8A-4147-A177-3AD203B41FA5}">
+                      <a16:colId xmlns:a16="http://schemas.microsoft.com/office/drawing/2014/main" val="165235932"/>
+                    </a:ext>
+                  </a:extLst>
+                </a:gridCol>
+                <a:gridCol w="1981236">
+                  <a:extLst>
+                    <a:ext uri="{9D8B030D-6E8A-4147-A177-3AD203B41FA5}">
+                      <a16:colId xmlns:a16="http://schemas.microsoft.com/office/drawing/2014/main" val="1387312990"/>
+                    </a:ext>
+                  </a:extLst>
+                </a:gridCol>
+                <a:gridCol w="1668607">
+                  <a:extLst>
+                    <a:ext uri="{9D8B030D-6E8A-4147-A177-3AD203B41FA5}">
+                      <a16:colId xmlns:a16="http://schemas.microsoft.com/office/drawing/2014/main" val="2241803932"/>
+                    </a:ext>
+                  </a:extLst>
+                </a:gridCol>
+              </a:tblGrid>
+              <a:tr h="320922">
+                <a:tc>
+                  <a:txBody>
+                    <a:bodyPr/>
+                    <a:lstStyle/>
+                    <a:p>
+                      <a:endParaRPr kumimoji="1" lang="ja-JP" altLang="en-US" dirty="0"/>
+                    </a:p>
+                  </a:txBody>
+                  <a:tcPr/>
+                </a:tc>
+                <a:tc>
+                  <a:txBody>
+                    <a:bodyPr/>
+                    <a:lstStyle/>
+                    <a:p>
+                      <a:r>
+                        <a:rPr kumimoji="1" lang="en-US" altLang="ja-JP" dirty="0"/>
+                        <a:t>Python</a:t>
+                      </a:r>
+                      <a:endParaRPr kumimoji="1" lang="ja-JP" altLang="en-US" dirty="0"/>
+                    </a:p>
+                  </a:txBody>
+                  <a:tcPr/>
+                </a:tc>
+                <a:tc>
+                  <a:txBody>
+                    <a:bodyPr/>
+                    <a:lstStyle/>
+                    <a:p>
+                      <a:r>
+                        <a:rPr kumimoji="1" lang="en-US" altLang="ja-JP" dirty="0"/>
+                        <a:t>R</a:t>
+                      </a:r>
+                      <a:endParaRPr kumimoji="1" lang="ja-JP" altLang="en-US" dirty="0"/>
+                    </a:p>
+                  </a:txBody>
+                  <a:tcPr/>
+                </a:tc>
+                <a:extLst>
+                  <a:ext uri="{0D108BD9-81ED-4DB2-BD59-A6C34878D82A}">
+                    <a16:rowId xmlns:a16="http://schemas.microsoft.com/office/drawing/2014/main" val="12414329"/>
+                  </a:ext>
+                </a:extLst>
+              </a:tr>
+              <a:tr h="280807">
+                <a:tc>
+                  <a:txBody>
+                    <a:bodyPr/>
+                    <a:lstStyle/>
+                    <a:p>
+                      <a:r>
+                        <a:rPr kumimoji="1" lang="ja-JP" altLang="en-US" sz="1500" b="0" dirty="0">
+                          <a:solidFill>
+                            <a:schemeClr val="tx1"/>
+                          </a:solidFill>
+                        </a:rPr>
+                        <a:t>図の表示</a:t>
+                      </a:r>
+                    </a:p>
+                  </a:txBody>
+                  <a:tcPr>
+                    <a:solidFill>
+                      <a:schemeClr val="bg2">
+                        <a:lumMod val="20000"/>
+                        <a:lumOff val="80000"/>
+                      </a:schemeClr>
+                    </a:solidFill>
+                  </a:tcPr>
+                </a:tc>
+                <a:tc>
+                  <a:txBody>
+                    <a:bodyPr/>
+                    <a:lstStyle/>
+                    <a:p>
+                      <a:r>
+                        <a:rPr kumimoji="1" lang="en-US" altLang="ja-JP" sz="1500" dirty="0" err="1"/>
+                        <a:t>plt.show</a:t>
+                      </a:r>
+                      <a:endParaRPr kumimoji="1" lang="ja-JP" altLang="en-US" sz="1500" dirty="0"/>
+                    </a:p>
+                  </a:txBody>
+                  <a:tcPr/>
+                </a:tc>
+                <a:tc>
+                  <a:txBody>
+                    <a:bodyPr/>
+                    <a:lstStyle/>
+                    <a:p>
+                      <a:r>
+                        <a:rPr kumimoji="1" lang="ja-JP" altLang="en-US" sz="1500" dirty="0"/>
+                        <a:t>自動表示</a:t>
+                      </a:r>
+                      <a:endParaRPr kumimoji="1" lang="en-US" altLang="ja-JP" sz="1500" dirty="0"/>
+                    </a:p>
+                  </a:txBody>
+                  <a:tcPr/>
+                </a:tc>
+                <a:extLst>
+                  <a:ext uri="{0D108BD9-81ED-4DB2-BD59-A6C34878D82A}">
+                    <a16:rowId xmlns:a16="http://schemas.microsoft.com/office/drawing/2014/main" val="1531238374"/>
+                  </a:ext>
+                </a:extLst>
+              </a:tr>
+              <a:tr h="280807">
+                <a:tc>
+                  <a:txBody>
+                    <a:bodyPr/>
+                    <a:lstStyle/>
+                    <a:p>
+                      <a:r>
+                        <a:rPr kumimoji="1" lang="ja-JP" altLang="en-US" sz="1500" b="0" dirty="0">
+                          <a:solidFill>
+                            <a:schemeClr val="tx1"/>
+                          </a:solidFill>
+                        </a:rPr>
+                        <a:t>図の保存</a:t>
+                      </a:r>
+                    </a:p>
+                  </a:txBody>
+                  <a:tcPr>
+                    <a:solidFill>
+                      <a:schemeClr val="bg2">
+                        <a:lumMod val="20000"/>
+                        <a:lumOff val="80000"/>
+                      </a:schemeClr>
+                    </a:solidFill>
+                  </a:tcPr>
+                </a:tc>
+                <a:tc>
+                  <a:txBody>
+                    <a:bodyPr/>
+                    <a:lstStyle/>
+                    <a:p>
+                      <a:r>
+                        <a:rPr kumimoji="1" lang="en-US" altLang="ja-JP" sz="1500" dirty="0" err="1"/>
+                        <a:t>fig.saving</a:t>
+                      </a:r>
+                      <a:r>
+                        <a:rPr kumimoji="1" lang="en-US" altLang="ja-JP" sz="1500" dirty="0"/>
+                        <a:t>(“</a:t>
+                      </a:r>
+                      <a:r>
+                        <a:rPr kumimoji="1" lang="ja-JP" altLang="en-US" sz="1500" dirty="0"/>
+                        <a:t>図の名称</a:t>
+                      </a:r>
+                      <a:r>
+                        <a:rPr kumimoji="1" lang="en-US" altLang="ja-JP" sz="1500" dirty="0"/>
+                        <a:t>”)</a:t>
+                      </a:r>
+                      <a:endParaRPr kumimoji="1" lang="ja-JP" altLang="en-US" sz="1500" dirty="0"/>
+                    </a:p>
+                  </a:txBody>
+                  <a:tcPr/>
+                </a:tc>
+                <a:tc>
+                  <a:txBody>
+                    <a:bodyPr/>
+                    <a:lstStyle/>
+                    <a:p>
+                      <a:r>
+                        <a:rPr kumimoji="1" lang="en-US" altLang="ja-JP" sz="1500" dirty="0" err="1"/>
+                        <a:t>png</a:t>
+                      </a:r>
+                      <a:r>
+                        <a:rPr kumimoji="1" lang="en-US" altLang="ja-JP" sz="1500" dirty="0"/>
+                        <a:t>(“</a:t>
+                      </a:r>
+                      <a:r>
+                        <a:rPr kumimoji="1" lang="ja-JP" altLang="en-US" sz="1500" dirty="0"/>
+                        <a:t>図の名称</a:t>
+                      </a:r>
+                      <a:r>
+                        <a:rPr kumimoji="1" lang="en-US" altLang="ja-JP" sz="1500" dirty="0"/>
+                        <a:t>”)</a:t>
+                      </a:r>
+                    </a:p>
+                    <a:p>
+                      <a:r>
+                        <a:rPr kumimoji="1" lang="ja-JP" altLang="en-US" sz="1500" dirty="0"/>
+                        <a:t>図</a:t>
+                      </a:r>
+                      <a:endParaRPr kumimoji="1" lang="en-US" altLang="ja-JP" sz="1500" dirty="0"/>
+                    </a:p>
+                    <a:p>
+                      <a:r>
+                        <a:rPr kumimoji="1" lang="en-US" altLang="ja-JP" sz="1500" dirty="0" err="1"/>
+                        <a:t>dev.off</a:t>
+                      </a:r>
+                      <a:r>
+                        <a:rPr kumimoji="1" lang="en-US" altLang="ja-JP" sz="1500" dirty="0"/>
+                        <a:t>()</a:t>
+                      </a:r>
+                    </a:p>
+                  </a:txBody>
+                  <a:tcPr/>
+                </a:tc>
+                <a:extLst>
+                  <a:ext uri="{0D108BD9-81ED-4DB2-BD59-A6C34878D82A}">
+                    <a16:rowId xmlns:a16="http://schemas.microsoft.com/office/drawing/2014/main" val="3835439253"/>
+                  </a:ext>
+                </a:extLst>
+              </a:tr>
+            </a:tbl>
+          </a:graphicData>
+        </a:graphic>
+      </p:graphicFrame>
+      <p:sp>
+        <p:nvSpPr>
+          <p:cNvPr id="14" name="正方形/長方形 13">
+            <a:extLst>
+              <a:ext uri="{FF2B5EF4-FFF2-40B4-BE49-F238E27FC236}">
+                <a16:creationId xmlns:a16="http://schemas.microsoft.com/office/drawing/2014/main" id="{A082B75C-8B32-C889-B5AA-7E197128E2D2}"/>
+              </a:ext>
+            </a:extLst>
+          </p:cNvPr>
+          <p:cNvSpPr/>
+          <p:nvPr/>
+        </p:nvSpPr>
+        <p:spPr bwMode="auto">
+          <a:xfrm>
+            <a:off x="6272773" y="2138453"/>
+            <a:ext cx="2060263" cy="1136442"/>
+          </a:xfrm>
+          <a:prstGeom prst="rect">
+            <a:avLst/>
+          </a:prstGeom>
+          <a:solidFill>
+            <a:schemeClr val="accent5">
+              <a:lumMod val="40000"/>
+              <a:lumOff val="60000"/>
+            </a:schemeClr>
+          </a:solidFill>
+          <a:ln w="9525" cap="flat" cmpd="sng" algn="ctr">
+            <a:noFill/>
+            <a:prstDash val="solid"/>
+            <a:miter lim="800000"/>
+            <a:headEnd type="none" w="med" len="med"/>
+            <a:tailEnd type="none" w="med" len="med"/>
+          </a:ln>
+          <a:effectLst/>
+        </p:spPr>
+        <p:txBody>
+          <a:bodyPr vert="horz" wrap="none" lIns="91440" tIns="45720" rIns="91440" bIns="45720" numCol="1" rtlCol="0" anchor="t" anchorCtr="0" compatLnSpc="1">
+            <a:prstTxWarp prst="textNoShape">
+              <a:avLst/>
+            </a:prstTxWarp>
+          </a:bodyPr>
+          <a:lstStyle/>
+          <a:p>
+            <a:pPr marL="0" marR="0" indent="0" defTabSz="914400" rtl="0" eaLnBrk="1" fontAlgn="base" latinLnBrk="0" hangingPunct="1">
+              <a:spcBef>
+                <a:spcPct val="0"/>
+              </a:spcBef>
+              <a:spcAft>
+                <a:spcPct val="0"/>
+              </a:spcAft>
+              <a:buClrTx/>
+              <a:buSzTx/>
+              <a:buFontTx/>
+              <a:buNone/>
+              <a:tabLst/>
+            </a:pPr>
+            <a:r>
+              <a:rPr kumimoji="1" lang="en-US" altLang="ja-JP" sz="1500" b="0" i="0" u="none" strike="noStrike" cap="none" normalizeH="0" baseline="0" dirty="0">
+                <a:ln>
+                  <a:noFill/>
+                </a:ln>
+                <a:solidFill>
+                  <a:schemeClr val="accent5">
+                    <a:lumMod val="50000"/>
+                  </a:schemeClr>
+                </a:solidFill>
+                <a:effectLst/>
+                <a:latin typeface="Arial" charset="0"/>
+                <a:ea typeface="ＭＳ Ｐゴシック" pitchFamily="50" charset="-128"/>
+              </a:rPr>
+              <a:t>Python</a:t>
+            </a:r>
+            <a:endParaRPr kumimoji="1" lang="ja-JP" altLang="en-US" sz="1500" b="0" i="0" u="none" strike="noStrike" cap="none" normalizeH="0" baseline="0" dirty="0">
+              <a:ln>
+                <a:noFill/>
+              </a:ln>
+              <a:solidFill>
+                <a:schemeClr val="accent5">
+                  <a:lumMod val="50000"/>
+                </a:schemeClr>
+              </a:solidFill>
+              <a:effectLst/>
+              <a:latin typeface="Arial" charset="0"/>
+              <a:ea typeface="ＭＳ Ｐゴシック" pitchFamily="50" charset="-128"/>
+            </a:endParaRPr>
+          </a:p>
+        </p:txBody>
+      </p:sp>
+      <p:sp>
+        <p:nvSpPr>
+          <p:cNvPr id="16" name="正方形/長方形 15">
+            <a:extLst>
+              <a:ext uri="{FF2B5EF4-FFF2-40B4-BE49-F238E27FC236}">
+                <a16:creationId xmlns:a16="http://schemas.microsoft.com/office/drawing/2014/main" id="{E1056466-E41D-8B4C-8C91-CDACA1D6D7B1}"/>
+              </a:ext>
+            </a:extLst>
+          </p:cNvPr>
+          <p:cNvSpPr/>
+          <p:nvPr/>
+        </p:nvSpPr>
+        <p:spPr bwMode="auto">
+          <a:xfrm>
+            <a:off x="8415505" y="2138453"/>
+            <a:ext cx="1780322" cy="1136442"/>
+          </a:xfrm>
+          <a:prstGeom prst="rect">
+            <a:avLst/>
+          </a:prstGeom>
+          <a:solidFill>
+            <a:schemeClr val="accent3">
+              <a:lumMod val="85000"/>
+            </a:schemeClr>
+          </a:solidFill>
+          <a:ln w="9525" cap="flat" cmpd="sng" algn="ctr">
+            <a:noFill/>
+            <a:prstDash val="solid"/>
+            <a:miter lim="800000"/>
+            <a:headEnd type="none" w="med" len="med"/>
+            <a:tailEnd type="none" w="med" len="med"/>
+          </a:ln>
+          <a:effectLst/>
+        </p:spPr>
+        <p:txBody>
+          <a:bodyPr vert="horz" wrap="none" lIns="91440" tIns="45720" rIns="91440" bIns="45720" numCol="1" rtlCol="0" anchor="t" anchorCtr="0" compatLnSpc="1">
+            <a:prstTxWarp prst="textNoShape">
+              <a:avLst/>
+            </a:prstTxWarp>
+          </a:bodyPr>
+          <a:lstStyle/>
+          <a:p>
+            <a:pPr marL="0" marR="0" indent="0" defTabSz="914400" rtl="0" eaLnBrk="1" fontAlgn="base" latinLnBrk="0" hangingPunct="1">
+              <a:spcBef>
+                <a:spcPct val="0"/>
+              </a:spcBef>
+              <a:spcAft>
+                <a:spcPct val="0"/>
+              </a:spcAft>
+              <a:buClrTx/>
+              <a:buSzTx/>
+              <a:buFontTx/>
+              <a:buNone/>
+              <a:tabLst/>
+            </a:pPr>
+            <a:r>
+              <a:rPr lang="en-US" altLang="ja-JP" sz="1500" dirty="0">
+                <a:solidFill>
+                  <a:schemeClr val="accent4">
+                    <a:lumMod val="65000"/>
+                    <a:lumOff val="35000"/>
+                  </a:schemeClr>
+                </a:solidFill>
+                <a:latin typeface="Arial" charset="0"/>
+                <a:ea typeface="ＭＳ Ｐゴシック" pitchFamily="50" charset="-128"/>
+              </a:rPr>
+              <a:t>R</a:t>
+            </a:r>
+          </a:p>
+        </p:txBody>
+      </p:sp>
+    </p:spTree>
+    <p:extLst>
+      <p:ext uri="{BB962C8B-B14F-4D97-AF65-F5344CB8AC3E}">
+        <p14:creationId xmlns:p14="http://schemas.microsoft.com/office/powerpoint/2010/main" val="1509753501"/>
+      </p:ext>
+    </p:extLst>
+  </p:cSld>
+  <p:clrMapOvr>
+    <a:masterClrMapping/>
+  </p:clrMapOvr>
+</p:sld>
+</file>
+
+<file path=ppt/slides/slide19.xml><?xml version="1.0" encoding="utf-8"?>
 <p:sld xmlns:a="http://schemas.openxmlformats.org/drawingml/2006/main" xmlns:r="http://schemas.openxmlformats.org/officeDocument/2006/relationships" xmlns:p="http://schemas.openxmlformats.org/presentationml/2006/main">
   <p:cSld>
     <p:spTree>
